--- a/docs/汇报_swiss.pptx
+++ b/docs/汇报_swiss.pptx
@@ -1,21 +1,24 @@
 
 <file path=ppt/presentation.xml><?xml version="1.0" encoding="utf-8"?>
-<p:presentation xmlns:a="http://schemas.openxmlformats.org/drawingml/2006/main" xmlns:r="http://schemas.openxmlformats.org/officeDocument/2006/relationships" xmlns:p="http://schemas.openxmlformats.org/presentationml/2006/main" saveSubsetFonts="1" autoCompressPictures="0">
+<p:presentation xmlns:a="http://schemas.openxmlformats.org/drawingml/2006/main" xmlns:r="http://schemas.openxmlformats.org/officeDocument/2006/relationships" xmlns:p="http://schemas.openxmlformats.org/presentationml/2006/main" autoCompressPictures="0">
   <p:sldMasterIdLst>
     <p:sldMasterId id="2147483648" r:id="rId1"/>
   </p:sldMasterIdLst>
+  <p:notesMasterIdLst>
+    <p:notesMasterId r:id="rId8"/>
+  </p:notesMasterIdLst>
   <p:sldIdLst>
-    <p:sldId id="256" r:id="rId7"/>
-    <p:sldId id="257" r:id="rId8"/>
-    <p:sldId id="258" r:id="rId9"/>
-    <p:sldId id="259" r:id="rId10"/>
-    <p:sldId id="260" r:id="rId11"/>
-    <p:sldId id="261" r:id="rId12"/>
-    <p:sldId id="262" r:id="rId13"/>
-    <p:sldId id="263" r:id="rId14"/>
-    <p:sldId id="264" r:id="rId15"/>
-    <p:sldId id="265" r:id="rId16"/>
-    <p:sldId id="266" r:id="rId17"/>
+    <p:sldId id="256" r:id="rId3"/>
+    <p:sldId id="257" r:id="rId4"/>
+    <p:sldId id="258" r:id="rId5"/>
+    <p:sldId id="259" r:id="rId6"/>
+    <p:sldId id="260" r:id="rId7"/>
+    <p:sldId id="261" r:id="rId9"/>
+    <p:sldId id="262" r:id="rId10"/>
+    <p:sldId id="263" r:id="rId11"/>
+    <p:sldId id="264" r:id="rId12"/>
+    <p:sldId id="265" r:id="rId13"/>
+    <p:sldId id="266" r:id="rId14"/>
   </p:sldIdLst>
   <p:sldSz cx="12192000" cy="6858000" type="screen4x3"/>
   <p:notesSz cx="6858000" cy="9144000"/>
@@ -114,11 +117,422 @@
       </a:defRPr>
     </a:lvl9pPr>
   </p:defaultTextStyle>
+  <p:extLst>
+    <p:ext uri="{EFAFB233-063F-42B5-8137-9DF3F51BA10A}">
+      <p15:sldGuideLst xmlns:p15="http://schemas.microsoft.com/office/powerpoint/2012/main">
+        <p15:guide id="1" orient="horz" pos="2130" userDrawn="1">
+          <p15:clr>
+            <a:srgbClr val="A4A3A4"/>
+          </p15:clr>
+        </p15:guide>
+        <p15:guide id="2" pos="2844" userDrawn="1">
+          <p15:clr>
+            <a:srgbClr val="A4A3A4"/>
+          </p15:clr>
+        </p15:guide>
+      </p15:sldGuideLst>
+    </p:ext>
+  </p:extLst>
 </p:presentation>
 </file>
 
-<file path=ppt/slideLayouts/slideLayout7.xml><?xml version="1.0" encoding="utf-8"?>
-<p:sldLayout xmlns:a="http://schemas.openxmlformats.org/drawingml/2006/main" xmlns:p="http://schemas.openxmlformats.org/presentationml/2006/main" type="blank" preserve="1">
+<file path=ppt/notesMasters/notesMaster1.xml><?xml version="1.0" encoding="utf-8"?>
+<p:notesMaster xmlns:a="http://schemas.openxmlformats.org/drawingml/2006/main" xmlns:r="http://schemas.openxmlformats.org/officeDocument/2006/relationships" xmlns:p="http://schemas.openxmlformats.org/presentationml/2006/main">
+  <p:cSld>
+    <p:bg>
+      <p:bgRef idx="1001">
+        <a:schemeClr val="bg1"/>
+      </p:bgRef>
+    </p:bg>
+    <p:spTree>
+      <p:nvGrpSpPr>
+        <p:cNvPr id="1" name=""/>
+        <p:cNvGrpSpPr/>
+        <p:nvPr/>
+      </p:nvGrpSpPr>
+      <p:grpSpPr>
+        <a:xfrm>
+          <a:off x="0" y="0"/>
+          <a:ext cx="0" cy="0"/>
+          <a:chOff x="0" y="0"/>
+          <a:chExt cx="0" cy="0"/>
+        </a:xfrm>
+      </p:grpSpPr>
+      <p:sp>
+        <p:nvSpPr>
+          <p:cNvPr id="2" name="页眉占位符 1"/>
+          <p:cNvSpPr>
+            <a:spLocks noGrp="1"/>
+          </p:cNvSpPr>
+          <p:nvPr>
+            <p:ph type="hdr" sz="quarter"/>
+          </p:nvPr>
+        </p:nvSpPr>
+        <p:spPr>
+          <a:xfrm>
+            <a:off x="0" y="0"/>
+            <a:ext cx="2971800" cy="458788"/>
+          </a:xfrm>
+          <a:prstGeom prst="rect">
+            <a:avLst/>
+          </a:prstGeom>
+        </p:spPr>
+        <p:txBody>
+          <a:bodyPr vert="horz" lIns="91440" tIns="45720" rIns="91440" bIns="45720" rtlCol="0"/>
+          <a:lstStyle>
+            <a:lvl1pPr algn="l">
+              <a:defRPr sz="1200"/>
+            </a:lvl1pPr>
+          </a:lstStyle>
+          <a:p>
+            <a:endParaRPr lang="zh-CN" altLang="en-US"/>
+          </a:p>
+        </p:txBody>
+      </p:sp>
+      <p:sp>
+        <p:nvSpPr>
+          <p:cNvPr id="3" name="日期占位符 2"/>
+          <p:cNvSpPr>
+            <a:spLocks noGrp="1"/>
+          </p:cNvSpPr>
+          <p:nvPr>
+            <p:ph type="dt" idx="1"/>
+          </p:nvPr>
+        </p:nvSpPr>
+        <p:spPr>
+          <a:xfrm>
+            <a:off x="3884613" y="0"/>
+            <a:ext cx="2971800" cy="458788"/>
+          </a:xfrm>
+          <a:prstGeom prst="rect">
+            <a:avLst/>
+          </a:prstGeom>
+        </p:spPr>
+        <p:txBody>
+          <a:bodyPr vert="horz" lIns="91440" tIns="45720" rIns="91440" bIns="45720" rtlCol="0"/>
+          <a:lstStyle>
+            <a:lvl1pPr algn="r">
+              <a:defRPr sz="1200"/>
+            </a:lvl1pPr>
+          </a:lstStyle>
+          <a:p>
+            <a:fld id="{D2A48B96-639E-45A3-A0BA-2464DFDB1FAA}" type="datetimeFigureOut">
+              <a:rPr lang="zh-CN" altLang="en-US" smtClean="0"/>
+            </a:fld>
+            <a:endParaRPr lang="zh-CN" altLang="en-US"/>
+          </a:p>
+        </p:txBody>
+      </p:sp>
+      <p:sp>
+        <p:nvSpPr>
+          <p:cNvPr id="4" name="幻灯片图像占位符 3"/>
+          <p:cNvSpPr>
+            <a:spLocks noGrp="1" noRot="1" noChangeAspect="1"/>
+          </p:cNvSpPr>
+          <p:nvPr>
+            <p:ph type="sldImg" idx="2"/>
+          </p:nvPr>
+        </p:nvSpPr>
+        <p:spPr>
+          <a:xfrm>
+            <a:off x="685800" y="1143000"/>
+            <a:ext cx="5486400" cy="3086100"/>
+          </a:xfrm>
+          <a:prstGeom prst="rect">
+            <a:avLst/>
+          </a:prstGeom>
+          <a:noFill/>
+          <a:ln w="12700">
+            <a:solidFill>
+              <a:prstClr val="black"/>
+            </a:solidFill>
+          </a:ln>
+        </p:spPr>
+        <p:txBody>
+          <a:bodyPr vert="horz" lIns="91440" tIns="45720" rIns="91440" bIns="45720" rtlCol="0" anchor="ctr"/>
+          <a:lstStyle/>
+          <a:p>
+            <a:endParaRPr lang="zh-CN" altLang="en-US"/>
+          </a:p>
+        </p:txBody>
+      </p:sp>
+      <p:sp>
+        <p:nvSpPr>
+          <p:cNvPr id="5" name="备注占位符 4"/>
+          <p:cNvSpPr>
+            <a:spLocks noGrp="1"/>
+          </p:cNvSpPr>
+          <p:nvPr>
+            <p:ph type="body" sz="quarter" idx="3"/>
+          </p:nvPr>
+        </p:nvSpPr>
+        <p:spPr>
+          <a:xfrm>
+            <a:off x="685800" y="4400550"/>
+            <a:ext cx="5486400" cy="3600450"/>
+          </a:xfrm>
+          <a:prstGeom prst="rect">
+            <a:avLst/>
+          </a:prstGeom>
+        </p:spPr>
+        <p:txBody>
+          <a:bodyPr vert="horz" lIns="91440" tIns="45720" rIns="91440" bIns="45720" rtlCol="0"/>
+          <a:lstStyle/>
+          <a:p>
+            <a:pPr lvl="0"/>
+            <a:r>
+              <a:rPr lang="zh-CN" altLang="en-US" smtClean="0"/>
+              <a:t>单击此处编辑母版文本样式</a:t>
+            </a:r>
+            <a:endParaRPr lang="zh-CN" altLang="en-US" smtClean="0"/>
+          </a:p>
+          <a:p>
+            <a:pPr lvl="1"/>
+            <a:r>
+              <a:rPr lang="zh-CN" altLang="en-US" smtClean="0"/>
+              <a:t>第二级</a:t>
+            </a:r>
+            <a:endParaRPr lang="zh-CN" altLang="en-US" smtClean="0"/>
+          </a:p>
+          <a:p>
+            <a:pPr lvl="2"/>
+            <a:r>
+              <a:rPr lang="zh-CN" altLang="en-US" smtClean="0"/>
+              <a:t>第三级</a:t>
+            </a:r>
+            <a:endParaRPr lang="zh-CN" altLang="en-US" smtClean="0"/>
+          </a:p>
+          <a:p>
+            <a:pPr lvl="3"/>
+            <a:r>
+              <a:rPr lang="zh-CN" altLang="en-US" smtClean="0"/>
+              <a:t>第四级</a:t>
+            </a:r>
+            <a:endParaRPr lang="zh-CN" altLang="en-US" smtClean="0"/>
+          </a:p>
+          <a:p>
+            <a:pPr lvl="4"/>
+            <a:r>
+              <a:rPr lang="zh-CN" altLang="en-US" smtClean="0"/>
+              <a:t>第五级</a:t>
+            </a:r>
+            <a:endParaRPr lang="zh-CN" altLang="en-US"/>
+          </a:p>
+        </p:txBody>
+      </p:sp>
+      <p:sp>
+        <p:nvSpPr>
+          <p:cNvPr id="6" name="页脚占位符 5"/>
+          <p:cNvSpPr>
+            <a:spLocks noGrp="1"/>
+          </p:cNvSpPr>
+          <p:nvPr>
+            <p:ph type="ftr" sz="quarter" idx="4"/>
+          </p:nvPr>
+        </p:nvSpPr>
+        <p:spPr>
+          <a:xfrm>
+            <a:off x="0" y="8685213"/>
+            <a:ext cx="2971800" cy="458787"/>
+          </a:xfrm>
+          <a:prstGeom prst="rect">
+            <a:avLst/>
+          </a:prstGeom>
+        </p:spPr>
+        <p:txBody>
+          <a:bodyPr vert="horz" lIns="91440" tIns="45720" rIns="91440" bIns="45720" rtlCol="0" anchor="b"/>
+          <a:lstStyle>
+            <a:lvl1pPr algn="l">
+              <a:defRPr sz="1200"/>
+            </a:lvl1pPr>
+          </a:lstStyle>
+          <a:p>
+            <a:endParaRPr lang="zh-CN" altLang="en-US"/>
+          </a:p>
+        </p:txBody>
+      </p:sp>
+      <p:sp>
+        <p:nvSpPr>
+          <p:cNvPr id="7" name="灯片编号占位符 6"/>
+          <p:cNvSpPr>
+            <a:spLocks noGrp="1"/>
+          </p:cNvSpPr>
+          <p:nvPr>
+            <p:ph type="sldNum" sz="quarter" idx="5"/>
+          </p:nvPr>
+        </p:nvSpPr>
+        <p:spPr>
+          <a:xfrm>
+            <a:off x="3884613" y="8685213"/>
+            <a:ext cx="2971800" cy="458787"/>
+          </a:xfrm>
+          <a:prstGeom prst="rect">
+            <a:avLst/>
+          </a:prstGeom>
+        </p:spPr>
+        <p:txBody>
+          <a:bodyPr vert="horz" lIns="91440" tIns="45720" rIns="91440" bIns="45720" rtlCol="0" anchor="b"/>
+          <a:lstStyle>
+            <a:lvl1pPr algn="r">
+              <a:defRPr sz="1200"/>
+            </a:lvl1pPr>
+          </a:lstStyle>
+          <a:p>
+            <a:fld id="{A6837353-30EB-4A48-80EB-173D804AEFBD}" type="slidenum">
+              <a:rPr lang="zh-CN" altLang="en-US" smtClean="0"/>
+            </a:fld>
+            <a:endParaRPr lang="zh-CN" altLang="en-US"/>
+          </a:p>
+        </p:txBody>
+      </p:sp>
+    </p:spTree>
+  </p:cSld>
+  <p:clrMap bg1="lt1" tx1="dk1" bg2="lt2" tx2="dk2" accent1="accent1" accent2="accent2" accent3="accent3" accent4="accent4" accent5="accent5" accent6="accent6" hlink="hlink" folHlink="folHlink"/>
+  <p:notesStyle>
+    <a:lvl1pPr marL="0" algn="l" defTabSz="914400" rtl="0" eaLnBrk="1" latinLnBrk="0" hangingPunct="1">
+      <a:defRPr sz="1200" kern="1200">
+        <a:solidFill>
+          <a:schemeClr val="tx1"/>
+        </a:solidFill>
+        <a:latin typeface="+mn-lt"/>
+        <a:ea typeface="+mn-ea"/>
+        <a:cs typeface="+mn-cs"/>
+      </a:defRPr>
+    </a:lvl1pPr>
+    <a:lvl2pPr marL="457200" algn="l" defTabSz="914400" rtl="0" eaLnBrk="1" latinLnBrk="0" hangingPunct="1">
+      <a:defRPr sz="1200" kern="1200">
+        <a:solidFill>
+          <a:schemeClr val="tx1"/>
+        </a:solidFill>
+        <a:latin typeface="+mn-lt"/>
+        <a:ea typeface="+mn-ea"/>
+        <a:cs typeface="+mn-cs"/>
+      </a:defRPr>
+    </a:lvl2pPr>
+    <a:lvl3pPr marL="914400" algn="l" defTabSz="914400" rtl="0" eaLnBrk="1" latinLnBrk="0" hangingPunct="1">
+      <a:defRPr sz="1200" kern="1200">
+        <a:solidFill>
+          <a:schemeClr val="tx1"/>
+        </a:solidFill>
+        <a:latin typeface="+mn-lt"/>
+        <a:ea typeface="+mn-ea"/>
+        <a:cs typeface="+mn-cs"/>
+      </a:defRPr>
+    </a:lvl3pPr>
+    <a:lvl4pPr marL="1371600" algn="l" defTabSz="914400" rtl="0" eaLnBrk="1" latinLnBrk="0" hangingPunct="1">
+      <a:defRPr sz="1200" kern="1200">
+        <a:solidFill>
+          <a:schemeClr val="tx1"/>
+        </a:solidFill>
+        <a:latin typeface="+mn-lt"/>
+        <a:ea typeface="+mn-ea"/>
+        <a:cs typeface="+mn-cs"/>
+      </a:defRPr>
+    </a:lvl4pPr>
+    <a:lvl5pPr marL="1828800" algn="l" defTabSz="914400" rtl="0" eaLnBrk="1" latinLnBrk="0" hangingPunct="1">
+      <a:defRPr sz="1200" kern="1200">
+        <a:solidFill>
+          <a:schemeClr val="tx1"/>
+        </a:solidFill>
+        <a:latin typeface="+mn-lt"/>
+        <a:ea typeface="+mn-ea"/>
+        <a:cs typeface="+mn-cs"/>
+      </a:defRPr>
+    </a:lvl5pPr>
+    <a:lvl6pPr marL="2286000" algn="l" defTabSz="914400" rtl="0" eaLnBrk="1" latinLnBrk="0" hangingPunct="1">
+      <a:defRPr sz="1200" kern="1200">
+        <a:solidFill>
+          <a:schemeClr val="tx1"/>
+        </a:solidFill>
+        <a:latin typeface="+mn-lt"/>
+        <a:ea typeface="+mn-ea"/>
+        <a:cs typeface="+mn-cs"/>
+      </a:defRPr>
+    </a:lvl6pPr>
+    <a:lvl7pPr marL="2743200" algn="l" defTabSz="914400" rtl="0" eaLnBrk="1" latinLnBrk="0" hangingPunct="1">
+      <a:defRPr sz="1200" kern="1200">
+        <a:solidFill>
+          <a:schemeClr val="tx1"/>
+        </a:solidFill>
+        <a:latin typeface="+mn-lt"/>
+        <a:ea typeface="+mn-ea"/>
+        <a:cs typeface="+mn-cs"/>
+      </a:defRPr>
+    </a:lvl7pPr>
+    <a:lvl8pPr marL="3200400" algn="l" defTabSz="914400" rtl="0" eaLnBrk="1" latinLnBrk="0" hangingPunct="1">
+      <a:defRPr sz="1200" kern="1200">
+        <a:solidFill>
+          <a:schemeClr val="tx1"/>
+        </a:solidFill>
+        <a:latin typeface="+mn-lt"/>
+        <a:ea typeface="+mn-ea"/>
+        <a:cs typeface="+mn-cs"/>
+      </a:defRPr>
+    </a:lvl8pPr>
+    <a:lvl9pPr marL="3657600" algn="l" defTabSz="914400" rtl="0" eaLnBrk="1" latinLnBrk="0" hangingPunct="1">
+      <a:defRPr sz="1200" kern="1200">
+        <a:solidFill>
+          <a:schemeClr val="tx1"/>
+        </a:solidFill>
+        <a:latin typeface="+mn-lt"/>
+        <a:ea typeface="+mn-ea"/>
+        <a:cs typeface="+mn-cs"/>
+      </a:defRPr>
+    </a:lvl9pPr>
+  </p:notesStyle>
+</p:notesMaster>
+</file>
+
+<file path=ppt/notesSlides/notesSlide1.xml><?xml version="1.0" encoding="utf-8"?>
+<p:notes xmlns:a="http://schemas.openxmlformats.org/drawingml/2006/main" xmlns:r="http://schemas.openxmlformats.org/officeDocument/2006/relationships" xmlns:p="http://schemas.openxmlformats.org/presentationml/2006/main">
+  <p:cSld>
+    <p:spTree>
+      <p:nvGrpSpPr>
+        <p:cNvPr id="1" name=""/>
+        <p:cNvGrpSpPr/>
+        <p:nvPr/>
+      </p:nvGrpSpPr>
+      <p:grpSpPr/>
+      <p:sp>
+        <p:nvSpPr>
+          <p:cNvPr id="2" name="幻灯片图像占位符 1"/>
+          <p:cNvSpPr>
+            <a:spLocks noGrp="1"/>
+          </p:cNvSpPr>
+          <p:nvPr>
+            <p:ph type="sldImg" idx="2"/>
+          </p:nvPr>
+        </p:nvSpPr>
+        <p:spPr/>
+      </p:sp>
+      <p:sp>
+        <p:nvSpPr>
+          <p:cNvPr id="3" name="文本占位符 2"/>
+          <p:cNvSpPr>
+            <a:spLocks noGrp="1"/>
+          </p:cNvSpPr>
+          <p:nvPr>
+            <p:ph type="body" idx="3"/>
+          </p:nvPr>
+        </p:nvSpPr>
+        <p:spPr/>
+        <p:txBody>
+          <a:bodyPr/>
+          <a:p>
+            <a:endParaRPr lang="zh-CN" altLang="en-US"/>
+          </a:p>
+        </p:txBody>
+      </p:sp>
+    </p:spTree>
+  </p:cSld>
+  <p:clrMapOvr>
+    <a:masterClrMapping/>
+  </p:clrMapOvr>
+</p:notes>
+</file>
+
+<file path=ppt/slideLayouts/slideLayout1.xml><?xml version="1.0" encoding="utf-8"?>
+<p:sldLayout xmlns:a="http://schemas.openxmlformats.org/drawingml/2006/main" xmlns:r="http://schemas.openxmlformats.org/officeDocument/2006/relationships" xmlns:p="http://schemas.openxmlformats.org/presentationml/2006/main" type="blank" preserve="1">
   <p:cSld name="Free Design — Blank">
     <p:spTree>
       <p:nvGrpSpPr>
@@ -151,7 +565,6 @@
           <a:p>
             <a:fld id="{5BCAD085-E8A6-8845-BD4E-CB4CCA059FC4}" type="datetimeFigureOut">
               <a:rPr lang="en-US" smtClean="0"/>
-              <a:t>1/27/13</a:t>
             </a:fld>
             <a:endParaRPr lang="en-US"/>
           </a:p>
@@ -193,7 +606,6 @@
           <a:p>
             <a:fld id="{C1FF6DA9-008F-8B48-92A6-B652298478BF}" type="slidenum">
               <a:rPr lang="en-US" smtClean="0"/>
-              <a:t>‹#›</a:t>
             </a:fld>
             <a:endParaRPr lang="en-US"/>
           </a:p>
@@ -208,8 +620,8 @@
 </file>
 
 <file path=ppt/slideMasters/slideMaster1.xml><?xml version="1.0" encoding="utf-8"?>
-<p:sldMaster xmlns:a="http://schemas.openxmlformats.org/drawingml/2006/main" xmlns:p="http://schemas.openxmlformats.org/presentationml/2006/main" xmlns:r="http://schemas.openxmlformats.org/officeDocument/2006/relationships">
-  <p:cSld name="Free Design — Master">
+<p:sldMaster xmlns:a="http://schemas.openxmlformats.org/drawingml/2006/main" xmlns:r="http://schemas.openxmlformats.org/officeDocument/2006/relationships" xmlns:p="http://schemas.openxmlformats.org/presentationml/2006/main">
+  <p:cSld>
     <p:bg>
       <p:bgRef idx="1001">
         <a:schemeClr val="bg1"/>
@@ -264,7 +676,6 @@
           <a:p>
             <a:fld id="{5BCAD085-E8A6-8845-BD4E-CB4CCA059FC4}" type="datetimeFigureOut">
               <a:rPr lang="en-US" smtClean="0"/>
-              <a:t>1/27/13</a:t>
             </a:fld>
             <a:endParaRPr lang="en-US"/>
           </a:p>
@@ -342,7 +753,6 @@
           <a:p>
             <a:fld id="{C1FF6DA9-008F-8B48-92A6-B652298478BF}" type="slidenum">
               <a:rPr lang="en-US" smtClean="0"/>
-              <a:t>‹#›</a:t>
             </a:fld>
             <a:endParaRPr lang="en-US"/>
           </a:p>
@@ -352,7 +762,7 @@
   </p:cSld>
   <p:clrMap bg1="lt1" tx1="dk1" bg2="lt2" tx2="dk2" accent1="accent1" accent2="accent2" accent3="accent3" accent4="accent4" accent5="accent5" accent6="accent6" hlink="hlink" folHlink="folHlink"/>
   <p:sldLayoutIdLst>
-    <p:sldLayoutId id="2147483655" r:id="rId7"/>
+    <p:sldLayoutId id="2147483649" r:id="rId1"/>
   </p:sldLayoutIdLst>
   <p:txStyles>
     <p:titleStyle>
@@ -376,7 +786,7 @@
         <a:spcBef>
           <a:spcPct val="20000"/>
         </a:spcBef>
-        <a:buFont typeface="Arial"/>
+        <a:buFont typeface="Arial" panose="020B0604020202020204"/>
         <a:buChar char="•"/>
         <a:defRPr sz="1050" kern="1200">
           <a:solidFill>
@@ -391,7 +801,7 @@
         <a:spcBef>
           <a:spcPct val="20000"/>
         </a:spcBef>
-        <a:buFont typeface="Arial"/>
+        <a:buFont typeface="Arial" panose="020B0604020202020204"/>
         <a:buChar char="–"/>
         <a:defRPr sz="1000" kern="1200">
           <a:solidFill>
@@ -406,7 +816,7 @@
         <a:spcBef>
           <a:spcPct val="20000"/>
         </a:spcBef>
-        <a:buFont typeface="Arial"/>
+        <a:buFont typeface="Arial" panose="020B0604020202020204"/>
         <a:buChar char="•"/>
         <a:defRPr sz="900" kern="1200">
           <a:solidFill>
@@ -421,7 +831,7 @@
         <a:spcBef>
           <a:spcPct val="20000"/>
         </a:spcBef>
-        <a:buFont typeface="Arial"/>
+        <a:buFont typeface="Arial" panose="020B0604020202020204"/>
         <a:buChar char="–"/>
         <a:defRPr sz="850" kern="1200">
           <a:solidFill>
@@ -436,7 +846,7 @@
         <a:spcBef>
           <a:spcPct val="20000"/>
         </a:spcBef>
-        <a:buFont typeface="Arial"/>
+        <a:buFont typeface="Arial" panose="020B0604020202020204"/>
         <a:buChar char="»"/>
         <a:defRPr sz="800" kern="1200">
           <a:solidFill>
@@ -451,7 +861,7 @@
         <a:spcBef>
           <a:spcPct val="20000"/>
         </a:spcBef>
-        <a:buFont typeface="Arial"/>
+        <a:buFont typeface="Arial" panose="020B0604020202020204"/>
         <a:buChar char="•"/>
         <a:defRPr sz="800" kern="1200">
           <a:solidFill>
@@ -466,7 +876,7 @@
         <a:spcBef>
           <a:spcPct val="20000"/>
         </a:spcBef>
-        <a:buFont typeface="Arial"/>
+        <a:buFont typeface="Arial" panose="020B0604020202020204"/>
         <a:buChar char="•"/>
         <a:defRPr sz="800" kern="1200">
           <a:solidFill>
@@ -481,7 +891,7 @@
         <a:spcBef>
           <a:spcPct val="20000"/>
         </a:spcBef>
-        <a:buFont typeface="Arial"/>
+        <a:buFont typeface="Arial" panose="020B0604020202020204"/>
         <a:buChar char="•"/>
         <a:defRPr sz="800" kern="1200">
           <a:solidFill>
@@ -496,7 +906,7 @@
         <a:spcBef>
           <a:spcPct val="20000"/>
         </a:spcBef>
-        <a:buFont typeface="Arial"/>
+        <a:buFont typeface="Arial" panose="020B0604020202020204"/>
         <a:buChar char="•"/>
         <a:defRPr sz="800" kern="1200">
           <a:solidFill>
@@ -641,7 +1051,7 @@
         <p:spPr>
           <a:xfrm>
             <a:off x="0" y="0"/>
-            <a:ext cx="4953000" cy="6858000"/>
+            <a:ext cx="5774690" cy="6858000"/>
           </a:xfrm>
           <a:prstGeom prst="rect">
             <a:avLst/>
@@ -713,6 +1123,14 @@
               </a:rPr>
               <a:t>基于开源多模态大模型的</a:t>
             </a:r>
+            <a:endParaRPr lang="zh-CN" sz="1650" spc="150" dirty="0">
+              <a:solidFill>
+                <a:srgbClr val="FFFFFF"/>
+              </a:solidFill>
+              <a:latin typeface="+mn-lt"/>
+              <a:ea typeface="+mn-ea"/>
+              <a:cs typeface="+mn-cs"/>
+            </a:endParaRPr>
           </a:p>
         </p:txBody>
       </p:sp>
@@ -753,6 +1171,14 @@
               </a:rPr>
               <a:t>图像质量评估 Agent 框架</a:t>
             </a:r>
+            <a:endParaRPr lang="zh-CN" sz="2550" b="1" dirty="0">
+              <a:solidFill>
+                <a:srgbClr val="FFFFFF"/>
+              </a:solidFill>
+              <a:latin typeface="+mn-lt"/>
+              <a:ea typeface="+mn-ea"/>
+              <a:cs typeface="+mn-cs"/>
+            </a:endParaRPr>
           </a:p>
         </p:txBody>
       </p:sp>
@@ -793,6 +1219,14 @@
               </a:rPr>
               <a:t>Unified Agent Framework for Blind IQA</a:t>
             </a:r>
+            <a:endParaRPr lang="en-US" sz="1050" dirty="0">
+              <a:solidFill>
+                <a:srgbClr val="7B8BA8"/>
+              </a:solidFill>
+              <a:latin typeface="+mn-lt"/>
+              <a:ea typeface="+mn-ea"/>
+              <a:cs typeface="+mn-cs"/>
+            </a:endParaRPr>
           </a:p>
         </p:txBody>
       </p:sp>
@@ -804,7 +1238,7 @@
         </p:nvSpPr>
         <p:spPr>
           <a:xfrm>
-            <a:off x="755142" y="4426268"/>
+            <a:off x="762127" y="4426268"/>
             <a:ext cx="1522133" cy="264033"/>
           </a:xfrm>
           <a:prstGeom prst="rect">
@@ -825,7 +1259,7 @@
             <a:r>
               <a:rPr lang="zh-CN" sz="1350" dirty="0">
                 <a:solidFill>
-                  <a:schemeClr val="dk1"/>
+                  <a:schemeClr val="bg1"/>
                 </a:solidFill>
                 <a:latin typeface="+mn-lt"/>
                 <a:ea typeface="+mn-ea"/>
@@ -833,6 +1267,14 @@
               </a:rPr>
               <a:t>张丞 北京邮电大学</a:t>
             </a:r>
+            <a:endParaRPr lang="zh-CN" sz="1350" dirty="0">
+              <a:solidFill>
+                <a:schemeClr val="bg1"/>
+              </a:solidFill>
+              <a:latin typeface="+mn-lt"/>
+              <a:ea typeface="+mn-ea"/>
+              <a:cs typeface="+mn-cs"/>
+            </a:endParaRPr>
           </a:p>
         </p:txBody>
       </p:sp>
@@ -845,7 +1287,7 @@
         <p:spPr>
           <a:xfrm>
             <a:off x="757047" y="4800124"/>
-            <a:ext cx="2714422" cy="190690"/>
+            <a:ext cx="1266190" cy="150495"/>
           </a:xfrm>
           <a:prstGeom prst="rect">
             <a:avLst/>
@@ -871,8 +1313,16 @@
                 <a:ea typeface="+mn-ea"/>
                 <a:cs typeface="+mn-cs"/>
               </a:rPr>
-              <a:t>指导教师：何老师　　验收汇报　2026.07.29</a:t>
+              <a:t>验收汇报　2026.07.29</a:t>
             </a:r>
+            <a:endParaRPr lang="zh-CN" sz="980" dirty="0">
+              <a:solidFill>
+                <a:srgbClr val="757575"/>
+              </a:solidFill>
+              <a:latin typeface="+mn-lt"/>
+              <a:ea typeface="+mn-ea"/>
+              <a:cs typeface="+mn-cs"/>
+            </a:endParaRPr>
           </a:p>
         </p:txBody>
       </p:sp>
@@ -907,12 +1357,20 @@
                 <a:solidFill>
                   <a:srgbClr val="C3C2B7"/>
                 </a:solidFill>
-                <a:latin typeface="Arial"/>
-                <a:ea typeface="Arial"/>
-                <a:cs typeface="Arial"/>
+                <a:latin typeface="Arial" panose="020B0604020202020204"/>
+                <a:ea typeface="Arial" panose="020B0604020202020204"/>
+                <a:cs typeface="Arial" panose="020B0604020202020204"/>
               </a:rPr>
               <a:t>1 / 11</a:t>
             </a:r>
+            <a:endParaRPr lang="en-US" sz="750" dirty="0">
+              <a:solidFill>
+                <a:srgbClr val="C3C2B7"/>
+              </a:solidFill>
+              <a:latin typeface="Arial" panose="020B0604020202020204"/>
+              <a:ea typeface="Arial" panose="020B0604020202020204"/>
+              <a:cs typeface="Arial" panose="020B0604020202020204"/>
+            </a:endParaRPr>
           </a:p>
         </p:txBody>
       </p:sp>
@@ -921,9 +1379,18 @@
   <p:clrMapOvr>
     <a:masterClrMapping/>
   </p:clrMapOvr>
-  <p:transition xmlns:p14="http://schemas.microsoft.com/office/powerpoint/2010/main" p14:dur="400">
-    <p:fade/>
-  </p:transition>
+  <mc:AlternateContent xmlns:mc="http://schemas.openxmlformats.org/markup-compatibility/2006">
+    <mc:Choice xmlns:p14="http://schemas.microsoft.com/office/powerpoint/2010/main" Requires="p14">
+      <p:transition p14:dur="400">
+        <p:fade/>
+      </p:transition>
+    </mc:Choice>
+    <mc:Fallback>
+      <p:transition>
+        <p:fade/>
+      </p:transition>
+    </mc:Fallback>
+  </mc:AlternateContent>
 </p:sld>
 </file>
 
@@ -1005,12 +1472,20 @@
                 <a:solidFill>
                   <a:srgbClr val="5A6A85"/>
                 </a:solidFill>
-                <a:latin typeface="Arial"/>
-                <a:ea typeface="Arial"/>
-                <a:cs typeface="Arial"/>
+                <a:latin typeface="Arial" panose="020B0604020202020204"/>
+                <a:ea typeface="Arial" panose="020B0604020202020204"/>
+                <a:cs typeface="Arial" panose="020B0604020202020204"/>
               </a:rPr>
               <a:t>10 / 11</a:t>
             </a:r>
+            <a:endParaRPr lang="en-US" sz="750" dirty="0">
+              <a:solidFill>
+                <a:srgbClr val="5A6A85"/>
+              </a:solidFill>
+              <a:latin typeface="Arial" panose="020B0604020202020204"/>
+              <a:ea typeface="Arial" panose="020B0604020202020204"/>
+              <a:cs typeface="Arial" panose="020B0604020202020204"/>
+            </a:endParaRPr>
           </a:p>
         </p:txBody>
       </p:sp>
@@ -1051,6 +1526,14 @@
               </a:rPr>
               <a:t>结论</a:t>
             </a:r>
+            <a:endParaRPr lang="zh-CN" sz="2100" b="1" dirty="0">
+              <a:solidFill>
+                <a:srgbClr val="FFFFFF"/>
+              </a:solidFill>
+              <a:latin typeface="+mn-lt"/>
+              <a:ea typeface="+mn-ea"/>
+              <a:cs typeface="+mn-cs"/>
+            </a:endParaRPr>
           </a:p>
         </p:txBody>
       </p:sp>
@@ -1099,12 +1582,20 @@
                   <a:solidFill>
                     <a:schemeClr val="accent2"/>
                   </a:solidFill>
-                  <a:latin typeface="Arial"/>
-                  <a:ea typeface="Arial"/>
-                  <a:cs typeface="Arial"/>
+                  <a:latin typeface="Arial" panose="020B0604020202020204"/>
+                  <a:ea typeface="Arial" panose="020B0604020202020204"/>
+                  <a:cs typeface="Arial" panose="020B0604020202020204"/>
                 </a:rPr>
                 <a:t>01</a:t>
               </a:r>
+              <a:endParaRPr lang="en-US" sz="2400" b="1" dirty="0">
+                <a:solidFill>
+                  <a:schemeClr val="accent2"/>
+                </a:solidFill>
+                <a:latin typeface="Arial" panose="020B0604020202020204"/>
+                <a:ea typeface="Arial" panose="020B0604020202020204"/>
+                <a:cs typeface="Arial" panose="020B0604020202020204"/>
+              </a:endParaRPr>
             </a:p>
           </p:txBody>
         </p:sp>
@@ -1145,6 +1636,14 @@
                 </a:rPr>
                 <a:t>统一框架 — 两数据集、两个模型规模，走同一套代码</a:t>
               </a:r>
+              <a:endParaRPr lang="zh-CN" sz="1350" b="1" dirty="0">
+                <a:solidFill>
+                  <a:srgbClr val="FFFFFF"/>
+                </a:solidFill>
+                <a:latin typeface="+mn-lt"/>
+                <a:ea typeface="+mn-ea"/>
+                <a:cs typeface="+mn-cs"/>
+              </a:endParaRPr>
             </a:p>
           </p:txBody>
         </p:sp>
@@ -1185,6 +1684,14 @@
                 </a:rPr>
                 <a:t>主干大模型全程不训练，调一次参数就永久缓存，任何实验结果一键复现。唯一被训练的组件是 Router 层一个 21 参数的矩阵。</a:t>
               </a:r>
+              <a:endParaRPr lang="zh-CN" sz="980" dirty="0">
+                <a:solidFill>
+                  <a:srgbClr val="C3C2B7"/>
+                </a:solidFill>
+                <a:latin typeface="+mn-lt"/>
+                <a:ea typeface="+mn-ea"/>
+                <a:cs typeface="+mn-cs"/>
+              </a:endParaRPr>
             </a:p>
           </p:txBody>
         </p:sp>
@@ -1219,12 +1726,20 @@
                   <a:solidFill>
                     <a:schemeClr val="accent2"/>
                   </a:solidFill>
-                  <a:latin typeface="Arial"/>
-                  <a:ea typeface="Arial"/>
-                  <a:cs typeface="Arial"/>
+                  <a:latin typeface="Arial" panose="020B0604020202020204"/>
+                  <a:ea typeface="Arial" panose="020B0604020202020204"/>
+                  <a:cs typeface="Arial" panose="020B0604020202020204"/>
                 </a:rPr>
                 <a:t>02</a:t>
               </a:r>
+              <a:endParaRPr lang="en-US" sz="2400" b="1" dirty="0">
+                <a:solidFill>
+                  <a:schemeClr val="accent2"/>
+                </a:solidFill>
+                <a:latin typeface="Arial" panose="020B0604020202020204"/>
+                <a:ea typeface="Arial" panose="020B0604020202020204"/>
+                <a:cs typeface="Arial" panose="020B0604020202020204"/>
+              </a:endParaRPr>
             </a:p>
           </p:txBody>
         </p:sp>
@@ -1265,6 +1780,14 @@
                 </a:rPr>
                 <a:t>BT 锦标赛 + 门控矩阵 — 让大模型自己教自己怎么路由</a:t>
               </a:r>
+              <a:endParaRPr lang="zh-CN" sz="1350" b="1" dirty="0">
+                <a:solidFill>
+                  <a:srgbClr val="FFFFFF"/>
+                </a:solidFill>
+                <a:latin typeface="+mn-lt"/>
+                <a:ea typeface="+mn-ea"/>
+                <a:cs typeface="+mn-cs"/>
+              </a:endParaRPr>
             </a:p>
           </p:txBody>
         </p:sp>
@@ -1305,6 +1828,14 @@
                 </a:rPr>
                 <a:t>三万余场两两比较把"哪些图更差"的共识蒸馏成监督信号；21 个参数的门控学会按图像特征决定信任哪个专家。矩阵高度可读、可跨模型迁移、零新增调用反超原主。</a:t>
               </a:r>
+              <a:endParaRPr lang="zh-CN" sz="980" dirty="0">
+                <a:solidFill>
+                  <a:srgbClr val="C3C2B7"/>
+                </a:solidFill>
+                <a:latin typeface="+mn-lt"/>
+                <a:ea typeface="+mn-ea"/>
+                <a:cs typeface="+mn-cs"/>
+              </a:endParaRPr>
             </a:p>
           </p:txBody>
         </p:sp>
@@ -1339,12 +1870,20 @@
                   <a:solidFill>
                     <a:schemeClr val="accent2"/>
                   </a:solidFill>
-                  <a:latin typeface="Arial"/>
-                  <a:ea typeface="Arial"/>
-                  <a:cs typeface="Arial"/>
+                  <a:latin typeface="Arial" panose="020B0604020202020204"/>
+                  <a:ea typeface="Arial" panose="020B0604020202020204"/>
+                  <a:cs typeface="Arial" panose="020B0604020202020204"/>
                 </a:rPr>
                 <a:t>03</a:t>
               </a:r>
+              <a:endParaRPr lang="en-US" sz="2400" b="1" dirty="0">
+                <a:solidFill>
+                  <a:schemeClr val="accent2"/>
+                </a:solidFill>
+                <a:latin typeface="Arial" panose="020B0604020202020204"/>
+                <a:ea typeface="Arial" panose="020B0604020202020204"/>
+                <a:cs typeface="Arial" panose="020B0604020202020204"/>
+              </a:endParaRPr>
             </a:p>
           </p:txBody>
         </p:sp>
@@ -1385,6 +1924,14 @@
                 </a:rPr>
                 <a:t>三项可证伪的发现 — 负面结果与正面结果同等记录</a:t>
               </a:r>
+              <a:endParaRPr lang="zh-CN" sz="1350" b="1" dirty="0">
+                <a:solidFill>
+                  <a:srgbClr val="FFFFFF"/>
+                </a:solidFill>
+                <a:latin typeface="+mn-lt"/>
+                <a:ea typeface="+mn-ea"/>
+                <a:cs typeface="+mn-cs"/>
+              </a:endParaRPr>
             </a:p>
           </p:txBody>
         </p:sp>
@@ -1425,6 +1972,14 @@
                 </a:rPr>
                 <a:t>提示词加得越多、绝对误差越大（排序与校准可分离）· 锚点在单问中是成本、在融合中是必需品（双重角色）· 自进化规则库花 ¥69 换来接近零的外部收益（自洽≠对齐）。</a:t>
               </a:r>
+              <a:endParaRPr lang="zh-CN" sz="980" dirty="0">
+                <a:solidFill>
+                  <a:srgbClr val="C3C2B7"/>
+                </a:solidFill>
+                <a:latin typeface="+mn-lt"/>
+                <a:ea typeface="+mn-ea"/>
+                <a:cs typeface="+mn-cs"/>
+              </a:endParaRPr>
             </a:p>
           </p:txBody>
         </p:sp>
@@ -1459,12 +2014,20 @@
                   <a:solidFill>
                     <a:schemeClr val="accent2"/>
                   </a:solidFill>
-                  <a:latin typeface="Arial"/>
-                  <a:ea typeface="Arial"/>
-                  <a:cs typeface="Arial"/>
+                  <a:latin typeface="Arial" panose="020B0604020202020204"/>
+                  <a:ea typeface="Arial" panose="020B0604020202020204"/>
+                  <a:cs typeface="Arial" panose="020B0604020202020204"/>
                 </a:rPr>
                 <a:t>04</a:t>
               </a:r>
+              <a:endParaRPr lang="en-US" sz="2400" b="1" dirty="0">
+                <a:solidFill>
+                  <a:schemeClr val="accent2"/>
+                </a:solidFill>
+                <a:latin typeface="Arial" panose="020B0604020202020204"/>
+                <a:ea typeface="Arial" panose="020B0604020202020204"/>
+                <a:cs typeface="Arial" panose="020B0604020202020204"/>
+              </a:endParaRPr>
             </a:p>
           </p:txBody>
         </p:sp>
@@ -1505,6 +2068,14 @@
                 </a:rPr>
                 <a:t>锚相关性定律 — 从失败到跨模型验证的完整闭环</a:t>
               </a:r>
+              <a:endParaRPr lang="zh-CN" sz="1350" b="1" dirty="0">
+                <a:solidFill>
+                  <a:srgbClr val="FFFFFF"/>
+                </a:solidFill>
+                <a:latin typeface="+mn-lt"/>
+                <a:ea typeface="+mn-ea"/>
+                <a:cs typeface="+mn-cs"/>
+              </a:endParaRPr>
             </a:p>
           </p:txBody>
         </p:sp>
@@ -1545,6 +2116,14 @@
                 </a:rPr>
                 <a:t>发现（一）：+0.001 零收益证伪"自洽驱动改进" → 验证（二）：同机制换信号从 +0.007 跃至 +0.062 → 放大（三）：三万余场对决 + 逐图动态门控推动主指标跃升 → 跨模型迁移确认定律不依赖特定模型。</a:t>
               </a:r>
+              <a:endParaRPr lang="zh-CN" sz="980" dirty="0">
+                <a:solidFill>
+                  <a:srgbClr val="C3C2B7"/>
+                </a:solidFill>
+                <a:latin typeface="+mn-lt"/>
+                <a:ea typeface="+mn-ea"/>
+                <a:cs typeface="+mn-cs"/>
+              </a:endParaRPr>
             </a:p>
           </p:txBody>
         </p:sp>
@@ -1554,9 +2133,18 @@
   <p:clrMapOvr>
     <a:masterClrMapping/>
   </p:clrMapOvr>
-  <p:transition xmlns:p14="http://schemas.microsoft.com/office/powerpoint/2010/main" p14:dur="400">
-    <p:fade/>
-  </p:transition>
+  <mc:AlternateContent xmlns:mc="http://schemas.openxmlformats.org/markup-compatibility/2006">
+    <mc:Choice xmlns:p14="http://schemas.microsoft.com/office/powerpoint/2010/main" Requires="p14">
+      <p:transition p14:dur="400">
+        <p:fade/>
+      </p:transition>
+    </mc:Choice>
+    <mc:Fallback>
+      <p:transition>
+        <p:fade/>
+      </p:transition>
+    </mc:Fallback>
+  </mc:AlternateContent>
 </p:sld>
 </file>
 
@@ -1666,6 +2254,14 @@
               </a:rPr>
               <a:t>谢谢各位老师</a:t>
             </a:r>
+            <a:endParaRPr lang="zh-CN" sz="2700" b="1" dirty="0">
+              <a:solidFill>
+                <a:schemeClr val="accent1"/>
+              </a:solidFill>
+              <a:latin typeface="+mn-lt"/>
+              <a:ea typeface="+mn-ea"/>
+              <a:cs typeface="+mn-cs"/>
+            </a:endParaRPr>
           </a:p>
         </p:txBody>
       </p:sp>
@@ -1706,6 +2302,14 @@
               </a:rPr>
               <a:t>请批评指正</a:t>
             </a:r>
+            <a:endParaRPr lang="zh-CN" sz="1350" dirty="0">
+              <a:solidFill>
+                <a:srgbClr val="757575"/>
+              </a:solidFill>
+              <a:latin typeface="+mn-lt"/>
+              <a:ea typeface="+mn-ea"/>
+              <a:cs typeface="+mn-cs"/>
+            </a:endParaRPr>
           </a:p>
         </p:txBody>
       </p:sp>
@@ -1718,7 +2322,7 @@
         <p:spPr>
           <a:xfrm>
             <a:off x="756285" y="3783806"/>
-            <a:ext cx="1368400" cy="220028"/>
+            <a:ext cx="426720" cy="171450"/>
           </a:xfrm>
           <a:prstGeom prst="rect">
             <a:avLst/>
@@ -1744,8 +2348,16 @@
                 <a:ea typeface="+mn-ea"/>
                 <a:cs typeface="+mn-cs"/>
               </a:rPr>
-              <a:t>张丞　北京邮电大学</a:t>
+              <a:t>张丞　</a:t>
             </a:r>
+            <a:endParaRPr lang="zh-CN" sz="1120" dirty="0">
+              <a:solidFill>
+                <a:schemeClr val="dk1"/>
+              </a:solidFill>
+              <a:latin typeface="+mn-lt"/>
+              <a:ea typeface="+mn-ea"/>
+              <a:cs typeface="+mn-cs"/>
+            </a:endParaRPr>
           </a:p>
         </p:txBody>
       </p:sp>
@@ -1758,7 +2370,7 @@
         <p:spPr>
           <a:xfrm>
             <a:off x="757238" y="4141470"/>
-            <a:ext cx="1954111" cy="176212"/>
+            <a:ext cx="734695" cy="138430"/>
           </a:xfrm>
           <a:prstGeom prst="rect">
             <a:avLst/>
@@ -1784,8 +2396,16 @@
                 <a:ea typeface="+mn-ea"/>
                 <a:cs typeface="+mn-cs"/>
               </a:rPr>
-              <a:t>2026.07.29　·　材料与代码见附件</a:t>
+              <a:t>2026.07.29　·</a:t>
             </a:r>
+            <a:endParaRPr lang="zh-CN" sz="900" dirty="0">
+              <a:solidFill>
+                <a:srgbClr val="A0A0A0"/>
+              </a:solidFill>
+              <a:latin typeface="+mn-lt"/>
+              <a:ea typeface="+mn-ea"/>
+              <a:cs typeface="+mn-cs"/>
+            </a:endParaRPr>
           </a:p>
         </p:txBody>
       </p:sp>
@@ -1820,12 +2440,20 @@
                 <a:solidFill>
                   <a:srgbClr val="C3C2B7"/>
                 </a:solidFill>
-                <a:latin typeface="Arial"/>
-                <a:ea typeface="Arial"/>
-                <a:cs typeface="Arial"/>
+                <a:latin typeface="Arial" panose="020B0604020202020204"/>
+                <a:ea typeface="Arial" panose="020B0604020202020204"/>
+                <a:cs typeface="Arial" panose="020B0604020202020204"/>
               </a:rPr>
               <a:t>11 / 11</a:t>
             </a:r>
+            <a:endParaRPr lang="en-US" sz="750" dirty="0">
+              <a:solidFill>
+                <a:srgbClr val="C3C2B7"/>
+              </a:solidFill>
+              <a:latin typeface="Arial" panose="020B0604020202020204"/>
+              <a:ea typeface="Arial" panose="020B0604020202020204"/>
+              <a:cs typeface="Arial" panose="020B0604020202020204"/>
+            </a:endParaRPr>
           </a:p>
         </p:txBody>
       </p:sp>
@@ -1834,9 +2462,18 @@
   <p:clrMapOvr>
     <a:masterClrMapping/>
   </p:clrMapOvr>
-  <p:transition xmlns:p14="http://schemas.microsoft.com/office/powerpoint/2010/main" p14:dur="400">
-    <p:fade/>
-  </p:transition>
+  <mc:AlternateContent xmlns:mc="http://schemas.openxmlformats.org/markup-compatibility/2006">
+    <mc:Choice xmlns:p14="http://schemas.microsoft.com/office/powerpoint/2010/main" Requires="p14">
+      <p:transition p14:dur="400">
+        <p:fade/>
+      </p:transition>
+    </mc:Choice>
+    <mc:Fallback>
+      <p:transition>
+        <p:fade/>
+      </p:transition>
+    </mc:Fallback>
+  </mc:AlternateContent>
 </p:sld>
 </file>
 
@@ -1918,12 +2555,20 @@
                 <a:solidFill>
                   <a:srgbClr val="C3C2B7"/>
                 </a:solidFill>
-                <a:latin typeface="Arial"/>
-                <a:ea typeface="Arial"/>
-                <a:cs typeface="Arial"/>
+                <a:latin typeface="Arial" panose="020B0604020202020204"/>
+                <a:ea typeface="Arial" panose="020B0604020202020204"/>
+                <a:cs typeface="Arial" panose="020B0604020202020204"/>
               </a:rPr>
               <a:t>2 / 11</a:t>
             </a:r>
+            <a:endParaRPr lang="en-US" sz="750" dirty="0">
+              <a:solidFill>
+                <a:srgbClr val="C3C2B7"/>
+              </a:solidFill>
+              <a:latin typeface="Arial" panose="020B0604020202020204"/>
+              <a:ea typeface="Arial" panose="020B0604020202020204"/>
+              <a:cs typeface="Arial" panose="020B0604020202020204"/>
+            </a:endParaRPr>
           </a:p>
         </p:txBody>
       </p:sp>
@@ -1964,6 +2609,14 @@
               </a:rPr>
               <a:t>背景</a:t>
             </a:r>
+            <a:endParaRPr lang="zh-CN" sz="750" dirty="0">
+              <a:solidFill>
+                <a:srgbClr val="A0A0A0"/>
+              </a:solidFill>
+              <a:latin typeface="+mn-lt"/>
+              <a:ea typeface="+mn-ea"/>
+              <a:cs typeface="+mn-cs"/>
+            </a:endParaRPr>
           </a:p>
         </p:txBody>
       </p:sp>
@@ -1975,8 +2628,8 @@
         </p:nvSpPr>
         <p:spPr>
           <a:xfrm>
-            <a:off x="757238" y="823912"/>
-            <a:ext cx="1478566" cy="147638"/>
+            <a:off x="646113" y="2201227"/>
+            <a:ext cx="2270125" cy="215265"/>
           </a:xfrm>
           <a:prstGeom prst="rect">
             <a:avLst/>
@@ -1994,7 +2647,7 @@
           <a:p>
             <a:pPr algn="l"/>
             <a:r>
-              <a:rPr lang="zh-CN" sz="750" b="1" spc="225" dirty="0">
+              <a:rPr lang="zh-CN" sz="1400" b="1" spc="225" dirty="0">
                 <a:solidFill>
                   <a:schemeClr val="accent1"/>
                 </a:solidFill>
@@ -2004,6 +2657,14 @@
               </a:rPr>
               <a:t>我想做什么、有什么限制</a:t>
             </a:r>
+            <a:endParaRPr lang="zh-CN" sz="1400" b="1" spc="225" dirty="0">
+              <a:solidFill>
+                <a:schemeClr val="accent1"/>
+              </a:solidFill>
+              <a:latin typeface="+mn-lt"/>
+              <a:ea typeface="+mn-ea"/>
+              <a:cs typeface="+mn-cs"/>
+            </a:endParaRPr>
           </a:p>
         </p:txBody>
       </p:sp>
@@ -2015,7 +2676,7 @@
         </p:nvSpPr>
         <p:spPr>
           <a:xfrm>
-            <a:off x="742950" y="361950"/>
+            <a:off x="742950" y="795655"/>
             <a:ext cx="1437475" cy="1733550"/>
           </a:xfrm>
           <a:prstGeom prst="rect">
@@ -2036,14 +2697,28 @@
             <a:r>
               <a:rPr lang="en-US" sz="9000" b="1" dirty="0">
                 <a:solidFill>
-                  <a:srgbClr val="F0F0ED"/>
-                </a:solidFill>
-                <a:latin typeface="Arial"/>
-                <a:ea typeface="Arial"/>
-                <a:cs typeface="Arial"/>
+                  <a:schemeClr val="accent1">
+                    <a:lumMod val="50000"/>
+                    <a:lumOff val="50000"/>
+                  </a:schemeClr>
+                </a:solidFill>
+                <a:latin typeface="Arial" panose="020B0604020202020204"/>
+                <a:ea typeface="Arial" panose="020B0604020202020204"/>
+                <a:cs typeface="Arial" panose="020B0604020202020204"/>
               </a:rPr>
               <a:t>01</a:t>
             </a:r>
+            <a:endParaRPr lang="en-US" sz="9000" b="1" dirty="0">
+              <a:solidFill>
+                <a:schemeClr val="accent1">
+                  <a:lumMod val="50000"/>
+                  <a:lumOff val="50000"/>
+                </a:schemeClr>
+              </a:solidFill>
+              <a:latin typeface="Arial" panose="020B0604020202020204"/>
+              <a:ea typeface="Arial" panose="020B0604020202020204"/>
+              <a:cs typeface="Arial" panose="020B0604020202020204"/>
+            </a:endParaRPr>
           </a:p>
         </p:txBody>
       </p:sp>
@@ -2055,10 +2730,10 @@
         </p:nvGrpSpPr>
         <p:grpSpPr>
           <a:xfrm>
-            <a:off x="3614356" y="795576"/>
-            <a:ext cx="10127872" cy="4008025"/>
+            <a:off x="3614420" y="795655"/>
+            <a:ext cx="8171815" cy="5144770"/>
             <a:chOff x="3614356" y="795576"/>
-            <a:chExt cx="10127872" cy="4008025"/>
+            <a:chExt cx="10145216" cy="3849016"/>
           </a:xfrm>
         </p:grpSpPr>
         <p:sp>
@@ -2070,7 +2745,7 @@
           <p:spPr>
             <a:xfrm>
               <a:off x="3614356" y="795576"/>
-              <a:ext cx="5346960" cy="198025"/>
+              <a:ext cx="6900386" cy="483146"/>
             </a:xfrm>
             <a:prstGeom prst="rect">
               <a:avLst/>
@@ -2081,14 +2756,14 @@
             </a:ln>
           </p:spPr>
           <p:txBody>
-            <a:bodyPr wrap="none" lIns="0" tIns="0" rIns="0" bIns="0" anchor="t" anchorCtr="0">
+            <a:bodyPr wrap="square" lIns="0" tIns="0" rIns="0" bIns="0" anchor="t" anchorCtr="0">
               <a:spAutoFit/>
             </a:bodyPr>
             <a:lstStyle/>
             <a:p>
               <a:pPr algn="l"/>
               <a:r>
-                <a:rPr lang="zh-CN" sz="1010" b="1" dirty="0">
+                <a:rPr lang="zh-CN" sz="1400" b="1" dirty="0">
                   <a:solidFill>
                     <a:schemeClr val="accent1"/>
                   </a:solidFill>
@@ -2096,59 +2771,71 @@
                   <a:ea typeface="+mn-ea"/>
                   <a:cs typeface="+mn-cs"/>
                 </a:rPr>
-                <a:t>任务是</a:t>
-              </a:r>
-              <a:r>
-                <a:rPr lang="zh-CN" sz="1010" dirty="0">
-                  <a:solidFill>
-                    <a:schemeClr val="dk1"/>
-                  </a:solidFill>
-                  <a:latin typeface="+mn-lt"/>
-                  <a:ea typeface="+mn-ea"/>
-                  <a:cs typeface="+mn-cs"/>
-                </a:rPr>
-                <a:t>写一个程序，输入一张图，输出一个质量分。但这个程序不能训练图片打分模型——</a:t>
-              </a:r>
-            </a:p>
-          </p:txBody>
-        </p:sp>
-        <p:sp>
-          <p:nvSpPr>
-            <p:cNvPr id="8" name="TextBox 8"/>
-            <p:cNvSpPr txBox="1"/>
-            <p:nvPr/>
-          </p:nvSpPr>
-          <p:spPr>
-            <a:xfrm>
-              <a:off x="3614356" y="1081326"/>
-              <a:ext cx="4896348" cy="198025"/>
-            </a:xfrm>
-            <a:prstGeom prst="rect">
-              <a:avLst/>
-            </a:prstGeom>
-            <a:noFill/>
-            <a:ln>
-              <a:noFill/>
-            </a:ln>
-          </p:spPr>
-          <p:txBody>
-            <a:bodyPr wrap="none" lIns="0" tIns="0" rIns="0" bIns="0" anchor="t" anchorCtr="0">
-              <a:spAutoFit/>
-            </a:bodyPr>
-            <a:lstStyle/>
-            <a:p>
-              <a:pPr algn="l"/>
-              <a:r>
-                <a:rPr lang="zh-CN" sz="1010" dirty="0">
-                  <a:solidFill>
-                    <a:schemeClr val="dk1"/>
-                  </a:solidFill>
-                  <a:latin typeface="+mn-lt"/>
-                  <a:ea typeface="+mn-ea"/>
-                  <a:cs typeface="+mn-cs"/>
-                </a:rPr>
-                <a:t>只能靠精心设计的提示词（Prompt），让一个现成的多模态大模型来当"评委"。</a:t>
-              </a:r>
+                <a:t>任务目标是</a:t>
+              </a:r>
+              <a:r>
+                <a:rPr lang="zh-CN" altLang="en-US" sz="1400" b="1" dirty="0">
+                  <a:solidFill>
+                    <a:schemeClr val="accent1"/>
+                  </a:solidFill>
+                  <a:latin typeface="+mn-lt"/>
+                  <a:ea typeface="+mn-ea"/>
+                  <a:cs typeface="+mn-cs"/>
+                </a:rPr>
+                <a:t>构建一套图像质量评估 </a:t>
+              </a:r>
+              <a:r>
+                <a:rPr lang="en-US" altLang="zh-CN" sz="1400" b="1" dirty="0">
+                  <a:solidFill>
+                    <a:schemeClr val="accent1"/>
+                  </a:solidFill>
+                  <a:latin typeface="+mn-lt"/>
+                  <a:ea typeface="+mn-ea"/>
+                  <a:cs typeface="+mn-cs"/>
+                </a:rPr>
+                <a:t>Agent </a:t>
+              </a:r>
+              <a:r>
+                <a:rPr lang="zh-CN" altLang="en-US" sz="1400" b="1" dirty="0">
+                  <a:solidFill>
+                    <a:schemeClr val="accent1"/>
+                  </a:solidFill>
+                  <a:latin typeface="+mn-lt"/>
+                  <a:ea typeface="+mn-ea"/>
+                  <a:cs typeface="+mn-cs"/>
+                </a:rPr>
+                <a:t>框架。在不使用目标评测数据进行模型训练或微调的前提下，通过</a:t>
+              </a:r>
+              <a:r>
+                <a:rPr lang="en-US" altLang="zh-CN" sz="1400" b="1" dirty="0">
+                  <a:solidFill>
+                    <a:schemeClr val="accent1"/>
+                  </a:solidFill>
+                  <a:latin typeface="+mn-lt"/>
+                  <a:ea typeface="+mn-ea"/>
+                  <a:cs typeface="+mn-cs"/>
+                </a:rPr>
+                <a:t>Skill（Prompt）</a:t>
+              </a:r>
+              <a:r>
+                <a:rPr lang="zh-CN" altLang="en-US" sz="1400" b="1" dirty="0">
+                  <a:solidFill>
+                    <a:schemeClr val="accent1"/>
+                  </a:solidFill>
+                  <a:latin typeface="+mn-lt"/>
+                  <a:ea typeface="+mn-ea"/>
+                  <a:cs typeface="+mn-cs"/>
+                </a:rPr>
+                <a:t>充分挖掘开源多模态大模型自身的图像质量感知与评分能力。</a:t>
+              </a:r>
+              <a:endParaRPr lang="zh-CN" altLang="en-US" sz="1400" b="1" dirty="0">
+                <a:solidFill>
+                  <a:schemeClr val="accent1"/>
+                </a:solidFill>
+                <a:latin typeface="+mn-lt"/>
+                <a:ea typeface="+mn-ea"/>
+                <a:cs typeface="+mn-cs"/>
+              </a:endParaRPr>
             </a:p>
           </p:txBody>
         </p:sp>
@@ -2160,8 +2847,8 @@
           </p:nvSpPr>
           <p:spPr>
             <a:xfrm>
-              <a:off x="3614356" y="1557576"/>
-              <a:ext cx="7236275" cy="198025"/>
+              <a:off x="3620663" y="1473965"/>
+              <a:ext cx="7236275" cy="276016"/>
             </a:xfrm>
             <a:prstGeom prst="rect">
               <a:avLst/>
@@ -2172,14 +2859,14 @@
             </a:ln>
           </p:spPr>
           <p:txBody>
-            <a:bodyPr wrap="none" lIns="0" tIns="0" rIns="0" bIns="0" anchor="t" anchorCtr="0">
+            <a:bodyPr wrap="square" lIns="0" tIns="0" rIns="0" bIns="0" anchor="t" anchorCtr="0">
               <a:spAutoFit/>
             </a:bodyPr>
             <a:lstStyle/>
             <a:p>
               <a:pPr algn="l"/>
               <a:r>
-                <a:rPr lang="zh-CN" sz="1010" b="1" dirty="0">
+                <a:rPr lang="zh-CN" sz="1200" b="1" dirty="0">
                   <a:solidFill>
                     <a:schemeClr val="accent1"/>
                   </a:solidFill>
@@ -2190,7 +2877,7 @@
                 <a:t>模型</a:t>
               </a:r>
               <a:r>
-                <a:rPr lang="zh-CN" sz="1010" dirty="0">
+                <a:rPr lang="zh-CN" sz="1200" dirty="0">
                   <a:solidFill>
                     <a:schemeClr val="dk1"/>
                   </a:solidFill>
@@ -2198,8 +2885,16 @@
                   <a:ea typeface="+mn-ea"/>
                   <a:cs typeface="+mn-cs"/>
                 </a:rPr>
-                <a:t>用的是阿里的 Qwen3-VL-32B（API 调用）。每次调用温度设为零，结果做磁盘缓存——任何实验都能一键复现。</a:t>
-              </a:r>
+                <a:t>用的是阿里开源的 Qwen3-VL-32B（API 调用）。每次调用温度设为零，结果做磁盘缓存——任何实验都能一键复现。</a:t>
+              </a:r>
+              <a:endParaRPr lang="zh-CN" sz="1200" dirty="0">
+                <a:solidFill>
+                  <a:schemeClr val="dk1"/>
+                </a:solidFill>
+                <a:latin typeface="+mn-lt"/>
+                <a:ea typeface="+mn-ea"/>
+                <a:cs typeface="+mn-cs"/>
+              </a:endParaRPr>
             </a:p>
           </p:txBody>
         </p:sp>
@@ -2211,8 +2906,8 @@
           </p:nvSpPr>
           <p:spPr>
             <a:xfrm>
-              <a:off x="3614356" y="2033826"/>
-              <a:ext cx="10127872" cy="198025"/>
+              <a:off x="3620663" y="1921639"/>
+              <a:ext cx="10127872" cy="276016"/>
             </a:xfrm>
             <a:prstGeom prst="rect">
               <a:avLst/>
@@ -2223,14 +2918,14 @@
             </a:ln>
           </p:spPr>
           <p:txBody>
-            <a:bodyPr wrap="none" lIns="0" tIns="0" rIns="0" bIns="0" anchor="t" anchorCtr="0">
+            <a:bodyPr wrap="square" lIns="0" tIns="0" rIns="0" bIns="0" anchor="t" anchorCtr="0">
               <a:spAutoFit/>
             </a:bodyPr>
             <a:lstStyle/>
             <a:p>
               <a:pPr algn="l"/>
               <a:r>
-                <a:rPr lang="zh-CN" sz="1010" b="1" dirty="0">
+                <a:rPr lang="zh-CN" sz="1200" b="1" dirty="0">
                   <a:solidFill>
                     <a:schemeClr val="accent1"/>
                   </a:solidFill>
@@ -2241,7 +2936,7 @@
                 <a:t>考卷</a:t>
               </a:r>
               <a:r>
-                <a:rPr lang="zh-CN" sz="1010" dirty="0">
+                <a:rPr lang="zh-CN" sz="1200" dirty="0">
                   <a:solidFill>
                     <a:schemeClr val="dk1"/>
                   </a:solidFill>
@@ -2249,8 +2944,82 @@
                   <a:ea typeface="+mn-ea"/>
                   <a:cs typeface="+mn-cs"/>
                 </a:rPr>
-                <a:t>有两份：KonIQ（两千张网络图片，1-5 分整数）和 SPAQ（一千张手机照片，0-10 分连续）。目标是排名越准越好（SRCC）、分数偏差越小越好（MAE）。</a:t>
-              </a:r>
+                <a:t>有两份：</a:t>
+              </a:r>
+              <a:r>
+                <a:rPr lang="en-US" altLang="zh-CN" sz="1200" dirty="0">
+                  <a:solidFill>
+                    <a:schemeClr val="dk1"/>
+                  </a:solidFill>
+                  <a:latin typeface="+mn-lt"/>
+                  <a:ea typeface="+mn-ea"/>
+                  <a:cs typeface="+mn-cs"/>
+                </a:rPr>
+                <a:t>KonIQ-10k </a:t>
+              </a:r>
+              <a:r>
+                <a:rPr lang="zh-CN" altLang="en-US" sz="1200" dirty="0">
+                  <a:solidFill>
+                    <a:schemeClr val="dk1"/>
+                  </a:solidFill>
+                  <a:latin typeface="+mn-lt"/>
+                  <a:ea typeface="+mn-ea"/>
+                  <a:cs typeface="+mn-cs"/>
+                </a:rPr>
+                <a:t>验证集</a:t>
+              </a:r>
+              <a:r>
+                <a:rPr lang="zh-CN" sz="1200" dirty="0">
+                  <a:solidFill>
+                    <a:schemeClr val="dk1"/>
+                  </a:solidFill>
+                  <a:latin typeface="+mn-lt"/>
+                  <a:ea typeface="+mn-ea"/>
+                  <a:cs typeface="+mn-cs"/>
+                </a:rPr>
+                <a:t>（1-5 分整数）和 </a:t>
+              </a:r>
+              <a:r>
+                <a:rPr lang="en-US" altLang="zh-CN" sz="1200" dirty="0">
+                  <a:solidFill>
+                    <a:schemeClr val="dk1"/>
+                  </a:solidFill>
+                  <a:latin typeface="+mn-lt"/>
+                  <a:ea typeface="+mn-ea"/>
+                  <a:cs typeface="+mn-cs"/>
+                </a:rPr>
+                <a:t>SPAQ </a:t>
+              </a:r>
+              <a:r>
+                <a:rPr lang="zh-CN" altLang="en-US" sz="1200" dirty="0">
+                  <a:solidFill>
+                    <a:schemeClr val="dk1"/>
+                  </a:solidFill>
+                  <a:latin typeface="+mn-lt"/>
+                  <a:ea typeface="+mn-ea"/>
+                  <a:cs typeface="+mn-cs"/>
+                </a:rPr>
+                <a:t>测试集</a:t>
+              </a:r>
+              <a:r>
+                <a:rPr lang="zh-CN" sz="1200" dirty="0">
+                  <a:solidFill>
+                    <a:schemeClr val="dk1"/>
+                  </a:solidFill>
+                  <a:latin typeface="+mn-lt"/>
+                  <a:ea typeface="+mn-ea"/>
+                  <a:cs typeface="+mn-cs"/>
+                </a:rPr>
+                <a:t>（0-10 分连续）。目标是排名越准越好（SRCC）、分数偏差越小越好（MAE）。</a:t>
+              </a:r>
+              <a:endParaRPr lang="zh-CN" sz="1200" dirty="0">
+                <a:solidFill>
+                  <a:schemeClr val="dk1"/>
+                </a:solidFill>
+                <a:latin typeface="+mn-lt"/>
+                <a:ea typeface="+mn-ea"/>
+                <a:cs typeface="+mn-cs"/>
+              </a:endParaRPr>
             </a:p>
           </p:txBody>
         </p:sp>
@@ -2262,8 +3031,8 @@
           </p:nvSpPr>
           <p:spPr>
             <a:xfrm>
-              <a:off x="3614356" y="2605326"/>
-              <a:ext cx="1546705" cy="198025"/>
+              <a:off x="3614356" y="2311629"/>
+              <a:ext cx="1546705" cy="161049"/>
             </a:xfrm>
             <a:prstGeom prst="rect">
               <a:avLst/>
@@ -2274,14 +3043,14 @@
             </a:ln>
           </p:spPr>
           <p:txBody>
-            <a:bodyPr wrap="none" lIns="0" tIns="0" rIns="0" bIns="0" anchor="t" anchorCtr="0">
+            <a:bodyPr wrap="square" lIns="0" tIns="0" rIns="0" bIns="0" anchor="t" anchorCtr="0">
               <a:spAutoFit/>
             </a:bodyPr>
             <a:lstStyle/>
             <a:p>
               <a:pPr algn="l"/>
               <a:r>
-                <a:rPr lang="zh-CN" sz="1010" b="1" dirty="0">
+                <a:rPr lang="zh-CN" sz="1400" b="1" dirty="0">
                   <a:solidFill>
                     <a:schemeClr val="accent1"/>
                   </a:solidFill>
@@ -2289,43 +3058,18 @@
                   <a:ea typeface="+mn-ea"/>
                   <a:cs typeface="+mn-cs"/>
                 </a:rPr>
-                <a:t>三个硬性限制</a:t>
-              </a:r>
-              <a:r>
-                <a:rPr lang="zh-CN" sz="1010" dirty="0">
-                  <a:solidFill>
-                    <a:schemeClr val="dk1"/>
-                  </a:solidFill>
-                  <a:latin typeface="+mn-lt"/>
-                  <a:ea typeface="+mn-ea"/>
-                  <a:cs typeface="+mn-cs"/>
-                </a:rPr>
-                <a:t>贯穿全程：</a:t>
-              </a:r>
+                <a:t>三个硬性限制：</a:t>
+              </a:r>
+              <a:endParaRPr lang="zh-CN" sz="1010" dirty="0">
+                <a:solidFill>
+                  <a:schemeClr val="dk1"/>
+                </a:solidFill>
+                <a:latin typeface="+mn-lt"/>
+                <a:ea typeface="+mn-ea"/>
+                <a:cs typeface="+mn-cs"/>
+              </a:endParaRPr>
             </a:p>
           </p:txBody>
-        </p:sp>
-        <p:sp>
-          <p:nvSpPr>
-            <p:cNvPr id="12" name="Ellipse 12"/>
-            <p:cNvSpPr/>
-            <p:nvPr/>
-          </p:nvSpPr>
-          <p:spPr>
-            <a:xfrm>
-              <a:off x="3738562" y="2976562"/>
-              <a:ext cx="47625" cy="47625"/>
-            </a:xfrm>
-            <a:prstGeom prst="ellipse">
-              <a:avLst/>
-            </a:prstGeom>
-            <a:solidFill>
-              <a:schemeClr val="accent2"/>
-            </a:solidFill>
-            <a:ln>
-              <a:noFill/>
-            </a:ln>
-          </p:spPr>
         </p:sp>
         <p:sp>
           <p:nvSpPr>
@@ -2335,8 +3079,8 @@
           </p:nvSpPr>
           <p:spPr>
             <a:xfrm>
-              <a:off x="3900106" y="2938701"/>
-              <a:ext cx="2049780" cy="198025"/>
+              <a:off x="3900525" y="2653012"/>
+              <a:ext cx="3334701" cy="137770"/>
             </a:xfrm>
             <a:prstGeom prst="rect">
               <a:avLst/>
@@ -2347,14 +3091,14 @@
             </a:ln>
           </p:spPr>
           <p:txBody>
-            <a:bodyPr wrap="none" lIns="0" tIns="0" rIns="0" bIns="0" anchor="t" anchorCtr="0">
+            <a:bodyPr wrap="square" lIns="0" tIns="0" rIns="0" bIns="0" anchor="t" anchorCtr="0">
               <a:spAutoFit/>
             </a:bodyPr>
             <a:lstStyle/>
             <a:p>
               <a:pPr algn="l"/>
               <a:r>
-                <a:rPr lang="zh-CN" sz="1010" dirty="0">
+                <a:rPr lang="en-US" altLang="zh-CN" sz="1200" dirty="0">
                   <a:solidFill>
                     <a:schemeClr val="dk1"/>
                   </a:solidFill>
@@ -2362,32 +3106,51 @@
                   <a:ea typeface="+mn-ea"/>
                   <a:cs typeface="+mn-cs"/>
                 </a:rPr>
-                <a:t>大模型本身不能训练、不能微调。</a:t>
-              </a:r>
+                <a:t>1.</a:t>
+              </a:r>
+              <a:r>
+                <a:rPr lang="zh-CN" sz="1200" dirty="0">
+                  <a:solidFill>
+                    <a:schemeClr val="dk1"/>
+                  </a:solidFill>
+                  <a:latin typeface="+mn-lt"/>
+                  <a:ea typeface="+mn-ea"/>
+                  <a:cs typeface="+mn-cs"/>
+                </a:rPr>
+                <a:t>大模型本身不能训练</a:t>
+              </a:r>
+              <a:r>
+                <a:rPr lang="en-US" altLang="zh-CN" sz="1200" dirty="0">
+                  <a:solidFill>
+                    <a:schemeClr val="dk1"/>
+                  </a:solidFill>
+                  <a:latin typeface="+mn-lt"/>
+                  <a:ea typeface="+mn-ea"/>
+                  <a:cs typeface="+mn-cs"/>
+                </a:rPr>
+                <a:t>.</a:t>
+              </a:r>
+              <a:r>
+                <a:rPr lang="zh-CN" sz="1200" dirty="0">
+                  <a:solidFill>
+                    <a:schemeClr val="dk1"/>
+                  </a:solidFill>
+                  <a:latin typeface="+mn-lt"/>
+                  <a:ea typeface="+mn-ea"/>
+                  <a:cs typeface="+mn-cs"/>
+                </a:rPr>
+                <a:t>不能微调。</a:t>
+              </a:r>
+              <a:endParaRPr lang="zh-CN" sz="1200" dirty="0">
+                <a:solidFill>
+                  <a:schemeClr val="dk1"/>
+                </a:solidFill>
+                <a:latin typeface="+mn-lt"/>
+                <a:ea typeface="+mn-ea"/>
+                <a:cs typeface="+mn-cs"/>
+              </a:endParaRPr>
             </a:p>
           </p:txBody>
-        </p:sp>
-        <p:sp>
-          <p:nvSpPr>
-            <p:cNvPr id="14" name="Ellipse 14"/>
-            <p:cNvSpPr/>
-            <p:nvPr/>
-          </p:nvSpPr>
-          <p:spPr>
-            <a:xfrm>
-              <a:off x="3738562" y="3262312"/>
-              <a:ext cx="47625" cy="47625"/>
-            </a:xfrm>
-            <a:prstGeom prst="ellipse">
-              <a:avLst/>
-            </a:prstGeom>
-            <a:solidFill>
-              <a:schemeClr val="accent2"/>
-            </a:solidFill>
-            <a:ln>
-              <a:noFill/>
-            </a:ln>
-          </p:spPr>
         </p:sp>
         <p:sp>
           <p:nvSpPr>
@@ -2397,8 +3160,8 @@
           </p:nvSpPr>
           <p:spPr>
             <a:xfrm>
-              <a:off x="3900106" y="3224451"/>
-              <a:ext cx="5054633" cy="198025"/>
+              <a:off x="3900525" y="2938771"/>
+              <a:ext cx="7561020" cy="137770"/>
             </a:xfrm>
             <a:prstGeom prst="rect">
               <a:avLst/>
@@ -2409,14 +3172,14 @@
             </a:ln>
           </p:spPr>
           <p:txBody>
-            <a:bodyPr wrap="none" lIns="0" tIns="0" rIns="0" bIns="0" anchor="t" anchorCtr="0">
+            <a:bodyPr wrap="square" lIns="0" tIns="0" rIns="0" bIns="0" anchor="t" anchorCtr="0">
               <a:spAutoFit/>
             </a:bodyPr>
             <a:lstStyle/>
             <a:p>
               <a:pPr algn="l"/>
               <a:r>
-                <a:rPr lang="zh-CN" sz="1010" dirty="0">
+                <a:rPr lang="en-US" altLang="zh-CN" sz="1200" dirty="0">
                   <a:solidFill>
                     <a:schemeClr val="dk1"/>
                   </a:solidFill>
@@ -2424,32 +3187,29 @@
                   <a:ea typeface="+mn-ea"/>
                   <a:cs typeface="+mn-cs"/>
                 </a:rPr>
+                <a:t>2.</a:t>
+              </a:r>
+              <a:r>
+                <a:rPr lang="zh-CN" sz="1200" dirty="0">
+                  <a:solidFill>
+                    <a:schemeClr val="dk1"/>
+                  </a:solidFill>
+                  <a:latin typeface="+mn-lt"/>
+                  <a:ea typeface="+mn-ea"/>
+                  <a:cs typeface="+mn-cs"/>
+                </a:rPr>
                 <a:t>数据集名称、图片编号、真人分数——这些信息绝对不能出现在给模型的任何输入里。</a:t>
               </a:r>
+              <a:endParaRPr lang="zh-CN" sz="1200" dirty="0">
+                <a:solidFill>
+                  <a:schemeClr val="dk1"/>
+                </a:solidFill>
+                <a:latin typeface="+mn-lt"/>
+                <a:ea typeface="+mn-ea"/>
+                <a:cs typeface="+mn-cs"/>
+              </a:endParaRPr>
             </a:p>
           </p:txBody>
-        </p:sp>
-        <p:sp>
-          <p:nvSpPr>
-            <p:cNvPr id="16" name="Ellipse 16"/>
-            <p:cNvSpPr/>
-            <p:nvPr/>
-          </p:nvSpPr>
-          <p:spPr>
-            <a:xfrm>
-              <a:off x="3738562" y="3548062"/>
-              <a:ext cx="47625" cy="47625"/>
-            </a:xfrm>
-            <a:prstGeom prst="ellipse">
-              <a:avLst/>
-            </a:prstGeom>
-            <a:solidFill>
-              <a:schemeClr val="accent2"/>
-            </a:solidFill>
-            <a:ln>
-              <a:noFill/>
-            </a:ln>
-          </p:spPr>
         </p:sp>
         <p:sp>
           <p:nvSpPr>
@@ -2459,8 +3219,8 @@
           </p:nvSpPr>
           <p:spPr>
             <a:xfrm>
-              <a:off x="3900106" y="3510201"/>
-              <a:ext cx="3681374" cy="198025"/>
+              <a:off x="3900525" y="3224531"/>
+              <a:ext cx="5698948" cy="137770"/>
             </a:xfrm>
             <a:prstGeom prst="rect">
               <a:avLst/>
@@ -2471,14 +3231,14 @@
             </a:ln>
           </p:spPr>
           <p:txBody>
-            <a:bodyPr wrap="none" lIns="0" tIns="0" rIns="0" bIns="0" anchor="t" anchorCtr="0">
+            <a:bodyPr wrap="square" lIns="0" tIns="0" rIns="0" bIns="0" anchor="t" anchorCtr="0">
               <a:spAutoFit/>
             </a:bodyPr>
             <a:lstStyle/>
             <a:p>
               <a:pPr algn="l"/>
               <a:r>
-                <a:rPr lang="zh-CN" sz="1010" dirty="0">
+                <a:rPr lang="en-US" altLang="zh-CN" sz="1200" dirty="0">
                   <a:solidFill>
                     <a:schemeClr val="dk1"/>
                   </a:solidFill>
@@ -2486,8 +3246,49 @@
                   <a:ea typeface="+mn-ea"/>
                   <a:cs typeface="+mn-cs"/>
                 </a:rPr>
-                <a:t>真人分数只能用于最后算一次分，中途不能用来调任何参数。</a:t>
-              </a:r>
+                <a:t>3.MOS</a:t>
+              </a:r>
+              <a:r>
+                <a:rPr lang="zh-CN" sz="1200" dirty="0">
+                  <a:solidFill>
+                    <a:schemeClr val="dk1"/>
+                  </a:solidFill>
+                  <a:latin typeface="+mn-lt"/>
+                  <a:ea typeface="+mn-ea"/>
+                  <a:cs typeface="+mn-cs"/>
+                </a:rPr>
+                <a:t>只能用于</a:t>
+              </a:r>
+              <a:r>
+                <a:rPr lang="zh-CN" altLang="en-US" sz="1200" dirty="0">
+                  <a:solidFill>
+                    <a:schemeClr val="dk1"/>
+                  </a:solidFill>
+                  <a:latin typeface="+mn-lt"/>
+                  <a:ea typeface="+mn-ea"/>
+                  <a:cs typeface="+mn-cs"/>
+                </a:rPr>
+                <a:t>离线性能评测</a:t>
+              </a:r>
+              <a:r>
+                <a:rPr lang="zh-CN" sz="1200" dirty="0">
+                  <a:solidFill>
+                    <a:schemeClr val="dk1"/>
+                  </a:solidFill>
+                  <a:latin typeface="+mn-lt"/>
+                  <a:ea typeface="+mn-ea"/>
+                  <a:cs typeface="+mn-cs"/>
+                </a:rPr>
+                <a:t>，中途不能用来调任何参数。</a:t>
+              </a:r>
+              <a:endParaRPr lang="zh-CN" sz="1200" dirty="0">
+                <a:solidFill>
+                  <a:schemeClr val="dk1"/>
+                </a:solidFill>
+                <a:latin typeface="+mn-lt"/>
+                <a:ea typeface="+mn-ea"/>
+                <a:cs typeface="+mn-cs"/>
+              </a:endParaRPr>
             </a:p>
           </p:txBody>
         </p:sp>
@@ -2499,8 +3300,8 @@
           </p:nvSpPr>
           <p:spPr>
             <a:xfrm>
-              <a:off x="3614356" y="4034076"/>
-              <a:ext cx="5476128" cy="198025"/>
+              <a:off x="3614356" y="3434088"/>
+              <a:ext cx="9368695" cy="137770"/>
             </a:xfrm>
             <a:prstGeom prst="rect">
               <a:avLst/>
@@ -2511,14 +3312,14 @@
             </a:ln>
           </p:spPr>
           <p:txBody>
-            <a:bodyPr wrap="none" lIns="0" tIns="0" rIns="0" bIns="0" anchor="t" anchorCtr="0">
+            <a:bodyPr wrap="square" lIns="0" tIns="0" rIns="0" bIns="0" anchor="t" anchorCtr="0">
               <a:spAutoFit/>
             </a:bodyPr>
             <a:lstStyle/>
             <a:p>
               <a:pPr algn="l"/>
               <a:r>
-                <a:rPr lang="zh-CN" sz="1010" b="1" dirty="0">
+                <a:rPr lang="zh-CN" sz="1200" b="1" dirty="0">
                   <a:solidFill>
                     <a:schemeClr val="accent1"/>
                   </a:solidFill>
@@ -2529,7 +3330,7 @@
                 <a:t>这意味着</a:t>
               </a:r>
               <a:r>
-                <a:rPr lang="zh-CN" sz="1010" dirty="0">
+                <a:rPr lang="zh-CN" sz="1200" dirty="0">
                   <a:solidFill>
                     <a:schemeClr val="dk1"/>
                   </a:solidFill>
@@ -2537,8 +3338,16 @@
                   <a:ea typeface="+mn-ea"/>
                   <a:cs typeface="+mn-cs"/>
                 </a:rPr>
-                <a:t>我要让一个完全没训练过的模型给图片打分，但它给的分跟真人的分还得对得上。</a:t>
-              </a:r>
+                <a:t>我要让一个完全没训练过的模型给图片打分，但它给的分跟真人的分的趋势以及分布尽量要符合。</a:t>
+              </a:r>
+              <a:endParaRPr lang="zh-CN" sz="1200" dirty="0">
+                <a:solidFill>
+                  <a:schemeClr val="dk1"/>
+                </a:solidFill>
+                <a:latin typeface="+mn-lt"/>
+                <a:ea typeface="+mn-ea"/>
+                <a:cs typeface="+mn-cs"/>
+              </a:endParaRPr>
             </a:p>
           </p:txBody>
         </p:sp>
@@ -2550,8 +3359,8 @@
           </p:nvSpPr>
           <p:spPr>
             <a:xfrm>
-              <a:off x="3614356" y="4319826"/>
-              <a:ext cx="6291925" cy="198025"/>
+              <a:off x="3620663" y="3652646"/>
+              <a:ext cx="6291784" cy="358203"/>
             </a:xfrm>
             <a:prstGeom prst="rect">
               <a:avLst/>
@@ -2562,13 +3371,68 @@
             </a:ln>
           </p:spPr>
           <p:txBody>
-            <a:bodyPr wrap="none" lIns="0" tIns="0" rIns="0" bIns="0" anchor="t" anchorCtr="0">
-              <a:spAutoFit/>
+            <a:bodyPr wrap="square" lIns="0" tIns="0" rIns="0" bIns="0" anchor="t" anchorCtr="0">
+              <a:noAutofit/>
             </a:bodyPr>
             <a:lstStyle/>
             <a:p>
               <a:pPr algn="l"/>
               <a:r>
+                <a:rPr lang="zh-CN" sz="1200" dirty="0">
+                  <a:solidFill>
+                    <a:schemeClr val="dk1"/>
+                  </a:solidFill>
+                  <a:latin typeface="+mn-lt"/>
+                  <a:ea typeface="+mn-ea"/>
+                  <a:cs typeface="+mn-cs"/>
+                </a:rPr>
+                <a:t>唯一的自由度：</a:t>
+              </a:r>
+              <a:r>
+                <a:rPr lang="zh-CN" altLang="en-US" sz="1200" dirty="0">
+                  <a:solidFill>
+                    <a:schemeClr val="dk1"/>
+                  </a:solidFill>
+                  <a:latin typeface="+mn-lt"/>
+                  <a:ea typeface="+mn-ea"/>
+                  <a:cs typeface="+mn-cs"/>
+                </a:rPr>
+                <a:t>允许对 </a:t>
+              </a:r>
+              <a:r>
+                <a:rPr lang="en-US" altLang="zh-CN" sz="1200" dirty="0">
+                  <a:solidFill>
+                    <a:schemeClr val="dk1"/>
+                  </a:solidFill>
+                  <a:latin typeface="+mn-lt"/>
+                  <a:ea typeface="+mn-ea"/>
+                  <a:cs typeface="+mn-cs"/>
+                </a:rPr>
+                <a:t>Router/Decision </a:t>
+              </a:r>
+              <a:r>
+                <a:rPr lang="zh-CN" altLang="en-US" sz="1200" dirty="0">
+                  <a:solidFill>
+                    <a:schemeClr val="dk1"/>
+                  </a:solidFill>
+                  <a:latin typeface="+mn-lt"/>
+                  <a:ea typeface="+mn-ea"/>
+                  <a:cs typeface="+mn-cs"/>
+                </a:rPr>
+                <a:t>层进行训练或提示优化</a:t>
+              </a:r>
+              <a:r>
+                <a:rPr lang="zh-CN" sz="1200" dirty="0">
+                  <a:solidFill>
+                    <a:schemeClr val="dk1"/>
+                  </a:solidFill>
+                  <a:latin typeface="+mn-lt"/>
+                  <a:ea typeface="+mn-ea"/>
+                  <a:cs typeface="+mn-cs"/>
+                </a:rPr>
+                <a:t>——决定问模型什么问题、多个专家的意见听谁的、怎么解释结果</a:t>
+              </a:r>
+              <a:r>
                 <a:rPr lang="zh-CN" sz="1010" dirty="0">
                   <a:solidFill>
                     <a:schemeClr val="dk1"/>
@@ -2577,8 +3441,16 @@
                   <a:ea typeface="+mn-ea"/>
                   <a:cs typeface="+mn-cs"/>
                 </a:rPr>
-                <a:t>唯一的自由度：可以设计一个"路由器"——决定问模型什么问题、多个专家的意见听谁的、怎么解释结果。</a:t>
-              </a:r>
+                <a:t>。</a:t>
+              </a:r>
+              <a:endParaRPr lang="zh-CN" sz="1010" dirty="0">
+                <a:solidFill>
+                  <a:schemeClr val="dk1"/>
+                </a:solidFill>
+                <a:latin typeface="+mn-lt"/>
+                <a:ea typeface="+mn-ea"/>
+                <a:cs typeface="+mn-cs"/>
+              </a:endParaRPr>
             </a:p>
           </p:txBody>
         </p:sp>
@@ -2590,8 +3462,8 @@
           </p:nvSpPr>
           <p:spPr>
             <a:xfrm>
-              <a:off x="3614356" y="4605576"/>
-              <a:ext cx="4646734" cy="198025"/>
+              <a:off x="3620663" y="4092086"/>
+              <a:ext cx="10138909" cy="552506"/>
             </a:xfrm>
             <a:prstGeom prst="rect">
               <a:avLst/>
@@ -2602,14 +3474,14 @@
             </a:ln>
           </p:spPr>
           <p:txBody>
-            <a:bodyPr wrap="none" lIns="0" tIns="0" rIns="0" bIns="0" anchor="t" anchorCtr="0">
+            <a:bodyPr wrap="square" lIns="0" tIns="0" rIns="0" bIns="0" anchor="t" anchorCtr="0">
               <a:spAutoFit/>
             </a:bodyPr>
             <a:lstStyle/>
             <a:p>
               <a:pPr algn="l"/>
               <a:r>
-                <a:rPr lang="zh-CN" sz="1010" dirty="0">
+                <a:rPr lang="zh-CN" sz="1200" dirty="0">
                   <a:solidFill>
                     <a:schemeClr val="dk1"/>
                   </a:solidFill>
@@ -2617,8 +3489,103 @@
                   <a:ea typeface="+mn-ea"/>
                   <a:cs typeface="+mn-cs"/>
                 </a:rPr>
-                <a:t>路由器的训练信号从哪来？不能用人打分——于是有了后面的两两比较锦标赛。</a:t>
-              </a:r>
+                <a:t>路由器的训练信号从哪来？不能用人打分（</a:t>
+              </a:r>
+              <a:r>
+                <a:rPr lang="en-US" altLang="zh-CN" sz="1200" dirty="0">
+                  <a:solidFill>
+                    <a:schemeClr val="dk1"/>
+                  </a:solidFill>
+                  <a:latin typeface="+mn-lt"/>
+                  <a:ea typeface="+mn-ea"/>
+                  <a:cs typeface="+mn-cs"/>
+                </a:rPr>
+                <a:t>MOS)</a:t>
+              </a:r>
+              <a:r>
+                <a:rPr lang="zh-CN" altLang="en-US" sz="1200" dirty="0">
+                  <a:solidFill>
+                    <a:schemeClr val="dk1"/>
+                  </a:solidFill>
+                  <a:latin typeface="+mn-lt"/>
+                  <a:ea typeface="+mn-ea"/>
+                  <a:cs typeface="+mn-cs"/>
+                </a:rPr>
+                <a:t>数据。</a:t>
+              </a:r>
+              <a:endParaRPr lang="zh-CN" sz="1200" dirty="0">
+                <a:solidFill>
+                  <a:schemeClr val="dk1"/>
+                </a:solidFill>
+                <a:latin typeface="+mn-lt"/>
+                <a:ea typeface="+mn-ea"/>
+                <a:cs typeface="+mn-cs"/>
+              </a:endParaRPr>
+            </a:p>
+            <a:p>
+              <a:pPr algn="l"/>
+              <a:endParaRPr lang="zh-CN" sz="1200" dirty="0">
+                <a:solidFill>
+                  <a:schemeClr val="dk1"/>
+                </a:solidFill>
+                <a:latin typeface="+mn-lt"/>
+                <a:ea typeface="+mn-ea"/>
+                <a:cs typeface="+mn-cs"/>
+              </a:endParaRPr>
+            </a:p>
+            <a:p>
+              <a:pPr algn="l"/>
+              <a:r>
+                <a:rPr lang="zh-CN" sz="1200" dirty="0">
+                  <a:solidFill>
+                    <a:schemeClr val="dk1"/>
+                  </a:solidFill>
+                  <a:latin typeface="+mn-lt"/>
+                  <a:ea typeface="+mn-ea"/>
+                  <a:cs typeface="+mn-cs"/>
+                </a:rPr>
+                <a:t>于是我想到了利用合理方法，</a:t>
+              </a:r>
+              <a:r>
+                <a:rPr lang="zh-CN" altLang="en-US" sz="1200" dirty="0">
+                  <a:solidFill>
+                    <a:schemeClr val="dk1"/>
+                  </a:solidFill>
+                  <a:latin typeface="+mn-lt"/>
+                  <a:ea typeface="+mn-ea"/>
+                  <a:cs typeface="+mn-cs"/>
+                </a:rPr>
+                <a:t>充分挖掘开源多模态大模型自身的图像质量感知与评分能力。</a:t>
+              </a:r>
+              <a:br>
+                <a:rPr lang="zh-CN" altLang="en-US" sz="1200" dirty="0">
+                  <a:solidFill>
+                    <a:schemeClr val="dk1"/>
+                  </a:solidFill>
+                  <a:latin typeface="+mn-lt"/>
+                  <a:ea typeface="+mn-ea"/>
+                  <a:cs typeface="+mn-cs"/>
+                </a:rPr>
+              </a:br>
+              <a:r>
+                <a:rPr lang="zh-CN" sz="1200" dirty="0">
+                  <a:solidFill>
+                    <a:schemeClr val="dk1"/>
+                  </a:solidFill>
+                  <a:latin typeface="+mn-lt"/>
+                  <a:ea typeface="+mn-ea"/>
+                  <a:cs typeface="+mn-cs"/>
+                </a:rPr>
+                <a:t>有了后面的两两比较锦标赛。</a:t>
+              </a:r>
+              <a:endParaRPr lang="zh-CN" sz="1200" dirty="0">
+                <a:solidFill>
+                  <a:schemeClr val="dk1"/>
+                </a:solidFill>
+                <a:latin typeface="+mn-lt"/>
+                <a:ea typeface="+mn-ea"/>
+                <a:cs typeface="+mn-cs"/>
+              </a:endParaRPr>
             </a:p>
           </p:txBody>
         </p:sp>
@@ -2650,9 +3617,18 @@
   <p:clrMapOvr>
     <a:masterClrMapping/>
   </p:clrMapOvr>
-  <p:transition xmlns:p14="http://schemas.microsoft.com/office/powerpoint/2010/main" p14:dur="400">
-    <p:fade/>
-  </p:transition>
+  <mc:AlternateContent xmlns:mc="http://schemas.openxmlformats.org/markup-compatibility/2006">
+    <mc:Choice xmlns:p14="http://schemas.microsoft.com/office/powerpoint/2010/main" Requires="p14">
+      <p:transition p14:dur="400">
+        <p:fade/>
+      </p:transition>
+    </mc:Choice>
+    <mc:Fallback>
+      <p:transition>
+        <p:fade/>
+      </p:transition>
+    </mc:Fallback>
+  </mc:AlternateContent>
 </p:sld>
 </file>
 
@@ -2734,52 +3710,20 @@
                 <a:solidFill>
                   <a:srgbClr val="C3C2B7"/>
                 </a:solidFill>
-                <a:latin typeface="Arial"/>
-                <a:ea typeface="Arial"/>
-                <a:cs typeface="Arial"/>
+                <a:latin typeface="Arial" panose="020B0604020202020204"/>
+                <a:ea typeface="Arial" panose="020B0604020202020204"/>
+                <a:cs typeface="Arial" panose="020B0604020202020204"/>
               </a:rPr>
               <a:t>3 / 11</a:t>
             </a:r>
-          </a:p>
-        </p:txBody>
-      </p:sp>
-      <p:sp>
-        <p:nvSpPr>
-          <p:cNvPr id="4" name="TextBox 4"/>
-          <p:cNvSpPr txBox="1"/>
-          <p:nvPr/>
-        </p:nvSpPr>
-        <p:spPr>
-          <a:xfrm>
-            <a:off x="757238" y="6567488"/>
-            <a:ext cx="211455" cy="147638"/>
-          </a:xfrm>
-          <a:prstGeom prst="rect">
-            <a:avLst/>
-          </a:prstGeom>
-          <a:noFill/>
-          <a:ln>
-            <a:noFill/>
-          </a:ln>
-        </p:spPr>
-        <p:txBody>
-          <a:bodyPr wrap="none" lIns="0" tIns="0" rIns="0" bIns="0" anchor="t" anchorCtr="0">
-            <a:spAutoFit/>
-          </a:bodyPr>
-          <a:lstStyle/>
-          <a:p>
-            <a:pPr algn="l"/>
-            <a:r>
-              <a:rPr lang="zh-CN" sz="750" dirty="0">
-                <a:solidFill>
-                  <a:srgbClr val="A0A0A0"/>
-                </a:solidFill>
-                <a:latin typeface="+mn-lt"/>
-                <a:ea typeface="+mn-ea"/>
-                <a:cs typeface="+mn-cs"/>
-              </a:rPr>
-              <a:t>框架</a:t>
-            </a:r>
+            <a:endParaRPr lang="en-US" sz="750" dirty="0">
+              <a:solidFill>
+                <a:srgbClr val="C3C2B7"/>
+              </a:solidFill>
+              <a:latin typeface="Arial" panose="020B0604020202020204"/>
+              <a:ea typeface="Arial" panose="020B0604020202020204"/>
+              <a:cs typeface="Arial" panose="020B0604020202020204"/>
+            </a:endParaRPr>
           </a:p>
         </p:txBody>
       </p:sp>
@@ -2791,8 +3735,8 @@
         </p:nvSpPr>
         <p:spPr>
           <a:xfrm>
-            <a:off x="757238" y="823912"/>
-            <a:ext cx="1887474" cy="147638"/>
+            <a:off x="2392998" y="832802"/>
+            <a:ext cx="2889250" cy="215265"/>
           </a:xfrm>
           <a:prstGeom prst="rect">
             <a:avLst/>
@@ -2810,7 +3754,7 @@
           <a:p>
             <a:pPr algn="l"/>
             <a:r>
-              <a:rPr lang="zh-CN" sz="750" b="1" spc="225" dirty="0">
+              <a:rPr lang="zh-CN" sz="1400" b="1" spc="225" dirty="0">
                 <a:solidFill>
                   <a:schemeClr val="accent1"/>
                 </a:solidFill>
@@ -2820,6 +3764,14 @@
               </a:rPr>
               <a:t>我的方案：三路并行，门控融合</a:t>
             </a:r>
+            <a:endParaRPr lang="zh-CN" sz="1400" b="1" spc="225" dirty="0">
+              <a:solidFill>
+                <a:schemeClr val="accent1"/>
+              </a:solidFill>
+              <a:latin typeface="+mn-lt"/>
+              <a:ea typeface="+mn-ea"/>
+              <a:cs typeface="+mn-cs"/>
+            </a:endParaRPr>
           </a:p>
         </p:txBody>
       </p:sp>
@@ -2831,8 +3783,8 @@
         </p:nvSpPr>
         <p:spPr>
           <a:xfrm>
-            <a:off x="742950" y="361950"/>
-            <a:ext cx="1437475" cy="1733550"/>
+            <a:off x="761365" y="267335"/>
+            <a:ext cx="1271270" cy="1384935"/>
           </a:xfrm>
           <a:prstGeom prst="rect">
             <a:avLst/>
@@ -2852,14 +3804,25 @@
             <a:r>
               <a:rPr lang="en-US" sz="9000" b="1" dirty="0">
                 <a:solidFill>
-                  <a:srgbClr val="F0F0ED"/>
-                </a:solidFill>
-                <a:latin typeface="Arial"/>
-                <a:ea typeface="Arial"/>
-                <a:cs typeface="Arial"/>
+                  <a:schemeClr val="accent1">
+                    <a:lumMod val="50000"/>
+                    <a:lumOff val="50000"/>
+                  </a:schemeClr>
+                </a:solidFill>
+                <a:latin typeface="Arial" panose="020B0604020202020204"/>
+                <a:ea typeface="Arial" panose="020B0604020202020204"/>
+                <a:cs typeface="Arial" panose="020B0604020202020204"/>
               </a:rPr>
               <a:t>02</a:t>
             </a:r>
+            <a:endParaRPr lang="en-US" sz="9000" b="1" dirty="0">
+              <a:solidFill>
+                <a:srgbClr val="F0F0ED"/>
+              </a:solidFill>
+              <a:latin typeface="Arial" panose="020B0604020202020204"/>
+              <a:ea typeface="Arial" panose="020B0604020202020204"/>
+              <a:cs typeface="Arial" panose="020B0604020202020204"/>
+            </a:endParaRPr>
           </a:p>
         </p:txBody>
       </p:sp>
@@ -2871,10 +3834,10 @@
         </p:nvGrpSpPr>
         <p:grpSpPr>
           <a:xfrm>
-            <a:off x="755904" y="1775460"/>
-            <a:ext cx="14505626" cy="3542347"/>
-            <a:chOff x="755904" y="1775460"/>
-            <a:chExt cx="14505626" cy="3542347"/>
+            <a:off x="697529" y="1775460"/>
+            <a:ext cx="10923606" cy="4340226"/>
+            <a:chOff x="690042" y="1775460"/>
+            <a:chExt cx="12378576" cy="4340614"/>
           </a:xfrm>
         </p:grpSpPr>
         <p:sp>
@@ -2886,7 +3849,7 @@
           <p:spPr>
             <a:xfrm>
               <a:off x="755904" y="1775460"/>
-              <a:ext cx="2217268" cy="234696"/>
+              <a:ext cx="2217268" cy="184166"/>
             </a:xfrm>
             <a:prstGeom prst="rect">
               <a:avLst/>
@@ -2897,7 +3860,7 @@
             </a:ln>
           </p:spPr>
           <p:txBody>
-            <a:bodyPr wrap="none" lIns="0" tIns="0" rIns="0" bIns="0" anchor="t" anchorCtr="0">
+            <a:bodyPr wrap="square" lIns="0" tIns="0" rIns="0" bIns="0" anchor="t" anchorCtr="0">
               <a:spAutoFit/>
             </a:bodyPr>
             <a:lstStyle/>
@@ -2914,6 +3877,14 @@
                 </a:rPr>
                 <a:t>一张图进来，同时走三条路：</a:t>
               </a:r>
+              <a:endParaRPr lang="zh-CN" sz="1200" b="1" dirty="0">
+                <a:solidFill>
+                  <a:schemeClr val="accent1"/>
+                </a:solidFill>
+                <a:latin typeface="+mn-lt"/>
+                <a:ea typeface="+mn-ea"/>
+                <a:cs typeface="+mn-cs"/>
+              </a:endParaRPr>
             </a:p>
           </p:txBody>
         </p:sp>
@@ -2947,8 +3918,8 @@
           </p:nvSpPr>
           <p:spPr>
             <a:xfrm>
-              <a:off x="947547" y="2275999"/>
-              <a:ext cx="1533670" cy="190690"/>
+              <a:off x="947312" y="2275885"/>
+              <a:ext cx="2201911" cy="184166"/>
             </a:xfrm>
             <a:prstGeom prst="rect">
               <a:avLst/>
@@ -2959,14 +3930,14 @@
             </a:ln>
           </p:spPr>
           <p:txBody>
-            <a:bodyPr wrap="none" lIns="0" tIns="0" rIns="0" bIns="0" anchor="t" anchorCtr="0">
+            <a:bodyPr wrap="square" lIns="0" tIns="0" rIns="0" bIns="0" anchor="t" anchorCtr="0">
               <a:spAutoFit/>
             </a:bodyPr>
             <a:lstStyle/>
             <a:p>
               <a:pPr algn="l"/>
               <a:r>
-                <a:rPr lang="zh-CN" sz="980" b="1" dirty="0">
+                <a:rPr lang="zh-CN" sz="1200" b="1" dirty="0">
                   <a:solidFill>
                     <a:srgbClr val="FFFFFF"/>
                   </a:solidFill>
@@ -2976,6 +3947,14 @@
                 </a:rPr>
                 <a:t>路一：三个专家各评一次</a:t>
               </a:r>
+              <a:endParaRPr lang="zh-CN" sz="1200" b="1" dirty="0">
+                <a:solidFill>
+                  <a:srgbClr val="FFFFFF"/>
+                </a:solidFill>
+                <a:latin typeface="+mn-lt"/>
+                <a:ea typeface="+mn-ea"/>
+                <a:cs typeface="+mn-cs"/>
+              </a:endParaRPr>
             </a:p>
           </p:txBody>
         </p:sp>
@@ -2987,8 +3966,8 @@
           </p:nvSpPr>
           <p:spPr>
             <a:xfrm>
-              <a:off x="3709988" y="2280047"/>
-              <a:ext cx="9525544" cy="183356"/>
+              <a:off x="3709988" y="2046363"/>
+              <a:ext cx="7141210" cy="368968"/>
             </a:xfrm>
             <a:prstGeom prst="rect">
               <a:avLst/>
@@ -2999,14 +3978,14 @@
             </a:ln>
           </p:spPr>
           <p:txBody>
-            <a:bodyPr wrap="none" lIns="0" tIns="0" rIns="0" bIns="0" anchor="t" anchorCtr="0">
+            <a:bodyPr wrap="square" lIns="0" tIns="0" rIns="0" bIns="0" anchor="t" anchorCtr="0">
               <a:spAutoFit/>
             </a:bodyPr>
             <a:lstStyle/>
             <a:p>
               <a:pPr algn="l"/>
               <a:r>
-                <a:rPr lang="zh-CN" sz="940" dirty="0">
+                <a:rPr lang="zh-CN" sz="1200" dirty="0">
                   <a:solidFill>
                     <a:schemeClr val="dk1"/>
                   </a:solidFill>
@@ -3014,8 +3993,38 @@
                   <a:ea typeface="+mn-ea"/>
                   <a:cs typeface="+mn-cs"/>
                 </a:rPr>
-                <a:t>技术质量（看噪点/模糊/压缩痕迹）、整体印象（普通人第一眼感觉）、内容完整性（主体有没有被裁）。三个专家是同一个模型扮演的不同角色——换提示词但不换脑子。</a:t>
-              </a:r>
+                <a:t>技术质量（看噪点/模糊/压缩痕迹）、整体印象（普通人第一眼感觉）、内容完整性（主体有没有被裁）。</a:t>
+              </a:r>
+              <a:endParaRPr lang="zh-CN" sz="1200" dirty="0">
+                <a:solidFill>
+                  <a:schemeClr val="dk1"/>
+                </a:solidFill>
+                <a:latin typeface="+mn-lt"/>
+                <a:ea typeface="+mn-ea"/>
+                <a:cs typeface="+mn-cs"/>
+              </a:endParaRPr>
+            </a:p>
+            <a:p>
+              <a:pPr algn="l"/>
+              <a:r>
+                <a:rPr lang="zh-CN" sz="1200" dirty="0">
+                  <a:solidFill>
+                    <a:schemeClr val="dk1"/>
+                  </a:solidFill>
+                  <a:latin typeface="+mn-lt"/>
+                  <a:ea typeface="+mn-ea"/>
+                  <a:cs typeface="+mn-cs"/>
+                </a:rPr>
+                <a:t>三个专家是同一个模型扮演的不同角色——换提示词但不换脑子。</a:t>
+              </a:r>
+              <a:endParaRPr lang="zh-CN" sz="1200" dirty="0">
+                <a:solidFill>
+                  <a:schemeClr val="dk1"/>
+                </a:solidFill>
+                <a:latin typeface="+mn-lt"/>
+                <a:ea typeface="+mn-ea"/>
+                <a:cs typeface="+mn-cs"/>
+              </a:endParaRPr>
             </a:p>
           </p:txBody>
         </p:sp>
@@ -3027,7 +4036,7 @@
           </p:nvSpPr>
           <p:spPr>
             <a:xfrm>
-              <a:off x="762000" y="2619375"/>
+              <a:off x="762720" y="2851806"/>
               <a:ext cx="2667000" cy="361950"/>
             </a:xfrm>
             <a:prstGeom prst="rect">
@@ -3049,8 +4058,8 @@
           </p:nvSpPr>
           <p:spPr>
             <a:xfrm>
-              <a:off x="947547" y="2752249"/>
-              <a:ext cx="1395146" cy="190690"/>
+              <a:off x="948032" y="2984608"/>
+              <a:ext cx="2481108" cy="184166"/>
             </a:xfrm>
             <a:prstGeom prst="rect">
               <a:avLst/>
@@ -3061,14 +4070,14 @@
             </a:ln>
           </p:spPr>
           <p:txBody>
-            <a:bodyPr wrap="none" lIns="0" tIns="0" rIns="0" bIns="0" anchor="t" anchorCtr="0">
+            <a:bodyPr wrap="square" lIns="0" tIns="0" rIns="0" bIns="0" anchor="t" anchorCtr="0">
               <a:spAutoFit/>
             </a:bodyPr>
             <a:lstStyle/>
             <a:p>
               <a:pPr algn="l"/>
               <a:r>
-                <a:rPr lang="zh-CN" sz="980" b="1" dirty="0">
+                <a:rPr lang="zh-CN" sz="1200" b="1" dirty="0">
                   <a:solidFill>
                     <a:srgbClr val="FFFFFF"/>
                   </a:solidFill>
@@ -3078,6 +4087,14 @@
                 </a:rPr>
                 <a:t>路二：算七个像素特征</a:t>
               </a:r>
+              <a:endParaRPr lang="zh-CN" sz="1200" b="1" dirty="0">
+                <a:solidFill>
+                  <a:srgbClr val="FFFFFF"/>
+                </a:solidFill>
+                <a:latin typeface="+mn-lt"/>
+                <a:ea typeface="+mn-ea"/>
+                <a:cs typeface="+mn-cs"/>
+              </a:endParaRPr>
             </a:p>
           </p:txBody>
         </p:sp>
@@ -3089,8 +4106,8 @@
           </p:nvSpPr>
           <p:spPr>
             <a:xfrm>
-              <a:off x="3709988" y="2756297"/>
-              <a:ext cx="11551542" cy="183356"/>
+              <a:off x="3709988" y="2702334"/>
+              <a:ext cx="5334000" cy="553770"/>
             </a:xfrm>
             <a:prstGeom prst="rect">
               <a:avLst/>
@@ -3101,13 +4118,68 @@
             </a:ln>
           </p:spPr>
           <p:txBody>
-            <a:bodyPr wrap="none" lIns="0" tIns="0" rIns="0" bIns="0" anchor="t" anchorCtr="0">
+            <a:bodyPr wrap="square" lIns="0" tIns="0" rIns="0" bIns="0" anchor="t" anchorCtr="0">
               <a:spAutoFit/>
             </a:bodyPr>
             <a:lstStyle/>
             <a:p>
               <a:pPr algn="l"/>
               <a:r>
+                <a:rPr lang="zh-CN" sz="1200" dirty="0">
+                  <a:solidFill>
+                    <a:schemeClr val="dk1"/>
+                  </a:solidFill>
+                  <a:latin typeface="+mn-lt"/>
+                  <a:ea typeface="+mn-ea"/>
+                  <a:cs typeface="+mn-cs"/>
+                </a:rPr>
+                <a:t>调用工具用传统图像处理（OpenCV）提取：</a:t>
+              </a:r>
+              <a:endParaRPr lang="zh-CN" sz="1200" dirty="0">
+                <a:solidFill>
+                  <a:schemeClr val="dk1"/>
+                </a:solidFill>
+                <a:latin typeface="+mn-lt"/>
+                <a:ea typeface="+mn-ea"/>
+                <a:cs typeface="+mn-cs"/>
+              </a:endParaRPr>
+            </a:p>
+            <a:p>
+              <a:pPr algn="l"/>
+              <a:r>
+                <a:rPr lang="zh-CN" sz="1200" dirty="0">
+                  <a:solidFill>
+                    <a:schemeClr val="dk1"/>
+                  </a:solidFill>
+                  <a:latin typeface="+mn-lt"/>
+                  <a:ea typeface="+mn-ea"/>
+                  <a:cs typeface="+mn-cs"/>
+                </a:rPr>
+                <a:t>画面锐不锐、噪声大不大、色彩丰不丰富、亮不亮、分辨率多大、长宽比多少。</a:t>
+              </a:r>
+              <a:endParaRPr lang="zh-CN" sz="1200" dirty="0">
+                <a:solidFill>
+                  <a:schemeClr val="dk1"/>
+                </a:solidFill>
+                <a:latin typeface="+mn-lt"/>
+                <a:ea typeface="+mn-ea"/>
+                <a:cs typeface="+mn-cs"/>
+              </a:endParaRPr>
+            </a:p>
+            <a:p>
+              <a:pPr algn="l"/>
+              <a:r>
+                <a:rPr lang="zh-CN" sz="1200" dirty="0">
+                  <a:solidFill>
+                    <a:schemeClr val="dk1"/>
+                  </a:solidFill>
+                  <a:latin typeface="+mn-lt"/>
+                  <a:ea typeface="+mn-ea"/>
+                  <a:cs typeface="+mn-cs"/>
+                </a:rPr>
+                <a:t>最关键的一个：三个专家的评分分歧有多大——"分歧度"</a:t>
+              </a:r>
+              <a:r>
                 <a:rPr lang="zh-CN" sz="940" dirty="0">
                   <a:solidFill>
                     <a:schemeClr val="dk1"/>
@@ -3116,8 +4188,16 @@
                   <a:ea typeface="+mn-ea"/>
                   <a:cs typeface="+mn-cs"/>
                 </a:rPr>
-                <a:t>用传统图像处理（OpenCV）提取：画面锐不锐、噪声大不大、色彩丰不丰富、亮不亮、分辨率多大、长宽比多少。最关键的一个：三个专家的评分分歧有多大——这个"分歧度"后来成了门控的最强信号。</a:t>
-              </a:r>
+                <a:t>。</a:t>
+              </a:r>
+              <a:endParaRPr lang="zh-CN" sz="940" dirty="0">
+                <a:solidFill>
+                  <a:schemeClr val="dk1"/>
+                </a:solidFill>
+                <a:latin typeface="+mn-lt"/>
+                <a:ea typeface="+mn-ea"/>
+                <a:cs typeface="+mn-cs"/>
+              </a:endParaRPr>
             </a:p>
           </p:txBody>
         </p:sp>
@@ -3129,7 +4209,7 @@
           </p:nvSpPr>
           <p:spPr>
             <a:xfrm>
-              <a:off x="762000" y="3095625"/>
+              <a:off x="756243" y="3554136"/>
               <a:ext cx="2667000" cy="361950"/>
             </a:xfrm>
             <a:prstGeom prst="rect">
@@ -3151,8 +4231,8 @@
           </p:nvSpPr>
           <p:spPr>
             <a:xfrm>
-              <a:off x="947547" y="3228499"/>
-              <a:ext cx="1672194" cy="190690"/>
+              <a:off x="941555" y="3686981"/>
+              <a:ext cx="2482547" cy="184166"/>
             </a:xfrm>
             <a:prstGeom prst="rect">
               <a:avLst/>
@@ -3163,14 +4243,14 @@
             </a:ln>
           </p:spPr>
           <p:txBody>
-            <a:bodyPr wrap="none" lIns="0" tIns="0" rIns="0" bIns="0" anchor="t" anchorCtr="0">
+            <a:bodyPr wrap="square" lIns="0" tIns="0" rIns="0" bIns="0" anchor="t" anchorCtr="0">
               <a:spAutoFit/>
             </a:bodyPr>
             <a:lstStyle/>
             <a:p>
               <a:pPr algn="l"/>
               <a:r>
-                <a:rPr lang="zh-CN" sz="980" b="1" dirty="0">
+                <a:rPr lang="zh-CN" sz="1200" b="1" dirty="0">
                   <a:solidFill>
                     <a:srgbClr val="FFFFFF"/>
                   </a:solidFill>
@@ -3180,6 +4260,14 @@
                 </a:rPr>
                 <a:t>路三：用四句话分别问一遍</a:t>
               </a:r>
+              <a:endParaRPr lang="zh-CN" sz="1200" b="1" dirty="0">
+                <a:solidFill>
+                  <a:srgbClr val="FFFFFF"/>
+                </a:solidFill>
+                <a:latin typeface="+mn-lt"/>
+                <a:ea typeface="+mn-ea"/>
+                <a:cs typeface="+mn-cs"/>
+              </a:endParaRPr>
             </a:p>
           </p:txBody>
         </p:sp>
@@ -3191,8 +4279,8 @@
           </p:nvSpPr>
           <p:spPr>
             <a:xfrm>
-              <a:off x="3709988" y="3232547"/>
-              <a:ext cx="7665364" cy="183356"/>
+              <a:off x="3709988" y="3543725"/>
+              <a:ext cx="9358630" cy="184166"/>
             </a:xfrm>
             <a:prstGeom prst="rect">
               <a:avLst/>
@@ -3203,14 +4291,14 @@
             </a:ln>
           </p:spPr>
           <p:txBody>
-            <a:bodyPr wrap="none" lIns="0" tIns="0" rIns="0" bIns="0" anchor="t" anchorCtr="0">
+            <a:bodyPr wrap="square" lIns="0" tIns="0" rIns="0" bIns="0" anchor="t" anchorCtr="0">
               <a:spAutoFit/>
             </a:bodyPr>
             <a:lstStyle/>
             <a:p>
               <a:pPr algn="l"/>
               <a:r>
-                <a:rPr lang="zh-CN" sz="940" dirty="0">
+                <a:rPr lang="zh-CN" sz="1200" dirty="0">
                   <a:solidFill>
                     <a:schemeClr val="dk1"/>
                   </a:solidFill>
@@ -3218,8 +4306,16 @@
                   <a:ea typeface="+mn-ea"/>
                   <a:cs typeface="+mn-cs"/>
                 </a:rPr>
-                <a:t>同一个意思换四种问法（"这图几分？""请给个总评分数"……），取平均。单次回答有随机波动，四条平均就稳了——这路负责"零点校准"。</a:t>
-              </a:r>
+                <a:t>同一个意思换四种问法（"这图几分？""请给个总评分数"……），取平均。这路负责"零点校准"。</a:t>
+              </a:r>
+              <a:endParaRPr lang="zh-CN" sz="1200" dirty="0">
+                <a:solidFill>
+                  <a:schemeClr val="dk1"/>
+                </a:solidFill>
+                <a:latin typeface="+mn-lt"/>
+                <a:ea typeface="+mn-ea"/>
+                <a:cs typeface="+mn-cs"/>
+              </a:endParaRPr>
             </a:p>
           </p:txBody>
         </p:sp>
@@ -3231,7 +4327,7 @@
           </p:nvSpPr>
           <p:spPr>
             <a:xfrm>
-              <a:off x="762000" y="3667125"/>
+              <a:off x="690042" y="4105314"/>
               <a:ext cx="10668000" cy="9525"/>
             </a:xfrm>
             <a:prstGeom prst="rect">
@@ -3244,6 +4340,12 @@
               <a:noFill/>
             </a:ln>
           </p:spPr>
+          <p:txBody>
+            <a:bodyPr/>
+            <a:p>
+              <a:endParaRPr lang="zh-CN" altLang="en-US"/>
+            </a:p>
+          </p:txBody>
         </p:sp>
         <p:sp>
           <p:nvSpPr>
@@ -3253,8 +4355,8 @@
           </p:nvSpPr>
           <p:spPr>
             <a:xfrm>
-              <a:off x="755904" y="3918585"/>
-              <a:ext cx="2047646" cy="234696"/>
+              <a:off x="756243" y="4288380"/>
+              <a:ext cx="3458296" cy="184166"/>
             </a:xfrm>
             <a:prstGeom prst="rect">
               <a:avLst/>
@@ -3265,7 +4367,7 @@
             </a:ln>
           </p:spPr>
           <p:txBody>
-            <a:bodyPr wrap="none" lIns="0" tIns="0" rIns="0" bIns="0" anchor="t" anchorCtr="0">
+            <a:bodyPr wrap="square" lIns="0" tIns="0" rIns="0" bIns="0" anchor="t" anchorCtr="0">
               <a:spAutoFit/>
             </a:bodyPr>
             <a:lstStyle/>
@@ -3282,6 +4384,14 @@
                 </a:rPr>
                 <a:t>然后：门控矩阵决定听谁的</a:t>
               </a:r>
+              <a:endParaRPr lang="zh-CN" sz="1200" b="1" dirty="0">
+                <a:solidFill>
+                  <a:schemeClr val="accent1"/>
+                </a:solidFill>
+                <a:latin typeface="+mn-lt"/>
+                <a:ea typeface="+mn-ea"/>
+                <a:cs typeface="+mn-cs"/>
+              </a:endParaRPr>
             </a:p>
           </p:txBody>
         </p:sp>
@@ -3293,8 +4403,8 @@
           </p:nvSpPr>
           <p:spPr>
             <a:xfrm>
-              <a:off x="757047" y="4276249"/>
-              <a:ext cx="9337187" cy="190690"/>
+              <a:off x="756243" y="4697992"/>
+              <a:ext cx="6191257" cy="368968"/>
             </a:xfrm>
             <a:prstGeom prst="rect">
               <a:avLst/>
@@ -3305,14 +4415,14 @@
             </a:ln>
           </p:spPr>
           <p:txBody>
-            <a:bodyPr wrap="none" lIns="0" tIns="0" rIns="0" bIns="0" anchor="t" anchorCtr="0">
+            <a:bodyPr wrap="square" lIns="0" tIns="0" rIns="0" bIns="0" anchor="t" anchorCtr="0">
               <a:spAutoFit/>
             </a:bodyPr>
             <a:lstStyle/>
             <a:p>
               <a:pPr algn="l"/>
               <a:r>
-                <a:rPr lang="zh-CN" sz="980" dirty="0">
+                <a:rPr lang="zh-CN" sz="1200" dirty="0">
                   <a:solidFill>
                     <a:schemeClr val="dk1"/>
                   </a:solidFill>
@@ -3320,8 +4430,16 @@
                   <a:ea typeface="+mn-ea"/>
                   <a:cs typeface="+mn-cs"/>
                 </a:rPr>
-                <a:t>路由器（唯一可训练的部件，21 个浮点数）根据那七个像素特征，算出三个专家各有多少话语权。比如画面很模糊——"技术专家"话语权拉高，"内容专家"靠边。</a:t>
-              </a:r>
+                <a:t>路由器（唯一可训练的部件）根据那七个像素特征，算出三个专家各有多少话语权。</a:t>
+              </a:r>
+              <a:endParaRPr lang="zh-CN" sz="1200" dirty="0">
+                <a:solidFill>
+                  <a:schemeClr val="dk1"/>
+                </a:solidFill>
+                <a:latin typeface="+mn-lt"/>
+                <a:ea typeface="+mn-ea"/>
+                <a:cs typeface="+mn-cs"/>
+              </a:endParaRPr>
             </a:p>
           </p:txBody>
         </p:sp>
@@ -3333,8 +4451,8 @@
           </p:nvSpPr>
           <p:spPr>
             <a:xfrm>
-              <a:off x="757047" y="4657249"/>
-              <a:ext cx="7998579" cy="190690"/>
+              <a:off x="756963" y="5162219"/>
+              <a:ext cx="5310492" cy="368968"/>
             </a:xfrm>
             <a:prstGeom prst="rect">
               <a:avLst/>
@@ -3345,14 +4463,14 @@
             </a:ln>
           </p:spPr>
           <p:txBody>
-            <a:bodyPr wrap="none" lIns="0" tIns="0" rIns="0" bIns="0" anchor="t" anchorCtr="0">
+            <a:bodyPr wrap="square" lIns="0" tIns="0" rIns="0" bIns="0" anchor="t" anchorCtr="0">
               <a:spAutoFit/>
             </a:bodyPr>
             <a:lstStyle/>
             <a:p>
               <a:pPr algn="l"/>
               <a:r>
-                <a:rPr lang="zh-CN" sz="980" dirty="0">
+                <a:rPr lang="zh-CN" sz="1200" dirty="0">
                   <a:solidFill>
                     <a:schemeClr val="dk1"/>
                   </a:solidFill>
@@ -3360,8 +4478,16 @@
                   <a:ea typeface="+mn-ea"/>
                   <a:cs typeface="+mn-cs"/>
                 </a:rPr>
-                <a:t>三个专家分按话语权加权 = 融合分。融合分与四路投票按比例混合 = 最终分。KonIQ 上融合占六成、投票占四成；SPAQ 上反过来。</a:t>
-              </a:r>
+                <a:t>三个专家分按话语权加权 = 融合分。融合分与四路投票按比例混合 = 最终分。</a:t>
+              </a:r>
+              <a:endParaRPr lang="zh-CN" sz="1200" dirty="0">
+                <a:solidFill>
+                  <a:schemeClr val="dk1"/>
+                </a:solidFill>
+                <a:latin typeface="+mn-lt"/>
+                <a:ea typeface="+mn-ea"/>
+                <a:cs typeface="+mn-cs"/>
+              </a:endParaRPr>
             </a:p>
           </p:txBody>
         </p:sp>
@@ -3373,8 +4499,8 @@
           </p:nvSpPr>
           <p:spPr>
             <a:xfrm>
-              <a:off x="757238" y="5141595"/>
-              <a:ext cx="7088810" cy="176212"/>
+              <a:off x="762000" y="5715353"/>
+              <a:ext cx="5124121" cy="400721"/>
             </a:xfrm>
             <a:prstGeom prst="rect">
               <a:avLst/>
@@ -3385,23 +4511,35 @@
             </a:ln>
           </p:spPr>
           <p:txBody>
-            <a:bodyPr wrap="none" lIns="0" tIns="0" rIns="0" bIns="0" anchor="t" anchorCtr="0">
-              <a:spAutoFit/>
+            <a:bodyPr wrap="square" lIns="0" tIns="0" rIns="0" bIns="0" anchor="t" anchorCtr="0">
+              <a:noAutofit/>
             </a:bodyPr>
             <a:lstStyle/>
             <a:p>
-              <a:pPr algn="l"/>
-              <a:r>
-                <a:rPr lang="zh-CN" sz="900" dirty="0">
-                  <a:solidFill>
-                    <a:srgbClr val="757575"/>
-                  </a:solidFill>
-                  <a:latin typeface="+mn-lt"/>
-                  <a:ea typeface="+mn-ea"/>
-                  <a:cs typeface="+mn-cs"/>
-                </a:rPr>
-                <a:t>整个框架从 R1 一步步搭到 R6。中间臂（R4、R5）是验证性产物，最终收敛为同一个骨架，两个数据集只差参数、不差结构。</a:t>
-              </a:r>
+              <a:pPr algn="l">
+                <a:buClrTx/>
+                <a:buSzTx/>
+                <a:buFontTx/>
+              </a:pPr>
+              <a:r>
+                <a:rPr lang="zh-CN" sz="1200" dirty="0">
+                  <a:solidFill>
+                    <a:schemeClr val="dk1"/>
+                  </a:solidFill>
+                  <a:latin typeface="+mn-lt"/>
+                  <a:ea typeface="+mn-ea"/>
+                  <a:cs typeface="+mn-cs"/>
+                </a:rPr>
+                <a:t>整个框架从 R1 一步步搭到 R6。中间臂（R4、R5）是验证性产物，最终收敛为同一个骨架.</a:t>
+              </a:r>
+              <a:endParaRPr lang="zh-CN" sz="1200" dirty="0">
+                <a:solidFill>
+                  <a:schemeClr val="dk1"/>
+                </a:solidFill>
+                <a:latin typeface="+mn-lt"/>
+                <a:ea typeface="+mn-ea"/>
+                <a:cs typeface="+mn-cs"/>
+              </a:endParaRPr>
             </a:p>
           </p:txBody>
         </p:sp>
@@ -3415,15 +4553,15 @@
           <p:nvPr/>
         </p:nvPicPr>
         <p:blipFill>
-          <a:blip r:embed="rId2"/>
+          <a:blip r:embed="rId1"/>
           <a:stretch>
             <a:fillRect/>
           </a:stretch>
         </p:blipFill>
         <p:spPr>
           <a:xfrm>
-            <a:off x="3962587" y="5476875"/>
-            <a:ext cx="2361825" cy="1095375"/>
+            <a:off x="5493385" y="3870960"/>
+            <a:ext cx="5541010" cy="2607945"/>
           </a:xfrm>
           <a:prstGeom prst="rect">
             <a:avLst/>
@@ -3435,9 +4573,18 @@
   <p:clrMapOvr>
     <a:masterClrMapping/>
   </p:clrMapOvr>
-  <p:transition xmlns:p14="http://schemas.microsoft.com/office/powerpoint/2010/main" p14:dur="400">
-    <p:fade/>
-  </p:transition>
+  <mc:AlternateContent xmlns:mc="http://schemas.openxmlformats.org/markup-compatibility/2006">
+    <mc:Choice xmlns:p14="http://schemas.microsoft.com/office/powerpoint/2010/main" Requires="p14">
+      <p:transition p14:dur="400">
+        <p:fade/>
+      </p:transition>
+    </mc:Choice>
+    <mc:Fallback>
+      <p:transition>
+        <p:fade/>
+      </p:transition>
+    </mc:Fallback>
+  </mc:AlternateContent>
 </p:sld>
 </file>
 
@@ -3519,52 +4666,20 @@
                 <a:solidFill>
                   <a:srgbClr val="C3C2B7"/>
                 </a:solidFill>
-                <a:latin typeface="Arial"/>
-                <a:ea typeface="Arial"/>
-                <a:cs typeface="Arial"/>
+                <a:latin typeface="Arial" panose="020B0604020202020204"/>
+                <a:ea typeface="Arial" panose="020B0604020202020204"/>
+                <a:cs typeface="Arial" panose="020B0604020202020204"/>
               </a:rPr>
               <a:t>4 / 11</a:t>
             </a:r>
-          </a:p>
-        </p:txBody>
-      </p:sp>
-      <p:sp>
-        <p:nvSpPr>
-          <p:cNvPr id="4" name="TextBox 4"/>
-          <p:cNvSpPr txBox="1"/>
-          <p:nvPr/>
-        </p:nvSpPr>
-        <p:spPr>
-          <a:xfrm>
-            <a:off x="757238" y="6567488"/>
-            <a:ext cx="211455" cy="147638"/>
-          </a:xfrm>
-          <a:prstGeom prst="rect">
-            <a:avLst/>
-          </a:prstGeom>
-          <a:noFill/>
-          <a:ln>
-            <a:noFill/>
-          </a:ln>
-        </p:spPr>
-        <p:txBody>
-          <a:bodyPr wrap="none" lIns="0" tIns="0" rIns="0" bIns="0" anchor="t" anchorCtr="0">
-            <a:spAutoFit/>
-          </a:bodyPr>
-          <a:lstStyle/>
-          <a:p>
-            <a:pPr algn="l"/>
-            <a:r>
-              <a:rPr lang="zh-CN" sz="750" dirty="0">
-                <a:solidFill>
-                  <a:srgbClr val="A0A0A0"/>
-                </a:solidFill>
-                <a:latin typeface="+mn-lt"/>
-                <a:ea typeface="+mn-ea"/>
-                <a:cs typeface="+mn-cs"/>
-              </a:rPr>
-              <a:t>方法</a:t>
-            </a:r>
+            <a:endParaRPr lang="en-US" sz="750" dirty="0">
+              <a:solidFill>
+                <a:srgbClr val="C3C2B7"/>
+              </a:solidFill>
+              <a:latin typeface="Arial" panose="020B0604020202020204"/>
+              <a:ea typeface="Arial" panose="020B0604020202020204"/>
+              <a:cs typeface="Arial" panose="020B0604020202020204"/>
+            </a:endParaRPr>
           </a:p>
         </p:txBody>
       </p:sp>
@@ -3576,8 +4691,8 @@
         </p:nvSpPr>
         <p:spPr>
           <a:xfrm>
-            <a:off x="757238" y="823912"/>
-            <a:ext cx="797052" cy="147638"/>
+            <a:off x="2313623" y="818197"/>
+            <a:ext cx="1238250" cy="215265"/>
           </a:xfrm>
           <a:prstGeom prst="rect">
             <a:avLst/>
@@ -3595,7 +4710,7 @@
           <a:p>
             <a:pPr algn="l"/>
             <a:r>
-              <a:rPr lang="zh-CN" sz="750" b="1" spc="225" dirty="0">
+              <a:rPr lang="zh-CN" sz="1400" b="1" spc="225" dirty="0">
                 <a:solidFill>
                   <a:schemeClr val="accent1"/>
                 </a:solidFill>
@@ -3605,6 +4720,14 @@
               </a:rPr>
               <a:t>两个关键技术</a:t>
             </a:r>
+            <a:endParaRPr lang="zh-CN" sz="1400" b="1" spc="225" dirty="0">
+              <a:solidFill>
+                <a:schemeClr val="accent1"/>
+              </a:solidFill>
+              <a:latin typeface="+mn-lt"/>
+              <a:ea typeface="+mn-ea"/>
+              <a:cs typeface="+mn-cs"/>
+            </a:endParaRPr>
           </a:p>
         </p:txBody>
       </p:sp>
@@ -3616,8 +4739,8 @@
         </p:nvSpPr>
         <p:spPr>
           <a:xfrm>
-            <a:off x="742950" y="361950"/>
-            <a:ext cx="1437475" cy="1733550"/>
+            <a:off x="762000" y="268605"/>
+            <a:ext cx="1271270" cy="1384935"/>
           </a:xfrm>
           <a:prstGeom prst="rect">
             <a:avLst/>
@@ -3637,14 +4760,25 @@
             <a:r>
               <a:rPr lang="en-US" sz="9000" b="1" dirty="0">
                 <a:solidFill>
-                  <a:srgbClr val="F0F0ED"/>
-                </a:solidFill>
-                <a:latin typeface="Arial"/>
-                <a:ea typeface="Arial"/>
-                <a:cs typeface="Arial"/>
+                  <a:schemeClr val="accent1">
+                    <a:lumMod val="50000"/>
+                    <a:lumOff val="50000"/>
+                  </a:schemeClr>
+                </a:solidFill>
+                <a:latin typeface="Arial" panose="020B0604020202020204"/>
+                <a:ea typeface="Arial" panose="020B0604020202020204"/>
+                <a:cs typeface="Arial" panose="020B0604020202020204"/>
               </a:rPr>
               <a:t>03</a:t>
             </a:r>
+            <a:endParaRPr lang="en-US" sz="9000" b="1" dirty="0">
+              <a:solidFill>
+                <a:srgbClr val="F0F0ED"/>
+              </a:solidFill>
+              <a:latin typeface="Arial" panose="020B0604020202020204"/>
+              <a:ea typeface="Arial" panose="020B0604020202020204"/>
+              <a:cs typeface="Arial" panose="020B0604020202020204"/>
+            </a:endParaRPr>
           </a:p>
         </p:txBody>
       </p:sp>
@@ -3679,7 +4813,7 @@
         <p:spPr>
           <a:xfrm>
             <a:off x="947166" y="1953578"/>
-            <a:ext cx="2860304" cy="205359"/>
+            <a:ext cx="2908300" cy="184150"/>
           </a:xfrm>
           <a:prstGeom prst="rect">
             <a:avLst/>
@@ -3697,7 +4831,7 @@
           <a:p>
             <a:pPr algn="l"/>
             <a:r>
-              <a:rPr lang="zh-CN" sz="1050" b="1" dirty="0">
+              <a:rPr lang="zh-CN" sz="1200" b="1" dirty="0">
                 <a:solidFill>
                   <a:srgbClr val="FFFFFF"/>
                 </a:solidFill>
@@ -3705,8 +4839,27 @@
                 <a:ea typeface="+mn-ea"/>
                 <a:cs typeface="+mn-cs"/>
               </a:rPr>
-              <a:t>技术一：让模型"比谁差"而不是"打多少分"</a:t>
+              <a:t>技术一：让模型"比谁差"而不</a:t>
             </a:r>
+            <a:r>
+              <a:rPr lang="zh-CN" sz="1200" b="1" dirty="0">
+                <a:solidFill>
+                  <a:srgbClr val="FFFFFF"/>
+                </a:solidFill>
+                <a:latin typeface="+mn-lt"/>
+                <a:ea typeface="+mn-ea"/>
+                <a:cs typeface="+mn-cs"/>
+              </a:rPr>
+              <a:t>是"打多少分"</a:t>
+            </a:r>
+            <a:endParaRPr lang="zh-CN" sz="1200" b="1" dirty="0">
+              <a:solidFill>
+                <a:srgbClr val="FFFFFF"/>
+              </a:solidFill>
+              <a:latin typeface="+mn-lt"/>
+              <a:ea typeface="+mn-ea"/>
+              <a:cs typeface="+mn-cs"/>
+            </a:endParaRPr>
           </a:p>
         </p:txBody>
       </p:sp>
@@ -3718,10 +4871,10 @@
         </p:nvGrpSpPr>
         <p:grpSpPr>
           <a:xfrm>
-            <a:off x="947738" y="2375297"/>
-            <a:ext cx="4957348" cy="2088356"/>
-            <a:chOff x="947738" y="2375297"/>
-            <a:chExt cx="4957348" cy="2088356"/>
+            <a:off x="920433" y="2375297"/>
+            <a:ext cx="5362575" cy="2056606"/>
+            <a:chOff x="920433" y="2375297"/>
+            <a:chExt cx="5362575" cy="2056606"/>
           </a:xfrm>
         </p:grpSpPr>
         <p:sp>
@@ -3761,6 +4914,14 @@
                 </a:rPr>
                 <a:t>核心问题：路由器需要训练信号，但真人分数被禁止使用。怎么办？</a:t>
               </a:r>
+              <a:endParaRPr lang="zh-CN" sz="940" dirty="0">
+                <a:solidFill>
+                  <a:schemeClr val="dk1"/>
+                </a:solidFill>
+                <a:latin typeface="+mn-lt"/>
+                <a:ea typeface="+mn-ea"/>
+                <a:cs typeface="+mn-cs"/>
+              </a:endParaRPr>
             </a:p>
           </p:txBody>
         </p:sp>
@@ -3801,6 +4962,14 @@
                 </a:rPr>
                 <a:t>发现：大模型直接打分很不稳定，但判断"A 和 B 哪张更差"却非常准。</a:t>
               </a:r>
+              <a:endParaRPr lang="zh-CN" sz="940" b="1" dirty="0">
+                <a:solidFill>
+                  <a:schemeClr val="accent2"/>
+                </a:solidFill>
+                <a:latin typeface="+mn-lt"/>
+                <a:ea typeface="+mn-ea"/>
+                <a:cs typeface="+mn-cs"/>
+              </a:endParaRPr>
             </a:p>
           </p:txBody>
         </p:sp>
@@ -3813,7 +4982,83 @@
           <p:spPr>
             <a:xfrm>
               <a:off x="947738" y="3042047"/>
-              <a:ext cx="4957348" cy="183356"/>
+              <a:ext cx="4954270" cy="432435"/>
+            </a:xfrm>
+            <a:prstGeom prst="rect">
+              <a:avLst/>
+            </a:prstGeom>
+            <a:noFill/>
+            <a:ln>
+              <a:noFill/>
+            </a:ln>
+          </p:spPr>
+          <p:txBody>
+            <a:bodyPr wrap="square" lIns="0" tIns="0" rIns="0" bIns="0" anchor="t" anchorCtr="0">
+              <a:spAutoFit/>
+            </a:bodyPr>
+            <a:lstStyle/>
+            <a:p>
+              <a:pPr algn="l"/>
+              <a:r>
+                <a:rPr lang="zh-CN" sz="940" dirty="0">
+                  <a:solidFill>
+                    <a:schemeClr val="dk1"/>
+                  </a:solidFill>
+                  <a:latin typeface="+mn-lt"/>
+                  <a:ea typeface="+mn-ea"/>
+                  <a:cs typeface="+mn-cs"/>
+                </a:rPr>
+                <a:t>证据</a:t>
+              </a:r>
+              <a:r>
+                <a:rPr lang="en-US" altLang="zh-CN" sz="940" dirty="0">
+                  <a:solidFill>
+                    <a:schemeClr val="dk1"/>
+                  </a:solidFill>
+                  <a:latin typeface="+mn-lt"/>
+                  <a:ea typeface="+mn-ea"/>
+                  <a:cs typeface="+mn-cs"/>
+                </a:rPr>
+                <a:t>:</a:t>
+              </a:r>
+              <a:r>
+                <a:rPr lang="zh-CN" sz="940" dirty="0">
+                  <a:solidFill>
+                    <a:schemeClr val="dk1"/>
+                  </a:solidFill>
+                  <a:sym typeface="+mn-ea"/>
+                </a:rPr>
+                <a:t>"A 比 B 好吗"是相对判断——比较的是两张图共有的感知维度，不需要映射到数字。认知科学里这叫比较判断定律（Thurstone 1927），比绝对评分稳定得多。</a:t>
+              </a:r>
+              <a:endParaRPr lang="zh-CN" sz="940" dirty="0">
+                <a:solidFill>
+                  <a:schemeClr val="dk1"/>
+                </a:solidFill>
+              </a:endParaRPr>
+            </a:p>
+            <a:p>
+              <a:pPr algn="l"/>
+              <a:endParaRPr lang="en-US" altLang="zh-CN" sz="940" dirty="0">
+                <a:solidFill>
+                  <a:schemeClr val="dk1"/>
+                </a:solidFill>
+                <a:latin typeface="+mn-lt"/>
+                <a:ea typeface="+mn-ea"/>
+                <a:cs typeface="+mn-cs"/>
+              </a:endParaRPr>
+            </a:p>
+          </p:txBody>
+        </p:sp>
+        <p:sp>
+          <p:nvSpPr>
+            <p:cNvPr id="13" name="TextBox 13"/>
+            <p:cNvSpPr txBox="1"/>
+            <p:nvPr/>
+          </p:nvSpPr>
+          <p:spPr>
+            <a:xfrm>
+              <a:off x="920433" y="3541792"/>
+              <a:ext cx="5362575" cy="288290"/>
             </a:xfrm>
             <a:prstGeom prst="rect">
               <a:avLst/>
@@ -3839,21 +5084,73 @@
                   <a:ea typeface="+mn-ea"/>
                   <a:cs typeface="+mn-cs"/>
                 </a:rPr>
-                <a:t>证据——同一个测试集：让模型直接给手机照片打分，六种失真类型全都没通过质量检验；</a:t>
-              </a:r>
+                <a:t>做法：在两千五百张训练图上组织了</a:t>
+              </a:r>
+              <a:r>
+                <a:rPr lang="zh-CN" sz="940" b="1" dirty="0">
+                  <a:solidFill>
+                    <a:schemeClr val="dk1"/>
+                  </a:solidFill>
+                  <a:latin typeface="+mn-lt"/>
+                  <a:ea typeface="+mn-ea"/>
+                  <a:cs typeface="+mn-cs"/>
+                </a:rPr>
+                <a:t>三万两千场</a:t>
+              </a:r>
+              <a:r>
+                <a:rPr lang="zh-CN" sz="940" dirty="0">
+                  <a:solidFill>
+                    <a:schemeClr val="dk1"/>
+                  </a:solidFill>
+                  <a:latin typeface="+mn-lt"/>
+                  <a:ea typeface="+mn-ea"/>
+                  <a:cs typeface="+mn-cs"/>
+                </a:rPr>
+                <a:t>两两比较，每场问模型谁更好。</a:t>
+              </a:r>
+              <a:endParaRPr lang="zh-CN" sz="940" dirty="0">
+                <a:solidFill>
+                  <a:schemeClr val="dk1"/>
+                </a:solidFill>
+                <a:latin typeface="+mn-lt"/>
+                <a:ea typeface="+mn-ea"/>
+                <a:cs typeface="+mn-cs"/>
+              </a:endParaRPr>
+            </a:p>
+            <a:p>
+              <a:pPr algn="l"/>
+              <a:r>
+                <a:rPr lang="zh-CN" altLang="en-US" sz="940" dirty="0">
+                  <a:solidFill>
+                    <a:schemeClr val="dk1"/>
+                  </a:solidFill>
+                  <a:latin typeface="+mn-lt"/>
+                  <a:ea typeface="+mn-ea"/>
+                  <a:cs typeface="+mn-cs"/>
+                </a:rPr>
+                <a:t>从 32,000 场两两对比胜负记录中，通过最大似然估计反推每张图的标量实力分——不依赖人工标签。</a:t>
+              </a:r>
+              <a:endParaRPr lang="zh-CN" altLang="en-US" sz="940" dirty="0">
+                <a:solidFill>
+                  <a:schemeClr val="dk1"/>
+                </a:solidFill>
+                <a:latin typeface="+mn-lt"/>
+                <a:ea typeface="+mn-ea"/>
+                <a:cs typeface="+mn-cs"/>
+              </a:endParaRPr>
             </a:p>
           </p:txBody>
         </p:sp>
         <p:sp>
           <p:nvSpPr>
-            <p:cNvPr id="12" name="TextBox 12"/>
+            <p:cNvPr id="14" name="TextBox 14"/>
             <p:cNvSpPr txBox="1"/>
             <p:nvPr/>
           </p:nvSpPr>
           <p:spPr>
             <a:xfrm>
-              <a:off x="947738" y="3280172"/>
-              <a:ext cx="4229727" cy="183356"/>
+              <a:off x="920433" y="4063762"/>
+              <a:ext cx="4443298" cy="183356"/>
             </a:xfrm>
             <a:prstGeom prst="rect">
               <a:avLst/>
@@ -3879,21 +5176,51 @@
                   <a:ea typeface="+mn-ea"/>
                   <a:cs typeface="+mn-cs"/>
                 </a:rPr>
-                <a:t>换一种问法"这两张哪张画质更好"，准确率跳到 98%——差距将近一个量级。</a:t>
-              </a:r>
+                <a:t>全部胜负记录用一个叫 Bradley-Terry 的数学模型拟合成每张图一个</a:t>
+              </a:r>
+              <a:r>
+                <a:rPr lang="zh-CN" sz="940" b="1" dirty="0">
+                  <a:solidFill>
+                    <a:schemeClr val="dk1"/>
+                  </a:solidFill>
+                  <a:latin typeface="+mn-lt"/>
+                  <a:ea typeface="+mn-ea"/>
+                  <a:cs typeface="+mn-cs"/>
+                </a:rPr>
+                <a:t>强度分</a:t>
+              </a:r>
+              <a:r>
+                <a:rPr lang="en-US" sz="940" dirty="0">
+                  <a:solidFill>
+                    <a:schemeClr val="dk1"/>
+                  </a:solidFill>
+                  <a:latin typeface="+mn-lt"/>
+                  <a:ea typeface="+mn-ea"/>
+                  <a:cs typeface="+mn-cs"/>
+                </a:rPr>
+                <a:t>——</a:t>
+              </a:r>
+              <a:endParaRPr lang="en-US" sz="940" dirty="0">
+                <a:solidFill>
+                  <a:schemeClr val="dk1"/>
+                </a:solidFill>
+                <a:latin typeface="+mn-lt"/>
+                <a:ea typeface="+mn-ea"/>
+                <a:cs typeface="+mn-cs"/>
+              </a:endParaRPr>
             </a:p>
           </p:txBody>
         </p:sp>
         <p:sp>
           <p:nvSpPr>
-            <p:cNvPr id="13" name="TextBox 13"/>
+            <p:cNvPr id="15" name="TextBox 15"/>
             <p:cNvSpPr txBox="1"/>
             <p:nvPr/>
           </p:nvSpPr>
           <p:spPr>
             <a:xfrm>
-              <a:off x="947738" y="3708797"/>
-              <a:ext cx="4470159" cy="183356"/>
+              <a:off x="947738" y="4248547"/>
+              <a:ext cx="3970315" cy="183356"/>
             </a:xfrm>
             <a:prstGeom prst="rect">
               <a:avLst/>
@@ -3919,132 +5246,16 @@
                   <a:ea typeface="+mn-ea"/>
                   <a:cs typeface="+mn-cs"/>
                 </a:rPr>
-                <a:t>做法：在两千五百张训练图上组织了</a:t>
-              </a:r>
-              <a:r>
-                <a:rPr lang="zh-CN" sz="940" b="1" dirty="0">
-                  <a:solidFill>
-                    <a:schemeClr val="dk1"/>
-                  </a:solidFill>
-                  <a:latin typeface="+mn-lt"/>
-                  <a:ea typeface="+mn-ea"/>
-                  <a:cs typeface="+mn-cs"/>
-                </a:rPr>
-                <a:t>三万两千场</a:t>
-              </a:r>
-              <a:r>
-                <a:rPr lang="zh-CN" sz="940" dirty="0">
-                  <a:solidFill>
-                    <a:schemeClr val="dk1"/>
-                  </a:solidFill>
-                  <a:latin typeface="+mn-lt"/>
-                  <a:ea typeface="+mn-ea"/>
-                  <a:cs typeface="+mn-cs"/>
-                </a:rPr>
-                <a:t>两两比较，每场问模型谁更好。</a:t>
-              </a:r>
-            </a:p>
-          </p:txBody>
-        </p:sp>
-        <p:sp>
-          <p:nvSpPr>
-            <p:cNvPr id="14" name="TextBox 14"/>
-            <p:cNvSpPr txBox="1"/>
-            <p:nvPr/>
-          </p:nvSpPr>
-          <p:spPr>
-            <a:xfrm>
-              <a:off x="947738" y="4042172"/>
-              <a:ext cx="4443298" cy="183356"/>
-            </a:xfrm>
-            <a:prstGeom prst="rect">
-              <a:avLst/>
-            </a:prstGeom>
-            <a:noFill/>
-            <a:ln>
-              <a:noFill/>
-            </a:ln>
-          </p:spPr>
-          <p:txBody>
-            <a:bodyPr wrap="none" lIns="0" tIns="0" rIns="0" bIns="0" anchor="t" anchorCtr="0">
-              <a:spAutoFit/>
-            </a:bodyPr>
-            <a:lstStyle/>
-            <a:p>
-              <a:pPr algn="l"/>
-              <a:r>
-                <a:rPr lang="zh-CN" sz="940" dirty="0">
-                  <a:solidFill>
-                    <a:schemeClr val="dk1"/>
-                  </a:solidFill>
-                  <a:latin typeface="+mn-lt"/>
-                  <a:ea typeface="+mn-ea"/>
-                  <a:cs typeface="+mn-cs"/>
-                </a:rPr>
-                <a:t>全部胜负记录用一个叫 Bradley-Terry 的数学模型拟合成每张图一个</a:t>
-              </a:r>
-              <a:r>
-                <a:rPr lang="zh-CN" sz="940" b="1" dirty="0">
-                  <a:solidFill>
-                    <a:schemeClr val="dk1"/>
-                  </a:solidFill>
-                  <a:latin typeface="+mn-lt"/>
-                  <a:ea typeface="+mn-ea"/>
-                  <a:cs typeface="+mn-cs"/>
-                </a:rPr>
-                <a:t>强度分</a:t>
-              </a:r>
-              <a:r>
-                <a:rPr lang="en-US" sz="940" dirty="0">
-                  <a:solidFill>
-                    <a:schemeClr val="dk1"/>
-                  </a:solidFill>
-                  <a:latin typeface="+mn-lt"/>
-                  <a:ea typeface="+mn-ea"/>
-                  <a:cs typeface="+mn-cs"/>
-                </a:rPr>
-                <a:t>——</a:t>
-              </a:r>
-            </a:p>
-          </p:txBody>
-        </p:sp>
-        <p:sp>
-          <p:nvSpPr>
-            <p:cNvPr id="15" name="TextBox 15"/>
-            <p:cNvSpPr txBox="1"/>
-            <p:nvPr/>
-          </p:nvSpPr>
-          <p:spPr>
-            <a:xfrm>
-              <a:off x="947738" y="4280297"/>
-              <a:ext cx="3970315" cy="183356"/>
-            </a:xfrm>
-            <a:prstGeom prst="rect">
-              <a:avLst/>
-            </a:prstGeom>
-            <a:noFill/>
-            <a:ln>
-              <a:noFill/>
-            </a:ln>
-          </p:spPr>
-          <p:txBody>
-            <a:bodyPr wrap="none" lIns="0" tIns="0" rIns="0" bIns="0" anchor="t" anchorCtr="0">
-              <a:spAutoFit/>
-            </a:bodyPr>
-            <a:lstStyle/>
-            <a:p>
-              <a:pPr algn="l"/>
-              <a:r>
-                <a:rPr lang="zh-CN" sz="940" dirty="0">
-                  <a:solidFill>
-                    <a:schemeClr val="dk1"/>
-                  </a:solidFill>
-                  <a:latin typeface="+mn-lt"/>
-                  <a:ea typeface="+mn-ea"/>
-                  <a:cs typeface="+mn-cs"/>
-                </a:rPr>
                 <a:t>赢得多 = 分高，赢得少 = 分低。这个分就成了训练路由器的监督信号。</a:t>
               </a:r>
+              <a:endParaRPr lang="zh-CN" sz="940" dirty="0">
+                <a:solidFill>
+                  <a:schemeClr val="dk1"/>
+                </a:solidFill>
+                <a:latin typeface="+mn-lt"/>
+                <a:ea typeface="+mn-ea"/>
+                <a:cs typeface="+mn-cs"/>
+              </a:endParaRPr>
             </a:p>
           </p:txBody>
         </p:sp>
@@ -4058,7 +5269,7 @@
           <p:nvPr/>
         </p:nvPicPr>
         <p:blipFill>
-          <a:blip r:embed="rId2"/>
+          <a:blip r:embed="rId1"/>
           <a:stretch>
             <a:fillRect/>
           </a:stretch>
@@ -4104,7 +5315,7 @@
         <p:spPr>
           <a:xfrm>
             <a:off x="6471666" y="1953578"/>
-            <a:ext cx="2162737" cy="205359"/>
+            <a:ext cx="2220595" cy="184150"/>
           </a:xfrm>
           <a:prstGeom prst="rect">
             <a:avLst/>
@@ -4122,7 +5333,7 @@
           <a:p>
             <a:pPr algn="l"/>
             <a:r>
-              <a:rPr lang="zh-CN" sz="1050" b="1" dirty="0">
+              <a:rPr lang="zh-CN" sz="1200" b="1" dirty="0">
                 <a:solidFill>
                   <a:srgbClr val="FFFFFF"/>
                 </a:solidFill>
@@ -4132,6 +5343,14 @@
               </a:rPr>
               <a:t>技术二：21 个参数决定"该信谁"</a:t>
             </a:r>
+            <a:endParaRPr lang="zh-CN" sz="1200" b="1" dirty="0">
+              <a:solidFill>
+                <a:srgbClr val="FFFFFF"/>
+              </a:solidFill>
+              <a:latin typeface="+mn-lt"/>
+              <a:ea typeface="+mn-ea"/>
+              <a:cs typeface="+mn-cs"/>
+            </a:endParaRPr>
           </a:p>
         </p:txBody>
       </p:sp>
@@ -4144,9 +5363,9 @@
         <p:grpSpPr>
           <a:xfrm>
             <a:off x="6472238" y="2375297"/>
-            <a:ext cx="4723244" cy="2326481"/>
+            <a:ext cx="4723244" cy="944721"/>
             <a:chOff x="6472238" y="2375297"/>
-            <a:chExt cx="4723244" cy="2326481"/>
+            <a:chExt cx="4723244" cy="944721"/>
           </a:xfrm>
         </p:grpSpPr>
         <p:sp>
@@ -4186,6 +5405,14 @@
                 </a:rPr>
                 <a:t>有了每张图的强度分（谁好谁坏的共识），就可以训练路由器了。</a:t>
               </a:r>
+              <a:endParaRPr lang="zh-CN" sz="940" dirty="0">
+                <a:solidFill>
+                  <a:schemeClr val="dk1"/>
+                </a:solidFill>
+                <a:latin typeface="+mn-lt"/>
+                <a:ea typeface="+mn-ea"/>
+                <a:cs typeface="+mn-cs"/>
+              </a:endParaRPr>
             </a:p>
           </p:txBody>
         </p:sp>
@@ -4197,7 +5424,7 @@
           </p:nvSpPr>
           <p:spPr>
             <a:xfrm>
-              <a:off x="6472238" y="2756297"/>
+              <a:off x="6472238" y="2623582"/>
               <a:ext cx="3065534" cy="183356"/>
             </a:xfrm>
             <a:prstGeom prst="rect">
@@ -4226,6 +5453,14 @@
                 </a:rPr>
                 <a:t>路由器 = 一个 3 行 7 列的矩阵，只有 21 个可调数字。</a:t>
               </a:r>
+              <a:endParaRPr lang="zh-CN" sz="940" dirty="0">
+                <a:solidFill>
+                  <a:schemeClr val="dk1"/>
+                </a:solidFill>
+                <a:latin typeface="+mn-lt"/>
+                <a:ea typeface="+mn-ea"/>
+                <a:cs typeface="+mn-cs"/>
+              </a:endParaRPr>
             </a:p>
           </p:txBody>
         </p:sp>
@@ -4237,7 +5472,7 @@
           </p:nvSpPr>
           <p:spPr>
             <a:xfrm>
-              <a:off x="6472238" y="3137297"/>
+              <a:off x="6472238" y="2880122"/>
               <a:ext cx="4723244" cy="183356"/>
             </a:xfrm>
             <a:prstGeom prst="rect">
@@ -4288,6 +5523,14 @@
                 </a:rPr>
                 <a:t>）</a:t>
               </a:r>
+              <a:endParaRPr lang="zh-CN" sz="940" dirty="0">
+                <a:solidFill>
+                  <a:schemeClr val="dk1"/>
+                </a:solidFill>
+                <a:latin typeface="+mn-lt"/>
+                <a:ea typeface="+mn-ea"/>
+                <a:cs typeface="+mn-cs"/>
+              </a:endParaRPr>
             </a:p>
           </p:txBody>
         </p:sp>
@@ -4299,7 +5542,7 @@
           </p:nvSpPr>
           <p:spPr>
             <a:xfrm>
-              <a:off x="6472238" y="3470672"/>
+              <a:off x="6472238" y="3136662"/>
               <a:ext cx="3008589" cy="183356"/>
             </a:xfrm>
             <a:prstGeom prst="rect">
@@ -4328,126 +5571,14 @@
                 </a:rPr>
                 <a:t>输出：三个专家各占多少话语权（加起来等于 100%）</a:t>
               </a:r>
-            </a:p>
-          </p:txBody>
-        </p:sp>
-        <p:sp>
-          <p:nvSpPr>
-            <p:cNvPr id="24" name="TextBox 24"/>
-            <p:cNvSpPr txBox="1"/>
-            <p:nvPr/>
-          </p:nvSpPr>
-          <p:spPr>
-            <a:xfrm>
-              <a:off x="6472238" y="3899297"/>
-              <a:ext cx="3565378" cy="183356"/>
-            </a:xfrm>
-            <a:prstGeom prst="rect">
-              <a:avLst/>
-            </a:prstGeom>
-            <a:noFill/>
-            <a:ln>
-              <a:noFill/>
-            </a:ln>
-          </p:spPr>
-          <p:txBody>
-            <a:bodyPr wrap="none" lIns="0" tIns="0" rIns="0" bIns="0" anchor="t" anchorCtr="0">
-              <a:spAutoFit/>
-            </a:bodyPr>
-            <a:lstStyle/>
-            <a:p>
-              <a:pPr algn="l"/>
-              <a:r>
-                <a:rPr lang="zh-CN" sz="940" dirty="0">
-                  <a:solidFill>
-                    <a:schemeClr val="dk1"/>
-                  </a:solidFill>
-                  <a:latin typeface="+mn-lt"/>
-                  <a:ea typeface="+mn-ea"/>
-                  <a:cs typeface="+mn-cs"/>
-                </a:rPr>
-                <a:t>训练方式：抽两张图，算各自的融合分，跟锦标赛的判断对比——</a:t>
-              </a:r>
-            </a:p>
-          </p:txBody>
-        </p:sp>
-        <p:sp>
-          <p:nvSpPr>
-            <p:cNvPr id="25" name="TextBox 25"/>
-            <p:cNvSpPr txBox="1"/>
-            <p:nvPr/>
-          </p:nvSpPr>
-          <p:spPr>
-            <a:xfrm>
-              <a:off x="6472238" y="4185047"/>
-              <a:ext cx="4535460" cy="183356"/>
-            </a:xfrm>
-            <a:prstGeom prst="rect">
-              <a:avLst/>
-            </a:prstGeom>
-            <a:noFill/>
-            <a:ln>
-              <a:noFill/>
-            </a:ln>
-          </p:spPr>
-          <p:txBody>
-            <a:bodyPr wrap="none" lIns="0" tIns="0" rIns="0" bIns="0" anchor="t" anchorCtr="0">
-              <a:spAutoFit/>
-            </a:bodyPr>
-            <a:lstStyle/>
-            <a:p>
-              <a:pPr algn="l"/>
-              <a:r>
-                <a:rPr lang="zh-CN" sz="940" dirty="0">
-                  <a:solidFill>
-                    <a:schemeClr val="dk1"/>
-                  </a:solidFill>
-                  <a:latin typeface="+mn-lt"/>
-                  <a:ea typeface="+mn-ea"/>
-                  <a:cs typeface="+mn-cs"/>
-                </a:rPr>
-                <a:t>如果融合分也认为图 A 好，说明权重对了；如果反了，就调一调 21 个参数。</a:t>
-              </a:r>
-            </a:p>
-          </p:txBody>
-        </p:sp>
-        <p:sp>
-          <p:nvSpPr>
-            <p:cNvPr id="26" name="TextBox 26"/>
-            <p:cNvSpPr txBox="1"/>
-            <p:nvPr/>
-          </p:nvSpPr>
-          <p:spPr>
-            <a:xfrm>
-              <a:off x="6472238" y="4518422"/>
-              <a:ext cx="1600622" cy="183356"/>
-            </a:xfrm>
-            <a:prstGeom prst="rect">
-              <a:avLst/>
-            </a:prstGeom>
-            <a:noFill/>
-            <a:ln>
-              <a:noFill/>
-            </a:ln>
-          </p:spPr>
-          <p:txBody>
-            <a:bodyPr wrap="none" lIns="0" tIns="0" rIns="0" bIns="0" anchor="t" anchorCtr="0">
-              <a:spAutoFit/>
-            </a:bodyPr>
-            <a:lstStyle/>
-            <a:p>
-              <a:pPr algn="l"/>
-              <a:r>
-                <a:rPr lang="zh-CN" sz="940" dirty="0">
-                  <a:solidFill>
-                    <a:schemeClr val="dk1"/>
-                  </a:solidFill>
-                  <a:latin typeface="+mn-lt"/>
-                  <a:ea typeface="+mn-ea"/>
-                  <a:cs typeface="+mn-cs"/>
-                </a:rPr>
-                <a:t>800 步，CPU 上几秒收敛。</a:t>
-              </a:r>
+              <a:endParaRPr lang="zh-CN" sz="940" dirty="0">
+                <a:solidFill>
+                  <a:schemeClr val="dk1"/>
+                </a:solidFill>
+                <a:latin typeface="+mn-lt"/>
+                <a:ea typeface="+mn-ea"/>
+                <a:cs typeface="+mn-cs"/>
+              </a:endParaRPr>
             </a:p>
           </p:txBody>
         </p:sp>
@@ -4461,7 +5592,7 @@
           <p:nvPr/>
         </p:nvPicPr>
         <p:blipFill>
-          <a:blip r:embed="rId3"/>
+          <a:blip r:embed="rId2"/>
           <a:stretch>
             <a:fillRect/>
           </a:stretch>
@@ -4484,8 +5615,8 @@
         </p:nvSpPr>
         <p:spPr>
           <a:xfrm>
-            <a:off x="6472238" y="6617970"/>
-            <a:ext cx="6873126" cy="176212"/>
+            <a:off x="6105208" y="6626225"/>
+            <a:ext cx="5324475" cy="138430"/>
           </a:xfrm>
           <a:prstGeom prst="rect">
             <a:avLst/>
@@ -4511,8 +5642,112 @@
                 <a:ea typeface="+mn-ea"/>
                 <a:cs typeface="+mn-cs"/>
               </a:rPr>
-              <a:t>训练出的矩阵非常可读：分歧度一列权重最大——专家吵架时信技术专家。分辨率/宽高比自动归零（所有图尺寸一样，没信息）。</a:t>
+              <a:t>分歧度一列权重最大——专家吵架时信技术专家。分辨率/宽高比自动归零（所有图尺寸一样，没信息）。</a:t>
             </a:r>
+            <a:endParaRPr lang="zh-CN" sz="900" dirty="0">
+              <a:solidFill>
+                <a:srgbClr val="757575"/>
+              </a:solidFill>
+              <a:latin typeface="+mn-lt"/>
+              <a:ea typeface="+mn-ea"/>
+              <a:cs typeface="+mn-cs"/>
+            </a:endParaRPr>
+          </a:p>
+        </p:txBody>
+      </p:sp>
+      <p:sp>
+        <p:nvSpPr>
+          <p:cNvPr id="31" name="文本框 30"/>
+          <p:cNvSpPr txBox="1"/>
+          <p:nvPr/>
+        </p:nvSpPr>
+        <p:spPr>
+          <a:xfrm>
+            <a:off x="6395720" y="3334385"/>
+            <a:ext cx="4064000" cy="379730"/>
+          </a:xfrm>
+          <a:prstGeom prst="rect">
+            <a:avLst/>
+          </a:prstGeom>
+          <a:noFill/>
+        </p:spPr>
+        <p:txBody>
+          <a:bodyPr wrap="square" rtlCol="0">
+            <a:spAutoFit/>
+          </a:bodyPr>
+          <a:p>
+            <a:r>
+              <a:rPr lang="zh-CN" sz="940" dirty="0">
+                <a:solidFill>
+                  <a:schemeClr val="dk1"/>
+                </a:solidFill>
+              </a:rPr>
+              <a:t>梯度下降的逻辑：每步抽 128 对图，如果融合分跟 BT 偏好不一致（好图反而得分低），就调 W。每次微调都在某个方向推一下参数。</a:t>
+            </a:r>
+            <a:endParaRPr lang="zh-CN" sz="940" dirty="0">
+              <a:solidFill>
+                <a:schemeClr val="dk1"/>
+              </a:solidFill>
+            </a:endParaRPr>
+          </a:p>
+        </p:txBody>
+      </p:sp>
+      <p:sp>
+        <p:nvSpPr>
+          <p:cNvPr id="32" name="文本框 31"/>
+          <p:cNvSpPr txBox="1"/>
+          <p:nvPr/>
+        </p:nvSpPr>
+        <p:spPr>
+          <a:xfrm>
+            <a:off x="6395720" y="3731260"/>
+            <a:ext cx="4064000" cy="812800"/>
+          </a:xfrm>
+          <a:prstGeom prst="rect">
+            <a:avLst/>
+          </a:prstGeom>
+          <a:noFill/>
+        </p:spPr>
+        <p:txBody>
+          <a:bodyPr wrap="square" rtlCol="0">
+            <a:spAutoFit/>
+          </a:bodyPr>
+          <a:p>
+            <a:r>
+              <a:rPr lang="zh-CN" sz="940" dirty="0">
+                <a:solidFill>
+                  <a:schemeClr val="dk1"/>
+                </a:solidFill>
+              </a:rPr>
+              <a:t>因为 BT 偏好是一个有方向性的信号——统计学上存在"什么样的特征倾向于对应哪个专家更靠谱"的规律——梯度会持续把 W 往某个方向推。</a:t>
+            </a:r>
+            <a:endParaRPr lang="zh-CN" sz="940" dirty="0">
+              <a:solidFill>
+                <a:schemeClr val="dk1"/>
+              </a:solidFill>
+            </a:endParaRPr>
+          </a:p>
+          <a:p>
+            <a:endParaRPr lang="zh-CN" sz="940" dirty="0">
+              <a:solidFill>
+                <a:schemeClr val="dk1"/>
+              </a:solidFill>
+            </a:endParaRPr>
+          </a:p>
+          <a:p>
+            <a:r>
+              <a:rPr lang="zh-CN" sz="940" dirty="0">
+                <a:solidFill>
+                  <a:schemeClr val="dk1"/>
+                </a:solidFill>
+              </a:rPr>
+              <a:t>如果 BT 信号完全没有信息量（随机噪声），W 会在零附近震荡，‖W‖ 不会涨。‖W‖ 的单调上升本身就说明 BT 信号里存在稳定的规律。</a:t>
+            </a:r>
+            <a:endParaRPr lang="zh-CN" sz="940" dirty="0">
+              <a:solidFill>
+                <a:schemeClr val="dk1"/>
+              </a:solidFill>
+            </a:endParaRPr>
           </a:p>
         </p:txBody>
       </p:sp>
@@ -4521,9 +5756,18 @@
   <p:clrMapOvr>
     <a:masterClrMapping/>
   </p:clrMapOvr>
-  <p:transition xmlns:p14="http://schemas.microsoft.com/office/powerpoint/2010/main" p14:dur="400">
-    <p:fade/>
-  </p:transition>
+  <mc:AlternateContent xmlns:mc="http://schemas.openxmlformats.org/markup-compatibility/2006">
+    <mc:Choice xmlns:p14="http://schemas.microsoft.com/office/powerpoint/2010/main" Requires="p14">
+      <p:transition p14:dur="400">
+        <p:fade/>
+      </p:transition>
+    </mc:Choice>
+    <mc:Fallback>
+      <p:transition>
+        <p:fade/>
+      </p:transition>
+    </mc:Fallback>
+  </mc:AlternateContent>
 </p:sld>
 </file>
 
@@ -4605,52 +5849,20 @@
                 <a:solidFill>
                   <a:srgbClr val="C3C2B7"/>
                 </a:solidFill>
-                <a:latin typeface="Arial"/>
-                <a:ea typeface="Arial"/>
-                <a:cs typeface="Arial"/>
+                <a:latin typeface="Arial" panose="020B0604020202020204"/>
+                <a:ea typeface="Arial" panose="020B0604020202020204"/>
+                <a:cs typeface="Arial" panose="020B0604020202020204"/>
               </a:rPr>
               <a:t>5 / 11</a:t>
             </a:r>
-          </a:p>
-        </p:txBody>
-      </p:sp>
-      <p:sp>
-        <p:nvSpPr>
-          <p:cNvPr id="4" name="TextBox 4"/>
-          <p:cNvSpPr txBox="1"/>
-          <p:nvPr/>
-        </p:nvSpPr>
-        <p:spPr>
-          <a:xfrm>
-            <a:off x="757238" y="6567488"/>
-            <a:ext cx="211455" cy="147638"/>
-          </a:xfrm>
-          <a:prstGeom prst="rect">
-            <a:avLst/>
-          </a:prstGeom>
-          <a:noFill/>
-          <a:ln>
-            <a:noFill/>
-          </a:ln>
-        </p:spPr>
-        <p:txBody>
-          <a:bodyPr wrap="none" lIns="0" tIns="0" rIns="0" bIns="0" anchor="t" anchorCtr="0">
-            <a:spAutoFit/>
-          </a:bodyPr>
-          <a:lstStyle/>
-          <a:p>
-            <a:pPr algn="l"/>
-            <a:r>
-              <a:rPr lang="zh-CN" sz="750" dirty="0">
-                <a:solidFill>
-                  <a:srgbClr val="A0A0A0"/>
-                </a:solidFill>
-                <a:latin typeface="+mn-lt"/>
-                <a:ea typeface="+mn-ea"/>
-                <a:cs typeface="+mn-cs"/>
-              </a:rPr>
-              <a:t>结果</a:t>
-            </a:r>
+            <a:endParaRPr lang="en-US" sz="750" dirty="0">
+              <a:solidFill>
+                <a:srgbClr val="C3C2B7"/>
+              </a:solidFill>
+              <a:latin typeface="Arial" panose="020B0604020202020204"/>
+              <a:ea typeface="Arial" panose="020B0604020202020204"/>
+              <a:cs typeface="Arial" panose="020B0604020202020204"/>
+            </a:endParaRPr>
           </a:p>
         </p:txBody>
       </p:sp>
@@ -4662,8 +5874,8 @@
         </p:nvSpPr>
         <p:spPr>
           <a:xfrm>
-            <a:off x="757238" y="823912"/>
-            <a:ext cx="1069658" cy="147638"/>
+            <a:off x="2396808" y="823912"/>
+            <a:ext cx="1651000" cy="215265"/>
           </a:xfrm>
           <a:prstGeom prst="rect">
             <a:avLst/>
@@ -4681,7 +5893,7 @@
           <a:p>
             <a:pPr algn="l"/>
             <a:r>
-              <a:rPr lang="zh-CN" sz="750" b="1" spc="225" dirty="0">
+              <a:rPr lang="zh-CN" sz="1400" b="1" spc="225" dirty="0">
                 <a:solidFill>
                   <a:schemeClr val="accent1"/>
                 </a:solidFill>
@@ -4691,6 +5903,14 @@
               </a:rPr>
               <a:t>评分在一步步变好</a:t>
             </a:r>
+            <a:endParaRPr lang="zh-CN" sz="1400" b="1" spc="225" dirty="0">
+              <a:solidFill>
+                <a:schemeClr val="accent1"/>
+              </a:solidFill>
+              <a:latin typeface="+mn-lt"/>
+              <a:ea typeface="+mn-ea"/>
+              <a:cs typeface="+mn-cs"/>
+            </a:endParaRPr>
           </a:p>
         </p:txBody>
       </p:sp>
@@ -4702,8 +5922,8 @@
         </p:nvSpPr>
         <p:spPr>
           <a:xfrm>
-            <a:off x="742950" y="361950"/>
-            <a:ext cx="1437475" cy="1733550"/>
+            <a:off x="789940" y="276225"/>
+            <a:ext cx="1271270" cy="1384935"/>
           </a:xfrm>
           <a:prstGeom prst="rect">
             <a:avLst/>
@@ -4719,18 +5939,36 @@
           </a:bodyPr>
           <a:lstStyle/>
           <a:p>
-            <a:pPr algn="l"/>
+            <a:pPr algn="l">
+              <a:buClrTx/>
+              <a:buSzTx/>
+              <a:buFontTx/>
+            </a:pPr>
             <a:r>
               <a:rPr lang="en-US" sz="9000" b="1" dirty="0">
                 <a:solidFill>
-                  <a:srgbClr val="F0F0ED"/>
-                </a:solidFill>
-                <a:latin typeface="Arial"/>
-                <a:ea typeface="Arial"/>
-                <a:cs typeface="Arial"/>
+                  <a:schemeClr val="accent1">
+                    <a:lumMod val="50000"/>
+                    <a:lumOff val="50000"/>
+                  </a:schemeClr>
+                </a:solidFill>
+                <a:latin typeface="Arial" panose="020B0604020202020204"/>
+                <a:ea typeface="Arial" panose="020B0604020202020204"/>
+                <a:cs typeface="Arial" panose="020B0604020202020204"/>
               </a:rPr>
               <a:t>04</a:t>
             </a:r>
+            <a:endParaRPr lang="en-US" sz="9000" b="1" dirty="0">
+              <a:solidFill>
+                <a:schemeClr val="accent1">
+                  <a:lumMod val="50000"/>
+                  <a:lumOff val="50000"/>
+                </a:schemeClr>
+              </a:solidFill>
+              <a:latin typeface="Arial" panose="020B0604020202020204"/>
+              <a:ea typeface="Arial" panose="020B0604020202020204"/>
+              <a:cs typeface="Arial" panose="020B0604020202020204"/>
+            </a:endParaRPr>
           </a:p>
         </p:txBody>
       </p:sp>
@@ -4801,12 +6039,20 @@
                   <a:solidFill>
                     <a:srgbClr val="FFFFFF"/>
                   </a:solidFill>
-                  <a:latin typeface="Arial"/>
-                  <a:ea typeface="Microsoft YaHei"/>
-                  <a:cs typeface="Arial"/>
+                  <a:latin typeface="Arial" panose="020B0604020202020204"/>
+                  <a:ea typeface="微软雅黑" panose="020B0503020204020204" charset="-122"/>
+                  <a:cs typeface="Arial" panose="020B0604020202020204"/>
                 </a:rPr>
                 <a:t>配置</a:t>
               </a:r>
+              <a:endParaRPr lang="zh-CN" sz="710" b="1" dirty="0">
+                <a:solidFill>
+                  <a:srgbClr val="FFFFFF"/>
+                </a:solidFill>
+                <a:latin typeface="Arial" panose="020B0604020202020204"/>
+                <a:ea typeface="微软雅黑" panose="020B0503020204020204" charset="-122"/>
+                <a:cs typeface="Arial" panose="020B0604020202020204"/>
+              </a:endParaRPr>
             </a:p>
           </p:txBody>
         </p:sp>
@@ -4841,12 +6087,20 @@
                   <a:solidFill>
                     <a:srgbClr val="FFFFFF"/>
                   </a:solidFill>
-                  <a:latin typeface="Arial"/>
-                  <a:ea typeface="Arial"/>
-                  <a:cs typeface="Arial"/>
+                  <a:latin typeface="Arial" panose="020B0604020202020204"/>
+                  <a:ea typeface="Arial" panose="020B0604020202020204"/>
+                  <a:cs typeface="Arial" panose="020B0604020202020204"/>
                 </a:rPr>
                 <a:t>KonIQ SRCC</a:t>
               </a:r>
+              <a:endParaRPr lang="en-US" sz="710" b="1" dirty="0">
+                <a:solidFill>
+                  <a:srgbClr val="FFFFFF"/>
+                </a:solidFill>
+                <a:latin typeface="Arial" panose="020B0604020202020204"/>
+                <a:ea typeface="Arial" panose="020B0604020202020204"/>
+                <a:cs typeface="Arial" panose="020B0604020202020204"/>
+              </a:endParaRPr>
             </a:p>
           </p:txBody>
         </p:sp>
@@ -4881,12 +6135,20 @@
                   <a:solidFill>
                     <a:srgbClr val="FFFFFF"/>
                   </a:solidFill>
-                  <a:latin typeface="Arial"/>
-                  <a:ea typeface="Arial"/>
-                  <a:cs typeface="Arial"/>
+                  <a:latin typeface="Arial" panose="020B0604020202020204"/>
+                  <a:ea typeface="Arial" panose="020B0604020202020204"/>
+                  <a:cs typeface="Arial" panose="020B0604020202020204"/>
                 </a:rPr>
                 <a:t>KonIQ MAE</a:t>
               </a:r>
+              <a:endParaRPr lang="en-US" sz="710" b="1" dirty="0">
+                <a:solidFill>
+                  <a:srgbClr val="FFFFFF"/>
+                </a:solidFill>
+                <a:latin typeface="Arial" panose="020B0604020202020204"/>
+                <a:ea typeface="Arial" panose="020B0604020202020204"/>
+                <a:cs typeface="Arial" panose="020B0604020202020204"/>
+              </a:endParaRPr>
             </a:p>
           </p:txBody>
         </p:sp>
@@ -4921,12 +6183,20 @@
                   <a:solidFill>
                     <a:srgbClr val="FFFFFF"/>
                   </a:solidFill>
-                  <a:latin typeface="Arial"/>
-                  <a:ea typeface="Arial"/>
-                  <a:cs typeface="Arial"/>
+                  <a:latin typeface="Arial" panose="020B0604020202020204"/>
+                  <a:ea typeface="Arial" panose="020B0604020202020204"/>
+                  <a:cs typeface="Arial" panose="020B0604020202020204"/>
                 </a:rPr>
                 <a:t>SPAQ SRCC</a:t>
               </a:r>
+              <a:endParaRPr lang="en-US" sz="710" b="1" dirty="0">
+                <a:solidFill>
+                  <a:srgbClr val="FFFFFF"/>
+                </a:solidFill>
+                <a:latin typeface="Arial" panose="020B0604020202020204"/>
+                <a:ea typeface="Arial" panose="020B0604020202020204"/>
+                <a:cs typeface="Arial" panose="020B0604020202020204"/>
+              </a:endParaRPr>
             </a:p>
           </p:txBody>
         </p:sp>
@@ -4961,12 +6231,20 @@
                   <a:solidFill>
                     <a:srgbClr val="FFFFFF"/>
                   </a:solidFill>
-                  <a:latin typeface="Arial"/>
-                  <a:ea typeface="Arial"/>
-                  <a:cs typeface="Arial"/>
+                  <a:latin typeface="Arial" panose="020B0604020202020204"/>
+                  <a:ea typeface="Arial" panose="020B0604020202020204"/>
+                  <a:cs typeface="Arial" panose="020B0604020202020204"/>
                 </a:rPr>
                 <a:t>SPAQ MAE</a:t>
               </a:r>
+              <a:endParaRPr lang="en-US" sz="710" b="1" dirty="0">
+                <a:solidFill>
+                  <a:srgbClr val="FFFFFF"/>
+                </a:solidFill>
+                <a:latin typeface="Arial" panose="020B0604020202020204"/>
+                <a:ea typeface="Arial" panose="020B0604020202020204"/>
+                <a:cs typeface="Arial" panose="020B0604020202020204"/>
+              </a:endParaRPr>
             </a:p>
           </p:txBody>
         </p:sp>
@@ -5014,8 +6292,8 @@
             </p:nvSpPr>
             <p:spPr>
               <a:xfrm>
-                <a:off x="945426" y="2094786"/>
-                <a:ext cx="1347648" cy="140494"/>
+                <a:off x="1201106" y="2094786"/>
+                <a:ext cx="836295" cy="108585"/>
               </a:xfrm>
               <a:prstGeom prst="rect">
                 <a:avLst/>
@@ -5037,12 +6315,42 @@
                     <a:solidFill>
                       <a:schemeClr val="dk1"/>
                     </a:solidFill>
-                    <a:latin typeface="Arial"/>
-                    <a:ea typeface="Microsoft YaHei"/>
-                    <a:cs typeface="Arial"/>
+                    <a:latin typeface="Arial" panose="020B0604020202020204"/>
+                    <a:ea typeface="微软雅黑" panose="020B0503020204020204" charset="-122"/>
+                    <a:cs typeface="Arial" panose="020B0604020202020204"/>
                   </a:rPr>
-                  <a:t>最初：什么都不加，一句话问分</a:t>
+                  <a:t>单角色问分</a:t>
                 </a:r>
+                <a:r>
+                  <a:rPr lang="en-US" altLang="zh-CN" sz="710" dirty="0">
+                    <a:solidFill>
+                      <a:schemeClr val="dk1"/>
+                    </a:solidFill>
+                    <a:latin typeface="Arial" panose="020B0604020202020204"/>
+                    <a:ea typeface="微软雅黑" panose="020B0503020204020204" charset="-122"/>
+                    <a:cs typeface="Arial" panose="020B0604020202020204"/>
+                  </a:rPr>
+                  <a:t>,</a:t>
+                </a:r>
+                <a:r>
+                  <a:rPr lang="zh-CN" altLang="en-US" sz="710" dirty="0">
+                    <a:solidFill>
+                      <a:schemeClr val="dk1"/>
+                    </a:solidFill>
+                    <a:latin typeface="Arial" panose="020B0604020202020204"/>
+                    <a:ea typeface="微软雅黑" panose="020B0503020204020204" charset="-122"/>
+                    <a:cs typeface="Arial" panose="020B0604020202020204"/>
+                  </a:rPr>
+                  <a:t>加上基准</a:t>
+                </a:r>
+                <a:endParaRPr lang="zh-CN" altLang="en-US" sz="710" dirty="0">
+                  <a:solidFill>
+                    <a:schemeClr val="dk1"/>
+                  </a:solidFill>
+                  <a:latin typeface="Arial" panose="020B0604020202020204"/>
+                  <a:ea typeface="微软雅黑" panose="020B0503020204020204" charset="-122"/>
+                  <a:cs typeface="Arial" panose="020B0604020202020204"/>
+                </a:endParaRPr>
               </a:p>
             </p:txBody>
           </p:sp>
@@ -5054,8 +6362,8 @@
             </p:nvSpPr>
             <p:spPr>
               <a:xfrm>
-                <a:off x="2816565" y="2094786"/>
-                <a:ext cx="272371" cy="140494"/>
+                <a:off x="2840039" y="2094786"/>
+                <a:ext cx="225425" cy="108585"/>
               </a:xfrm>
               <a:prstGeom prst="rect">
                 <a:avLst/>
@@ -5073,16 +6381,24 @@
               <a:p>
                 <a:pPr algn="ctr"/>
                 <a:r>
-                  <a:rPr lang="en-US" sz="710" dirty="0">
+                  <a:rPr lang="en-US" altLang="zh-CN" sz="710" dirty="0">
                     <a:solidFill>
                       <a:schemeClr val="dk1"/>
                     </a:solidFill>
-                    <a:latin typeface="Arial"/>
-                    <a:ea typeface="Arial"/>
-                    <a:cs typeface="Arial"/>
+                    <a:latin typeface="Arial" panose="020B0604020202020204"/>
+                    <a:ea typeface="Arial" panose="020B0604020202020204"/>
+                    <a:cs typeface="Arial" panose="020B0604020202020204"/>
                   </a:rPr>
-                  <a:t>0.577</a:t>
+                  <a:t>0.624</a:t>
                 </a:r>
+                <a:endParaRPr lang="en-US" altLang="zh-CN" sz="710" dirty="0">
+                  <a:solidFill>
+                    <a:schemeClr val="dk1"/>
+                  </a:solidFill>
+                  <a:latin typeface="Arial" panose="020B0604020202020204"/>
+                  <a:ea typeface="Arial" panose="020B0604020202020204"/>
+                  <a:cs typeface="Arial" panose="020B0604020202020204"/>
+                </a:endParaRPr>
               </a:p>
             </p:txBody>
           </p:sp>
@@ -5094,8 +6410,8 @@
             </p:nvSpPr>
             <p:spPr>
               <a:xfrm>
-                <a:off x="4054815" y="2094786"/>
-                <a:ext cx="272371" cy="140494"/>
+                <a:off x="4078290" y="2094786"/>
+                <a:ext cx="225425" cy="108585"/>
               </a:xfrm>
               <a:prstGeom prst="rect">
                 <a:avLst/>
@@ -5113,16 +6429,24 @@
               <a:p>
                 <a:pPr algn="ctr"/>
                 <a:r>
-                  <a:rPr lang="en-US" sz="710" dirty="0">
+                  <a:rPr lang="en-US" altLang="zh-CN" sz="710" dirty="0">
                     <a:solidFill>
                       <a:schemeClr val="dk1"/>
                     </a:solidFill>
-                    <a:latin typeface="Arial"/>
-                    <a:ea typeface="Arial"/>
-                    <a:cs typeface="Arial"/>
+                    <a:latin typeface="Arial" panose="020B0604020202020204"/>
+                    <a:ea typeface="Arial" panose="020B0604020202020204"/>
+                    <a:cs typeface="Arial" panose="020B0604020202020204"/>
                   </a:rPr>
-                  <a:t>0.463</a:t>
+                  <a:t>0.644</a:t>
                 </a:r>
+                <a:endParaRPr lang="en-US" altLang="zh-CN" sz="710" dirty="0">
+                  <a:solidFill>
+                    <a:schemeClr val="dk1"/>
+                  </a:solidFill>
+                  <a:latin typeface="Arial" panose="020B0604020202020204"/>
+                  <a:ea typeface="Arial" panose="020B0604020202020204"/>
+                  <a:cs typeface="Arial" panose="020B0604020202020204"/>
+                </a:endParaRPr>
               </a:p>
             </p:txBody>
           </p:sp>
@@ -5134,8 +6458,8 @@
             </p:nvSpPr>
             <p:spPr>
               <a:xfrm>
-                <a:off x="5293065" y="2094786"/>
-                <a:ext cx="272371" cy="140494"/>
+                <a:off x="5316540" y="2094786"/>
+                <a:ext cx="225425" cy="108585"/>
               </a:xfrm>
               <a:prstGeom prst="rect">
                 <a:avLst/>
@@ -5153,16 +6477,24 @@
               <a:p>
                 <a:pPr algn="ctr"/>
                 <a:r>
-                  <a:rPr lang="en-US" sz="710" dirty="0">
+                  <a:rPr lang="en-US" altLang="zh-CN" sz="710" dirty="0">
                     <a:solidFill>
                       <a:schemeClr val="dk1"/>
                     </a:solidFill>
-                    <a:latin typeface="Arial"/>
-                    <a:ea typeface="Arial"/>
-                    <a:cs typeface="Arial"/>
+                    <a:latin typeface="Arial" panose="020B0604020202020204"/>
+                    <a:ea typeface="Arial" panose="020B0604020202020204"/>
+                    <a:cs typeface="Arial" panose="020B0604020202020204"/>
                   </a:rPr>
-                  <a:t>0.881</a:t>
+                  <a:t>0.865</a:t>
                 </a:r>
+                <a:endParaRPr lang="en-US" altLang="zh-CN" sz="710" dirty="0">
+                  <a:solidFill>
+                    <a:schemeClr val="dk1"/>
+                  </a:solidFill>
+                  <a:latin typeface="Arial" panose="020B0604020202020204"/>
+                  <a:ea typeface="Arial" panose="020B0604020202020204"/>
+                  <a:cs typeface="Arial" panose="020B0604020202020204"/>
+                </a:endParaRPr>
               </a:p>
             </p:txBody>
           </p:sp>
@@ -5174,8 +6506,8 @@
             </p:nvSpPr>
             <p:spPr>
               <a:xfrm>
-                <a:off x="6531315" y="2094786"/>
-                <a:ext cx="272371" cy="140494"/>
+                <a:off x="6554790" y="2094786"/>
+                <a:ext cx="225425" cy="108585"/>
               </a:xfrm>
               <a:prstGeom prst="rect">
                 <a:avLst/>
@@ -5193,16 +6525,24 @@
               <a:p>
                 <a:pPr algn="ctr"/>
                 <a:r>
-                  <a:rPr lang="en-US" sz="710" dirty="0">
+                  <a:rPr lang="en-US" altLang="zh-CN" sz="710" dirty="0">
                     <a:solidFill>
                       <a:schemeClr val="dk1"/>
                     </a:solidFill>
-                    <a:latin typeface="Arial"/>
-                    <a:ea typeface="Arial"/>
-                    <a:cs typeface="Arial"/>
+                    <a:latin typeface="Arial" panose="020B0604020202020204"/>
+                    <a:ea typeface="Arial" panose="020B0604020202020204"/>
+                    <a:cs typeface="Arial" panose="020B0604020202020204"/>
                   </a:rPr>
-                  <a:t>0.893</a:t>
+                  <a:t>1.061</a:t>
                 </a:r>
+                <a:endParaRPr lang="en-US" altLang="zh-CN" sz="710" dirty="0">
+                  <a:solidFill>
+                    <a:schemeClr val="dk1"/>
+                  </a:solidFill>
+                  <a:latin typeface="Arial" panose="020B0604020202020204"/>
+                  <a:ea typeface="Arial" panose="020B0604020202020204"/>
+                  <a:cs typeface="Arial" panose="020B0604020202020204"/>
+                </a:endParaRPr>
               </a:p>
             </p:txBody>
           </p:sp>
@@ -5259,12 +6599,20 @@
                     <a:solidFill>
                       <a:schemeClr val="dk1"/>
                     </a:solidFill>
-                    <a:latin typeface="Arial"/>
-                    <a:ea typeface="Microsoft YaHei"/>
-                    <a:cs typeface="Arial"/>
+                    <a:latin typeface="Arial" panose="020B0604020202020204"/>
+                    <a:ea typeface="微软雅黑" panose="020B0503020204020204" charset="-122"/>
+                    <a:cs typeface="Arial" panose="020B0604020202020204"/>
                   </a:rPr>
                   <a:t>加上评估细则</a:t>
                 </a:r>
+                <a:endParaRPr lang="zh-CN" sz="710" dirty="0">
+                  <a:solidFill>
+                    <a:schemeClr val="dk1"/>
+                  </a:solidFill>
+                  <a:latin typeface="Arial" panose="020B0604020202020204"/>
+                  <a:ea typeface="微软雅黑" panose="020B0503020204020204" charset="-122"/>
+                  <a:cs typeface="Arial" panose="020B0604020202020204"/>
+                </a:endParaRPr>
               </a:p>
             </p:txBody>
           </p:sp>
@@ -5276,8 +6624,56 @@
             </p:nvSpPr>
             <p:spPr>
               <a:xfrm>
-                <a:off x="2816565" y="2323386"/>
-                <a:ext cx="272371" cy="140494"/>
+                <a:off x="2840039" y="2323386"/>
+                <a:ext cx="225425" cy="108585"/>
+              </a:xfrm>
+              <a:prstGeom prst="rect">
+                <a:avLst/>
+              </a:prstGeom>
+              <a:noFill/>
+              <a:ln>
+                <a:noFill/>
+              </a:ln>
+            </p:spPr>
+            <p:txBody>
+              <a:bodyPr wrap="none" lIns="0" tIns="0" rIns="0" bIns="0" anchor="t" anchorCtr="0">
+                <a:spAutoFit/>
+              </a:bodyPr>
+              <a:lstStyle/>
+              <a:p>
+                <a:pPr algn="ctr"/>
+                <a:r>
+                  <a:rPr lang="en-US" altLang="zh-CN" sz="710" dirty="0">
+                    <a:solidFill>
+                      <a:schemeClr val="dk1"/>
+                    </a:solidFill>
+                    <a:latin typeface="Arial" panose="020B0604020202020204"/>
+                    <a:ea typeface="Arial" panose="020B0604020202020204"/>
+                    <a:cs typeface="Arial" panose="020B0604020202020204"/>
+                  </a:rPr>
+                  <a:t>0.606</a:t>
+                </a:r>
+                <a:endParaRPr lang="en-US" sz="710" dirty="0">
+                  <a:solidFill>
+                    <a:schemeClr val="dk1"/>
+                  </a:solidFill>
+                  <a:latin typeface="Arial" panose="020B0604020202020204"/>
+                  <a:ea typeface="Arial" panose="020B0604020202020204"/>
+                  <a:cs typeface="Arial" panose="020B0604020202020204"/>
+                </a:endParaRPr>
+              </a:p>
+            </p:txBody>
+          </p:sp>
+          <p:sp>
+            <p:nvSpPr>
+              <p:cNvPr id="22" name="TextBox 22"/>
+              <p:cNvSpPr txBox="1"/>
+              <p:nvPr/>
+            </p:nvSpPr>
+            <p:spPr>
+              <a:xfrm>
+                <a:off x="4078290" y="2323386"/>
+                <a:ext cx="225425" cy="108585"/>
               </a:xfrm>
               <a:prstGeom prst="rect">
                 <a:avLst/>
@@ -5299,25 +6695,33 @@
                     <a:solidFill>
                       <a:schemeClr val="dk1"/>
                     </a:solidFill>
-                    <a:latin typeface="Arial"/>
-                    <a:ea typeface="Arial"/>
-                    <a:cs typeface="Arial"/>
+                    <a:latin typeface="Arial" panose="020B0604020202020204"/>
+                    <a:ea typeface="Arial" panose="020B0604020202020204"/>
+                    <a:cs typeface="Arial" panose="020B0604020202020204"/>
                   </a:rPr>
-                  <a:t>0.633</a:t>
+                  <a:t>0.677</a:t>
                 </a:r>
+                <a:endParaRPr lang="en-US" sz="710" dirty="0">
+                  <a:solidFill>
+                    <a:schemeClr val="dk1"/>
+                  </a:solidFill>
+                  <a:latin typeface="Arial" panose="020B0604020202020204"/>
+                  <a:ea typeface="Arial" panose="020B0604020202020204"/>
+                  <a:cs typeface="Arial" panose="020B0604020202020204"/>
+                </a:endParaRPr>
               </a:p>
             </p:txBody>
           </p:sp>
           <p:sp>
             <p:nvSpPr>
-              <p:cNvPr id="22" name="TextBox 22"/>
+              <p:cNvPr id="23" name="TextBox 23"/>
               <p:cNvSpPr txBox="1"/>
               <p:nvPr/>
             </p:nvSpPr>
             <p:spPr>
               <a:xfrm>
-                <a:off x="4054815" y="2323386"/>
-                <a:ext cx="272371" cy="140494"/>
+                <a:off x="5316540" y="2323386"/>
+                <a:ext cx="225425" cy="108585"/>
               </a:xfrm>
               <a:prstGeom prst="rect">
                 <a:avLst/>
@@ -5339,25 +6743,33 @@
                     <a:solidFill>
                       <a:schemeClr val="dk1"/>
                     </a:solidFill>
-                    <a:latin typeface="Arial"/>
-                    <a:ea typeface="Arial"/>
-                    <a:cs typeface="Arial"/>
+                    <a:latin typeface="Arial" panose="020B0604020202020204"/>
+                    <a:ea typeface="Arial" panose="020B0604020202020204"/>
+                    <a:cs typeface="Arial" panose="020B0604020202020204"/>
                   </a:rPr>
-                  <a:t>0.688</a:t>
+                  <a:t>0.859</a:t>
                 </a:r>
+                <a:endParaRPr lang="en-US" sz="710" dirty="0">
+                  <a:solidFill>
+                    <a:schemeClr val="dk1"/>
+                  </a:solidFill>
+                  <a:latin typeface="Arial" panose="020B0604020202020204"/>
+                  <a:ea typeface="Arial" panose="020B0604020202020204"/>
+                  <a:cs typeface="Arial" panose="020B0604020202020204"/>
+                </a:endParaRPr>
               </a:p>
             </p:txBody>
           </p:sp>
           <p:sp>
             <p:nvSpPr>
-              <p:cNvPr id="23" name="TextBox 23"/>
+              <p:cNvPr id="24" name="TextBox 24"/>
               <p:cNvSpPr txBox="1"/>
               <p:nvPr/>
             </p:nvSpPr>
             <p:spPr>
               <a:xfrm>
-                <a:off x="5293065" y="2323386"/>
-                <a:ext cx="272371" cy="140494"/>
+                <a:off x="6554792" y="2323386"/>
+                <a:ext cx="225425" cy="108585"/>
               </a:xfrm>
               <a:prstGeom prst="rect">
                 <a:avLst/>
@@ -5379,52 +6791,20 @@
                     <a:solidFill>
                       <a:schemeClr val="dk1"/>
                     </a:solidFill>
-                    <a:latin typeface="Arial"/>
-                    <a:ea typeface="Arial"/>
-                    <a:cs typeface="Arial"/>
+                    <a:latin typeface="Arial" panose="020B0604020202020204"/>
+                    <a:ea typeface="Arial" panose="020B0604020202020204"/>
+                    <a:cs typeface="Arial" panose="020B0604020202020204"/>
                   </a:rPr>
-                  <a:t>0.867</a:t>
+                  <a:t>0.971</a:t>
                 </a:r>
-              </a:p>
-            </p:txBody>
-          </p:sp>
-          <p:sp>
-            <p:nvSpPr>
-              <p:cNvPr id="24" name="TextBox 24"/>
-              <p:cNvSpPr txBox="1"/>
-              <p:nvPr/>
-            </p:nvSpPr>
-            <p:spPr>
-              <a:xfrm>
-                <a:off x="6531315" y="2323386"/>
-                <a:ext cx="272371" cy="140494"/>
-              </a:xfrm>
-              <a:prstGeom prst="rect">
-                <a:avLst/>
-              </a:prstGeom>
-              <a:noFill/>
-              <a:ln>
-                <a:noFill/>
-              </a:ln>
-            </p:spPr>
-            <p:txBody>
-              <a:bodyPr wrap="none" lIns="0" tIns="0" rIns="0" bIns="0" anchor="t" anchorCtr="0">
-                <a:spAutoFit/>
-              </a:bodyPr>
-              <a:lstStyle/>
-              <a:p>
-                <a:pPr algn="ctr"/>
-                <a:r>
-                  <a:rPr lang="en-US" sz="710" dirty="0">
-                    <a:solidFill>
-                      <a:schemeClr val="dk1"/>
-                    </a:solidFill>
-                    <a:latin typeface="Arial"/>
-                    <a:ea typeface="Arial"/>
-                    <a:cs typeface="Arial"/>
-                  </a:rPr>
-                  <a:t>1.042</a:t>
-                </a:r>
+                <a:endParaRPr lang="en-US" sz="710" dirty="0">
+                  <a:solidFill>
+                    <a:schemeClr val="dk1"/>
+                  </a:solidFill>
+                  <a:latin typeface="Arial" panose="020B0604020202020204"/>
+                  <a:ea typeface="Arial" panose="020B0604020202020204"/>
+                  <a:cs typeface="Arial" panose="020B0604020202020204"/>
+                </a:endParaRPr>
               </a:p>
             </p:txBody>
           </p:sp>
@@ -5481,12 +6861,20 @@
                     <a:solidFill>
                       <a:schemeClr val="dk1"/>
                     </a:solidFill>
-                    <a:latin typeface="Arial"/>
-                    <a:ea typeface="Microsoft YaHei"/>
-                    <a:cs typeface="Arial"/>
+                    <a:latin typeface="Arial" panose="020B0604020202020204"/>
+                    <a:ea typeface="微软雅黑" panose="020B0503020204020204" charset="-122"/>
+                    <a:cs typeface="Arial" panose="020B0604020202020204"/>
                   </a:rPr>
                   <a:t>五个专家 + 智能分诊</a:t>
                 </a:r>
+                <a:endParaRPr lang="zh-CN" sz="710" dirty="0">
+                  <a:solidFill>
+                    <a:schemeClr val="dk1"/>
+                  </a:solidFill>
+                  <a:latin typeface="Arial" panose="020B0604020202020204"/>
+                  <a:ea typeface="微软雅黑" panose="020B0503020204020204" charset="-122"/>
+                  <a:cs typeface="Arial" panose="020B0604020202020204"/>
+                </a:endParaRPr>
               </a:p>
             </p:txBody>
           </p:sp>
@@ -5521,12 +6909,20 @@
                     <a:solidFill>
                       <a:schemeClr val="dk1"/>
                     </a:solidFill>
-                    <a:latin typeface="Arial"/>
-                    <a:ea typeface="Arial"/>
-                    <a:cs typeface="Arial"/>
+                    <a:latin typeface="Arial" panose="020B0604020202020204"/>
+                    <a:ea typeface="Arial" panose="020B0604020202020204"/>
+                    <a:cs typeface="Arial" panose="020B0604020202020204"/>
                   </a:rPr>
                   <a:t>0.619</a:t>
                 </a:r>
+                <a:endParaRPr lang="en-US" sz="710" dirty="0">
+                  <a:solidFill>
+                    <a:schemeClr val="dk1"/>
+                  </a:solidFill>
+                  <a:latin typeface="Arial" panose="020B0604020202020204"/>
+                  <a:ea typeface="Arial" panose="020B0604020202020204"/>
+                  <a:cs typeface="Arial" panose="020B0604020202020204"/>
+                </a:endParaRPr>
               </a:p>
             </p:txBody>
           </p:sp>
@@ -5561,12 +6957,20 @@
                     <a:solidFill>
                       <a:schemeClr val="dk1"/>
                     </a:solidFill>
-                    <a:latin typeface="Arial"/>
-                    <a:ea typeface="Arial"/>
-                    <a:cs typeface="Arial"/>
+                    <a:latin typeface="Arial" panose="020B0604020202020204"/>
+                    <a:ea typeface="Arial" panose="020B0604020202020204"/>
+                    <a:cs typeface="Arial" panose="020B0604020202020204"/>
                   </a:rPr>
                   <a:t>0.533</a:t>
                 </a:r>
+                <a:endParaRPr lang="en-US" sz="710" dirty="0">
+                  <a:solidFill>
+                    <a:schemeClr val="dk1"/>
+                  </a:solidFill>
+                  <a:latin typeface="Arial" panose="020B0604020202020204"/>
+                  <a:ea typeface="Arial" panose="020B0604020202020204"/>
+                  <a:cs typeface="Arial" panose="020B0604020202020204"/>
+                </a:endParaRPr>
               </a:p>
             </p:txBody>
           </p:sp>
@@ -5601,12 +7005,20 @@
                     <a:solidFill>
                       <a:schemeClr val="dk1"/>
                     </a:solidFill>
-                    <a:latin typeface="Arial"/>
-                    <a:ea typeface="Arial"/>
-                    <a:cs typeface="Arial"/>
+                    <a:latin typeface="Arial" panose="020B0604020202020204"/>
+                    <a:ea typeface="Arial" panose="020B0604020202020204"/>
+                    <a:cs typeface="Arial" panose="020B0604020202020204"/>
                   </a:rPr>
                   <a:t>0.860</a:t>
                 </a:r>
+                <a:endParaRPr lang="en-US" sz="710" dirty="0">
+                  <a:solidFill>
+                    <a:schemeClr val="dk1"/>
+                  </a:solidFill>
+                  <a:latin typeface="Arial" panose="020B0604020202020204"/>
+                  <a:ea typeface="Arial" panose="020B0604020202020204"/>
+                  <a:cs typeface="Arial" panose="020B0604020202020204"/>
+                </a:endParaRPr>
               </a:p>
             </p:txBody>
           </p:sp>
@@ -5641,12 +7053,20 @@
                     <a:solidFill>
                       <a:schemeClr val="dk1"/>
                     </a:solidFill>
-                    <a:latin typeface="Arial"/>
-                    <a:ea typeface="Arial"/>
-                    <a:cs typeface="Arial"/>
+                    <a:latin typeface="Arial" panose="020B0604020202020204"/>
+                    <a:ea typeface="Arial" panose="020B0604020202020204"/>
+                    <a:cs typeface="Arial" panose="020B0604020202020204"/>
                   </a:rPr>
                   <a:t>1.014</a:t>
                 </a:r>
+                <a:endParaRPr lang="en-US" sz="710" dirty="0">
+                  <a:solidFill>
+                    <a:schemeClr val="dk1"/>
+                  </a:solidFill>
+                  <a:latin typeface="Arial" panose="020B0604020202020204"/>
+                  <a:ea typeface="Arial" panose="020B0604020202020204"/>
+                  <a:cs typeface="Arial" panose="020B0604020202020204"/>
+                </a:endParaRPr>
               </a:p>
             </p:txBody>
           </p:sp>
@@ -5680,8 +7100,8 @@
             </p:nvSpPr>
             <p:spPr>
               <a:xfrm>
-                <a:off x="897636" y="2780586"/>
-                <a:ext cx="1443228" cy="140494"/>
+                <a:off x="1229360" y="2780586"/>
+                <a:ext cx="779780" cy="108585"/>
               </a:xfrm>
               <a:prstGeom prst="rect">
                 <a:avLst/>
@@ -5699,16 +7119,35 @@
               <a:p>
                 <a:pPr algn="ctr"/>
                 <a:r>
-                  <a:rPr lang="zh-CN" sz="710" dirty="0">
+                  <a:rPr lang="en-US" altLang="zh-CN" sz="710" dirty="0">
                     <a:solidFill>
                       <a:schemeClr val="dk1"/>
                     </a:solidFill>
-                    <a:latin typeface="Arial"/>
-                    <a:ea typeface="Microsoft YaHei"/>
-                    <a:cs typeface="Arial"/>
+                    <a:latin typeface="Arial" panose="020B0604020202020204"/>
+                    <a:ea typeface="微软雅黑" panose="020B0503020204020204" charset="-122"/>
+                    <a:cs typeface="Arial" panose="020B0604020202020204"/>
                   </a:rPr>
-                  <a:t>路由器用锦标赛训练（关键跳变）</a:t>
+                  <a:t>+CKE</a:t>
                 </a:r>
+                <a:r>
+                  <a:rPr lang="zh-CN" altLang="en-US" sz="710" dirty="0">
+                    <a:solidFill>
+                      <a:schemeClr val="dk1"/>
+                    </a:solidFill>
+                    <a:latin typeface="Arial" panose="020B0604020202020204"/>
+                    <a:ea typeface="微软雅黑" panose="020B0503020204020204" charset="-122"/>
+                    <a:cs typeface="Arial" panose="020B0604020202020204"/>
+                  </a:rPr>
+                  <a:t>自进化规则库</a:t>
+                </a:r>
+                <a:endParaRPr lang="zh-CN" altLang="en-US" sz="710" dirty="0">
+                  <a:solidFill>
+                    <a:schemeClr val="dk1"/>
+                  </a:solidFill>
+                  <a:latin typeface="Arial" panose="020B0604020202020204"/>
+                  <a:ea typeface="微软雅黑" panose="020B0503020204020204" charset="-122"/>
+                  <a:cs typeface="Arial" panose="020B0604020202020204"/>
+                </a:endParaRPr>
               </a:p>
             </p:txBody>
           </p:sp>
@@ -5720,8 +7159,8 @@
             </p:nvSpPr>
             <p:spPr>
               <a:xfrm>
-                <a:off x="2816565" y="2780586"/>
-                <a:ext cx="272371" cy="140494"/>
+                <a:off x="2840040" y="2780586"/>
+                <a:ext cx="225425" cy="108585"/>
               </a:xfrm>
               <a:prstGeom prst="rect">
                 <a:avLst/>
@@ -5743,12 +7182,20 @@
                     <a:solidFill>
                       <a:schemeClr val="dk1"/>
                     </a:solidFill>
-                    <a:latin typeface="Arial"/>
-                    <a:ea typeface="Arial"/>
-                    <a:cs typeface="Arial"/>
+                    <a:latin typeface="Arial" panose="020B0604020202020204"/>
+                    <a:ea typeface="Arial" panose="020B0604020202020204"/>
+                    <a:cs typeface="Arial" panose="020B0604020202020204"/>
                   </a:rPr>
-                  <a:t>0.668</a:t>
+                  <a:t>0.620</a:t>
                 </a:r>
+                <a:endParaRPr lang="en-US" sz="710" dirty="0">
+                  <a:solidFill>
+                    <a:schemeClr val="dk1"/>
+                  </a:solidFill>
+                  <a:latin typeface="Arial" panose="020B0604020202020204"/>
+                  <a:ea typeface="Arial" panose="020B0604020202020204"/>
+                  <a:cs typeface="Arial" panose="020B0604020202020204"/>
+                </a:endParaRPr>
               </a:p>
             </p:txBody>
           </p:sp>
@@ -5760,8 +7207,8 @@
             </p:nvSpPr>
             <p:spPr>
               <a:xfrm>
-                <a:off x="4054815" y="2780586"/>
-                <a:ext cx="272371" cy="140494"/>
+                <a:off x="4081465" y="2780586"/>
+                <a:ext cx="225425" cy="108585"/>
               </a:xfrm>
               <a:prstGeom prst="rect">
                 <a:avLst/>
@@ -5783,12 +7230,20 @@
                     <a:solidFill>
                       <a:schemeClr val="dk1"/>
                     </a:solidFill>
-                    <a:latin typeface="Arial"/>
-                    <a:ea typeface="Arial"/>
-                    <a:cs typeface="Arial"/>
+                    <a:latin typeface="Arial" panose="020B0604020202020204"/>
+                    <a:ea typeface="Arial" panose="020B0604020202020204"/>
+                    <a:cs typeface="Arial" panose="020B0604020202020204"/>
                   </a:rPr>
-                  <a:t>0.554</a:t>
+                  <a:t>0.499</a:t>
                 </a:r>
+                <a:endParaRPr lang="en-US" sz="710" dirty="0">
+                  <a:solidFill>
+                    <a:schemeClr val="dk1"/>
+                  </a:solidFill>
+                  <a:latin typeface="Arial" panose="020B0604020202020204"/>
+                  <a:ea typeface="Arial" panose="020B0604020202020204"/>
+                  <a:cs typeface="Arial" panose="020B0604020202020204"/>
+                </a:endParaRPr>
               </a:p>
             </p:txBody>
           </p:sp>
@@ -5800,8 +7255,8 @@
             </p:nvSpPr>
             <p:spPr>
               <a:xfrm>
-                <a:off x="5293065" y="2780586"/>
-                <a:ext cx="272371" cy="140494"/>
+                <a:off x="5316540" y="2780586"/>
+                <a:ext cx="225425" cy="108585"/>
               </a:xfrm>
               <a:prstGeom prst="rect">
                 <a:avLst/>
@@ -5823,12 +7278,20 @@
                     <a:solidFill>
                       <a:schemeClr val="dk1"/>
                     </a:solidFill>
-                    <a:latin typeface="Arial"/>
-                    <a:ea typeface="Arial"/>
-                    <a:cs typeface="Arial"/>
+                    <a:latin typeface="Arial" panose="020B0604020202020204"/>
+                    <a:ea typeface="Arial" panose="020B0604020202020204"/>
+                    <a:cs typeface="Arial" panose="020B0604020202020204"/>
                   </a:rPr>
-                  <a:t>0.885</a:t>
+                  <a:t>0.860</a:t>
                 </a:r>
+                <a:endParaRPr lang="en-US" sz="710" dirty="0">
+                  <a:solidFill>
+                    <a:schemeClr val="dk1"/>
+                  </a:solidFill>
+                  <a:latin typeface="Arial" panose="020B0604020202020204"/>
+                  <a:ea typeface="Arial" panose="020B0604020202020204"/>
+                  <a:cs typeface="Arial" panose="020B0604020202020204"/>
+                </a:endParaRPr>
               </a:p>
             </p:txBody>
           </p:sp>
@@ -5840,8 +7303,8 @@
             </p:nvSpPr>
             <p:spPr>
               <a:xfrm>
-                <a:off x="6531315" y="2780586"/>
-                <a:ext cx="272371" cy="140494"/>
+                <a:off x="6554792" y="2780586"/>
+                <a:ext cx="225425" cy="108585"/>
               </a:xfrm>
               <a:prstGeom prst="rect">
                 <a:avLst/>
@@ -5863,12 +7326,20 @@
                     <a:solidFill>
                       <a:schemeClr val="dk1"/>
                     </a:solidFill>
-                    <a:latin typeface="Arial"/>
-                    <a:ea typeface="Arial"/>
-                    <a:cs typeface="Arial"/>
+                    <a:latin typeface="Arial" panose="020B0604020202020204"/>
+                    <a:ea typeface="Arial" panose="020B0604020202020204"/>
+                    <a:cs typeface="Arial" panose="020B0604020202020204"/>
                   </a:rPr>
-                  <a:t>0.908</a:t>
+                  <a:t>1.000</a:t>
                 </a:r>
+                <a:endParaRPr lang="en-US" sz="710" dirty="0">
+                  <a:solidFill>
+                    <a:schemeClr val="dk1"/>
+                  </a:solidFill>
+                  <a:latin typeface="Arial" panose="020B0604020202020204"/>
+                  <a:ea typeface="Arial" panose="020B0604020202020204"/>
+                  <a:cs typeface="Arial" panose="020B0604020202020204"/>
+                </a:endParaRPr>
               </a:p>
             </p:txBody>
           </p:sp>
@@ -5927,12 +7398,20 @@
                     <a:solidFill>
                       <a:schemeClr val="accent1"/>
                     </a:solidFill>
-                    <a:latin typeface="Arial"/>
-                    <a:ea typeface="Microsoft YaHei"/>
-                    <a:cs typeface="Arial"/>
+                    <a:latin typeface="Arial" panose="020B0604020202020204"/>
+                    <a:ea typeface="微软雅黑" panose="020B0503020204020204" charset="-122"/>
+                    <a:cs typeface="Arial" panose="020B0604020202020204"/>
                   </a:rPr>
                   <a:t>最终：动态门控 + 投票混合</a:t>
                 </a:r>
+                <a:endParaRPr lang="zh-CN" sz="710" b="1" dirty="0">
+                  <a:solidFill>
+                    <a:schemeClr val="accent1"/>
+                  </a:solidFill>
+                  <a:latin typeface="Arial" panose="020B0604020202020204"/>
+                  <a:ea typeface="微软雅黑" panose="020B0503020204020204" charset="-122"/>
+                  <a:cs typeface="Arial" panose="020B0604020202020204"/>
+                </a:endParaRPr>
               </a:p>
             </p:txBody>
           </p:sp>
@@ -5967,12 +7446,20 @@
                     <a:solidFill>
                       <a:srgbClr val="2A78D6"/>
                     </a:solidFill>
-                    <a:latin typeface="Arial"/>
-                    <a:ea typeface="Arial"/>
-                    <a:cs typeface="Arial"/>
+                    <a:latin typeface="Arial" panose="020B0604020202020204"/>
+                    <a:ea typeface="Arial" panose="020B0604020202020204"/>
+                    <a:cs typeface="Arial" panose="020B0604020202020204"/>
                   </a:rPr>
                   <a:t>0.734</a:t>
                 </a:r>
+                <a:endParaRPr lang="en-US" sz="710" b="1" dirty="0">
+                  <a:solidFill>
+                    <a:srgbClr val="2A78D6"/>
+                  </a:solidFill>
+                  <a:latin typeface="Arial" panose="020B0604020202020204"/>
+                  <a:ea typeface="Arial" panose="020B0604020202020204"/>
+                  <a:cs typeface="Arial" panose="020B0604020202020204"/>
+                </a:endParaRPr>
               </a:p>
             </p:txBody>
           </p:sp>
@@ -6007,12 +7494,20 @@
                     <a:solidFill>
                       <a:srgbClr val="2A78D6"/>
                     </a:solidFill>
-                    <a:latin typeface="Arial"/>
-                    <a:ea typeface="Arial"/>
-                    <a:cs typeface="Arial"/>
+                    <a:latin typeface="Arial" panose="020B0604020202020204"/>
+                    <a:ea typeface="Arial" panose="020B0604020202020204"/>
+                    <a:cs typeface="Arial" panose="020B0604020202020204"/>
                   </a:rPr>
                   <a:t>0.491</a:t>
                 </a:r>
+                <a:endParaRPr lang="en-US" sz="710" b="1" dirty="0">
+                  <a:solidFill>
+                    <a:srgbClr val="2A78D6"/>
+                  </a:solidFill>
+                  <a:latin typeface="Arial" panose="020B0604020202020204"/>
+                  <a:ea typeface="Arial" panose="020B0604020202020204"/>
+                  <a:cs typeface="Arial" panose="020B0604020202020204"/>
+                </a:endParaRPr>
               </a:p>
             </p:txBody>
           </p:sp>
@@ -6047,12 +7542,20 @@
                     <a:solidFill>
                       <a:srgbClr val="2A78D6"/>
                     </a:solidFill>
-                    <a:latin typeface="Arial"/>
-                    <a:ea typeface="Arial"/>
-                    <a:cs typeface="Arial"/>
+                    <a:latin typeface="Arial" panose="020B0604020202020204"/>
+                    <a:ea typeface="Arial" panose="020B0604020202020204"/>
+                    <a:cs typeface="Arial" panose="020B0604020202020204"/>
                   </a:rPr>
                   <a:t>0.893</a:t>
                 </a:r>
+                <a:endParaRPr lang="en-US" sz="710" b="1" dirty="0">
+                  <a:solidFill>
+                    <a:srgbClr val="2A78D6"/>
+                  </a:solidFill>
+                  <a:latin typeface="Arial" panose="020B0604020202020204"/>
+                  <a:ea typeface="Arial" panose="020B0604020202020204"/>
+                  <a:cs typeface="Arial" panose="020B0604020202020204"/>
+                </a:endParaRPr>
               </a:p>
             </p:txBody>
           </p:sp>
@@ -6087,12 +7590,20 @@
                     <a:solidFill>
                       <a:srgbClr val="2A78D6"/>
                     </a:solidFill>
-                    <a:latin typeface="Arial"/>
-                    <a:ea typeface="Arial"/>
-                    <a:cs typeface="Arial"/>
+                    <a:latin typeface="Arial" panose="020B0604020202020204"/>
+                    <a:ea typeface="Arial" panose="020B0604020202020204"/>
+                    <a:cs typeface="Arial" panose="020B0604020202020204"/>
                   </a:rPr>
                   <a:t>0.945</a:t>
                 </a:r>
+                <a:endParaRPr lang="en-US" sz="710" b="1" dirty="0">
+                  <a:solidFill>
+                    <a:srgbClr val="2A78D6"/>
+                  </a:solidFill>
+                  <a:latin typeface="Arial" panose="020B0604020202020204"/>
+                  <a:ea typeface="Arial" panose="020B0604020202020204"/>
+                  <a:cs typeface="Arial" panose="020B0604020202020204"/>
+                </a:endParaRPr>
               </a:p>
             </p:txBody>
           </p:sp>
@@ -6107,7 +7618,7 @@
           <p:nvPr/>
         </p:nvPicPr>
         <p:blipFill>
-          <a:blip r:embed="rId2"/>
+          <a:blip r:embed="rId1"/>
           <a:stretch>
             <a:fillRect/>
           </a:stretch>
@@ -6143,6 +7654,12 @@
             <a:noFill/>
           </a:ln>
         </p:spPr>
+        <p:txBody>
+          <a:bodyPr/>
+          <a:p>
+            <a:endParaRPr lang="zh-CN" altLang="en-US"/>
+          </a:p>
+        </p:txBody>
       </p:sp>
       <p:grpSp>
         <p:nvGrpSpPr>
@@ -6152,10 +7669,10 @@
         </p:nvGrpSpPr>
         <p:grpSpPr>
           <a:xfrm>
-            <a:off x="757047" y="3799999"/>
-            <a:ext cx="7364745" cy="1327308"/>
-            <a:chOff x="757047" y="3799999"/>
-            <a:chExt cx="7364745" cy="1327308"/>
+            <a:off x="690563" y="3799999"/>
+            <a:ext cx="11103610" cy="2270283"/>
+            <a:chOff x="690563" y="3799999"/>
+            <a:chExt cx="11103610" cy="2270283"/>
           </a:xfrm>
         </p:grpSpPr>
         <p:sp>
@@ -6166,8 +7683,384 @@
           </p:nvSpPr>
           <p:spPr>
             <a:xfrm>
-              <a:off x="757047" y="3799999"/>
-              <a:ext cx="5370191" cy="190690"/>
+              <a:off x="757238" y="3799999"/>
+              <a:ext cx="11036935" cy="1723390"/>
+            </a:xfrm>
+            <a:prstGeom prst="rect">
+              <a:avLst/>
+            </a:prstGeom>
+            <a:noFill/>
+            <a:ln>
+              <a:noFill/>
+            </a:ln>
+          </p:spPr>
+          <p:txBody>
+            <a:bodyPr wrap="square" lIns="0" tIns="0" rIns="0" bIns="0" anchor="t" anchorCtr="0">
+              <a:noAutofit/>
+            </a:bodyPr>
+            <a:lstStyle/>
+            <a:p>
+              <a:pPr algn="l"/>
+              <a:r>
+                <a:rPr lang="zh-CN" sz="980" b="1" dirty="0">
+                  <a:solidFill>
+                    <a:schemeClr val="accent1"/>
+                  </a:solidFill>
+                  <a:latin typeface="+mn-lt"/>
+                  <a:ea typeface="+mn-ea"/>
+                  <a:cs typeface="+mn-cs"/>
+                </a:rPr>
+                <a:t>R6 相对 R1 基准：</a:t>
+              </a:r>
+              <a:r>
+                <a:rPr lang="en-US" altLang="zh-CN" sz="980" dirty="0">
+                  <a:solidFill>
+                    <a:schemeClr val="dk1"/>
+                  </a:solidFill>
+                  <a:latin typeface="+mn-lt"/>
+                  <a:ea typeface="+mn-ea"/>
+                  <a:cs typeface="+mn-cs"/>
+                </a:rPr>
+                <a:t>KonIQ SRCC +0.109、MAE −0.154；SPAQ SRCC +0.026、MAE −0.266</a:t>
+              </a:r>
+              <a:endParaRPr lang="en-US" altLang="zh-CN" sz="980" dirty="0">
+                <a:solidFill>
+                  <a:schemeClr val="dk1"/>
+                </a:solidFill>
+                <a:latin typeface="+mn-lt"/>
+                <a:ea typeface="+mn-ea"/>
+                <a:cs typeface="+mn-cs"/>
+              </a:endParaRPr>
+            </a:p>
+            <a:p>
+              <a:pPr algn="l">
+                <a:lnSpc>
+                  <a:spcPct val="150000"/>
+                </a:lnSpc>
+              </a:pPr>
+              <a:r>
+                <a:rPr lang="en-US" altLang="zh-CN" sz="980" dirty="0">
+                  <a:solidFill>
+                    <a:schemeClr val="dk1"/>
+                  </a:solidFill>
+                  <a:latin typeface="+mn-lt"/>
+                  <a:ea typeface="+mn-ea"/>
+                  <a:cs typeface="+mn-cs"/>
+                </a:rPr>
+                <a:t>R1→R2（−0.019 / −0.006）： </a:t>
+              </a:r>
+              <a:r>
+                <a:rPr lang="zh-CN" altLang="en-US" sz="980" dirty="0">
+                  <a:solidFill>
+                    <a:schemeClr val="dk1"/>
+                  </a:solidFill>
+                  <a:latin typeface="+mn-lt"/>
+                  <a:ea typeface="+mn-ea"/>
+                  <a:cs typeface="+mn-cs"/>
+                </a:rPr>
+                <a:t>五专家等权融合反而稀释判断——"解释的多样性 ≠ 预测的多样性"，同源多视角七嘴八舌实为掺噪。</a:t>
+              </a:r>
+              <a:endParaRPr lang="zh-CN" altLang="en-US" sz="980" dirty="0">
+                <a:solidFill>
+                  <a:schemeClr val="dk1"/>
+                </a:solidFill>
+                <a:latin typeface="+mn-lt"/>
+                <a:ea typeface="+mn-ea"/>
+                <a:cs typeface="+mn-cs"/>
+              </a:endParaRPr>
+            </a:p>
+            <a:p>
+              <a:pPr algn="l">
+                <a:lnSpc>
+                  <a:spcPct val="150000"/>
+                </a:lnSpc>
+              </a:pPr>
+              <a:r>
+                <a:rPr lang="en-US" altLang="zh-CN" sz="980" dirty="0">
+                  <a:solidFill>
+                    <a:schemeClr val="dk1"/>
+                  </a:solidFill>
+                  <a:latin typeface="+mn-lt"/>
+                  <a:ea typeface="+mn-ea"/>
+                  <a:cs typeface="+mn-cs"/>
+                </a:rPr>
+                <a:t>R2→R2.5（+0.013 / +0.001）： </a:t>
+              </a:r>
+              <a:r>
+                <a:rPr lang="zh-CN" altLang="en-US" sz="980" dirty="0">
+                  <a:solidFill>
+                    <a:schemeClr val="dk1"/>
+                  </a:solidFill>
+                  <a:latin typeface="+mn-lt"/>
+                  <a:ea typeface="+mn-ea"/>
+                  <a:cs typeface="+mn-cs"/>
+                </a:rPr>
+                <a:t>动态分诊先判定主导问题再派专家——"选谁评"比"怎么平均"更关键。</a:t>
+              </a:r>
+              <a:endParaRPr lang="zh-CN" altLang="en-US" sz="980" dirty="0">
+                <a:solidFill>
+                  <a:schemeClr val="dk1"/>
+                </a:solidFill>
+                <a:latin typeface="+mn-lt"/>
+                <a:ea typeface="+mn-ea"/>
+                <a:cs typeface="+mn-cs"/>
+              </a:endParaRPr>
+            </a:p>
+            <a:p>
+              <a:pPr algn="l">
+                <a:lnSpc>
+                  <a:spcPct val="150000"/>
+                </a:lnSpc>
+              </a:pPr>
+              <a:r>
+                <a:rPr lang="en-US" altLang="zh-CN" sz="980" dirty="0">
+                  <a:solidFill>
+                    <a:schemeClr val="dk1"/>
+                  </a:solidFill>
+                  <a:latin typeface="+mn-lt"/>
+                  <a:ea typeface="+mn-ea"/>
+                  <a:cs typeface="+mn-cs"/>
+                </a:rPr>
+                <a:t>R2.5→R3（+0.001 / 0.000）： CKE </a:t>
+              </a:r>
+              <a:r>
+                <a:rPr lang="zh-CN" altLang="en-US" sz="980" dirty="0">
+                  <a:solidFill>
+                    <a:schemeClr val="dk1"/>
+                  </a:solidFill>
+                  <a:latin typeface="+mn-lt"/>
+                  <a:ea typeface="+mn-ea"/>
+                  <a:cs typeface="+mn-cs"/>
+                </a:rPr>
+                <a:t>规则库 9 条注入。内部指标全改善，外部 </a:t>
+              </a:r>
+              <a:r>
+                <a:rPr lang="en-US" altLang="zh-CN" sz="980" dirty="0">
+                  <a:solidFill>
+                    <a:schemeClr val="dk1"/>
+                  </a:solidFill>
+                  <a:latin typeface="+mn-lt"/>
+                  <a:ea typeface="+mn-ea"/>
+                  <a:cs typeface="+mn-cs"/>
+                </a:rPr>
+                <a:t>SRCC </a:t>
+              </a:r>
+              <a:r>
+                <a:rPr lang="zh-CN" altLang="en-US" sz="980" dirty="0">
+                  <a:solidFill>
+                    <a:schemeClr val="dk1"/>
+                  </a:solidFill>
+                  <a:latin typeface="+mn-lt"/>
+                  <a:ea typeface="+mn-ea"/>
+                  <a:cs typeface="+mn-cs"/>
+                </a:rPr>
+                <a:t>纹丝不动 —— 自洽 ≠ 对齐，催生锚相关性定律。</a:t>
+              </a:r>
+              <a:endParaRPr lang="zh-CN" altLang="en-US" sz="980" dirty="0">
+                <a:solidFill>
+                  <a:schemeClr val="dk1"/>
+                </a:solidFill>
+                <a:latin typeface="+mn-lt"/>
+                <a:ea typeface="+mn-ea"/>
+                <a:cs typeface="+mn-cs"/>
+              </a:endParaRPr>
+            </a:p>
+            <a:p>
+              <a:pPr algn="l">
+                <a:lnSpc>
+                  <a:spcPct val="150000"/>
+                </a:lnSpc>
+              </a:pPr>
+              <a:r>
+                <a:rPr lang="en-US" altLang="zh-CN" sz="980" dirty="0">
+                  <a:solidFill>
+                    <a:schemeClr val="dk1"/>
+                  </a:solidFill>
+                  <a:latin typeface="+mn-lt"/>
+                  <a:ea typeface="+mn-ea"/>
+                  <a:cs typeface="+mn-cs"/>
+                </a:rPr>
+                <a:t>R3→R6（+0.113 / +0.030）：</a:t>
+              </a:r>
+              <a:r>
+                <a:rPr lang="zh-CN" altLang="en-US" sz="980" dirty="0">
+                  <a:solidFill>
+                    <a:schemeClr val="dk1"/>
+                  </a:solidFill>
+                  <a:latin typeface="+mn-lt"/>
+                  <a:ea typeface="+mn-ea"/>
+                  <a:cs typeface="+mn-cs"/>
+                </a:rPr>
+                <a:t>全场最大一跳。 监督信号从合成失真排序换为大模型三万次两两比较共识（</a:t>
+              </a:r>
+              <a:r>
+                <a:rPr lang="en-US" altLang="zh-CN" sz="980" dirty="0">
+                  <a:solidFill>
+                    <a:schemeClr val="dk1"/>
+                  </a:solidFill>
+                  <a:latin typeface="+mn-lt"/>
+                  <a:ea typeface="+mn-ea"/>
+                  <a:cs typeface="+mn-cs"/>
+                </a:rPr>
+                <a:t>BT </a:t>
+              </a:r>
+              <a:r>
+                <a:rPr lang="zh-CN" altLang="en-US" sz="980" dirty="0">
+                  <a:solidFill>
+                    <a:schemeClr val="dk1"/>
+                  </a:solidFill>
+                  <a:latin typeface="+mn-lt"/>
+                  <a:ea typeface="+mn-ea"/>
+                  <a:cs typeface="+mn-cs"/>
+                </a:rPr>
+                <a:t>锦标赛），21 参数门控替代静态融合。同一机制不同信号——收益差一个量级。</a:t>
+              </a:r>
+              <a:endParaRPr lang="zh-CN" altLang="en-US" sz="980" dirty="0">
+                <a:solidFill>
+                  <a:schemeClr val="dk1"/>
+                </a:solidFill>
+                <a:latin typeface="+mn-lt"/>
+                <a:ea typeface="+mn-ea"/>
+                <a:cs typeface="+mn-cs"/>
+              </a:endParaRPr>
+            </a:p>
+            <a:p>
+              <a:pPr algn="l">
+                <a:lnSpc>
+                  <a:spcPct val="150000"/>
+                </a:lnSpc>
+              </a:pPr>
+              <a:r>
+                <a:rPr lang="zh-CN" altLang="en-US" sz="980" dirty="0">
+                  <a:solidFill>
+                    <a:schemeClr val="dk1"/>
+                  </a:solidFill>
+                  <a:latin typeface="+mn-lt"/>
+                  <a:ea typeface="+mn-ea"/>
+                  <a:cs typeface="+mn-cs"/>
+                </a:rPr>
+                <a:t>（中间臂 </a:t>
+              </a:r>
+              <a:r>
+                <a:rPr lang="en-US" altLang="zh-CN" sz="980" dirty="0">
+                  <a:solidFill>
+                    <a:schemeClr val="dk1"/>
+                  </a:solidFill>
+                  <a:latin typeface="+mn-lt"/>
+                  <a:ea typeface="+mn-ea"/>
+                  <a:cs typeface="+mn-cs"/>
+                </a:rPr>
+                <a:t>R4/R5 </a:t>
+              </a:r>
+              <a:r>
+                <a:rPr lang="zh-CN" altLang="en-US" sz="980" dirty="0">
+                  <a:solidFill>
+                    <a:schemeClr val="dk1"/>
+                  </a:solidFill>
+                  <a:latin typeface="+mn-lt"/>
+                  <a:ea typeface="+mn-ea"/>
+                  <a:cs typeface="+mn-cs"/>
+                </a:rPr>
+                <a:t>为验证性产物，已删除；其有效成分——</a:t>
+              </a:r>
+              <a:r>
+                <a:rPr lang="en-US" altLang="zh-CN" sz="980" dirty="0">
+                  <a:solidFill>
+                    <a:schemeClr val="dk1"/>
+                  </a:solidFill>
+                  <a:latin typeface="+mn-lt"/>
+                  <a:ea typeface="+mn-ea"/>
+                  <a:cs typeface="+mn-cs"/>
+                </a:rPr>
+                <a:t>BT </a:t>
+              </a:r>
+              <a:r>
+                <a:rPr lang="zh-CN" altLang="en-US" sz="980" dirty="0">
+                  <a:solidFill>
+                    <a:schemeClr val="dk1"/>
+                  </a:solidFill>
+                  <a:latin typeface="+mn-lt"/>
+                  <a:ea typeface="+mn-ea"/>
+                  <a:cs typeface="+mn-cs"/>
+                </a:rPr>
+                <a:t>监督路由与释义投票——已全数并入 </a:t>
+              </a:r>
+              <a:r>
+                <a:rPr lang="en-US" altLang="zh-CN" sz="980" dirty="0">
+                  <a:solidFill>
+                    <a:schemeClr val="dk1"/>
+                  </a:solidFill>
+                  <a:latin typeface="+mn-lt"/>
+                  <a:ea typeface="+mn-ea"/>
+                  <a:cs typeface="+mn-cs"/>
+                </a:rPr>
+                <a:t>R6。R4 </a:t>
+              </a:r>
+              <a:r>
+                <a:rPr lang="zh-CN" altLang="en-US" sz="980" dirty="0">
+                  <a:solidFill>
+                    <a:schemeClr val="dk1"/>
+                  </a:solidFill>
+                  <a:latin typeface="+mn-lt"/>
+                  <a:ea typeface="+mn-ea"/>
+                  <a:cs typeface="+mn-cs"/>
+                </a:rPr>
+                <a:t>对照实验最关键：换信号前同一代码仅 +0.007，换 </a:t>
+              </a:r>
+              <a:r>
+                <a:rPr lang="en-US" altLang="zh-CN" sz="980" dirty="0">
+                  <a:solidFill>
+                    <a:schemeClr val="dk1"/>
+                  </a:solidFill>
+                  <a:latin typeface="+mn-lt"/>
+                  <a:ea typeface="+mn-ea"/>
+                  <a:cs typeface="+mn-cs"/>
+                </a:rPr>
+                <a:t>BT </a:t>
+              </a:r>
+              <a:r>
+                <a:rPr lang="zh-CN" altLang="en-US" sz="980" dirty="0">
+                  <a:solidFill>
+                    <a:schemeClr val="dk1"/>
+                  </a:solidFill>
+                  <a:latin typeface="+mn-lt"/>
+                  <a:ea typeface="+mn-ea"/>
+                  <a:cs typeface="+mn-cs"/>
+                </a:rPr>
+                <a:t>排行榜后 +0.062，十倍差，"更接近真实目标"不是绝对意义上的接近，是相对于合成失真阶梯而言的——都是模型自己判断，但</a:t>
+              </a:r>
+              <a:r>
+                <a:rPr lang="zh-CN" altLang="en-US" sz="980" dirty="0">
+                  <a:solidFill>
+                    <a:schemeClr val="dk1"/>
+                  </a:solidFill>
+                  <a:latin typeface="+mn-lt"/>
+                  <a:ea typeface="+mn-ea"/>
+                  <a:cs typeface="+mn-cs"/>
+                </a:rPr>
+                <a:t>比较判断真实照片比判断人工失真更能反映质量感知能力。</a:t>
+              </a:r>
+              <a:endParaRPr lang="zh-CN" sz="980" dirty="0">
+                <a:solidFill>
+                  <a:schemeClr val="dk1"/>
+                </a:solidFill>
+                <a:latin typeface="+mn-lt"/>
+                <a:ea typeface="+mn-ea"/>
+                <a:cs typeface="+mn-cs"/>
+              </a:endParaRPr>
+            </a:p>
+          </p:txBody>
+        </p:sp>
+        <p:sp>
+          <p:nvSpPr>
+            <p:cNvPr id="49" name="TextBox 49"/>
+            <p:cNvSpPr txBox="1"/>
+            <p:nvPr/>
+          </p:nvSpPr>
+          <p:spPr>
+            <a:xfrm>
+              <a:off x="738632" y="5673884"/>
+              <a:ext cx="5965825" cy="150495"/>
             </a:xfrm>
             <a:prstGeom prst="rect">
               <a:avLst/>
@@ -6193,7 +8086,7 @@
                   <a:ea typeface="+mn-ea"/>
                   <a:cs typeface="+mn-cs"/>
                 </a:rPr>
-                <a:t>总提升</a:t>
+                <a:t>经验规则不具有普适性</a:t>
               </a:r>
               <a:r>
                 <a:rPr lang="zh-CN" sz="980" dirty="0">
@@ -6204,21 +8097,58 @@
                   <a:ea typeface="+mn-ea"/>
                   <a:cs typeface="+mn-cs"/>
                 </a:rPr>
-                <a:t>：KonIQ 排名准确率从 0.577 升到 0.734（+27%）｜SPAQ 从 0.881 升到 0.893</a:t>
-              </a:r>
+                <a:t>：</a:t>
+              </a:r>
+              <a:r>
+                <a:rPr lang="en-US" altLang="zh-CN" sz="980" dirty="0">
+                  <a:solidFill>
+                    <a:schemeClr val="dk1"/>
+                  </a:solidFill>
+                  <a:sym typeface="+mn-ea"/>
+                </a:rPr>
+                <a:t>CKE </a:t>
+              </a:r>
+              <a:r>
+                <a:rPr lang="zh-CN" altLang="en-US" sz="980" dirty="0">
+                  <a:solidFill>
+                    <a:schemeClr val="dk1"/>
+                  </a:solidFill>
+                  <a:sym typeface="+mn-ea"/>
+                </a:rPr>
+                <a:t>规则库零收益，</a:t>
+              </a:r>
+              <a:r>
+                <a:rPr lang="zh-CN" sz="980" dirty="0">
+                  <a:solidFill>
+                    <a:schemeClr val="dk1"/>
+                  </a:solidFill>
+                  <a:latin typeface="+mn-lt"/>
+                  <a:ea typeface="+mn-ea"/>
+                  <a:cs typeface="+mn-cs"/>
+                </a:rPr>
+                <a:t>让 AI 自己提炼"小抄"注入提示词，排名几乎没动（+0.001）。</a:t>
+              </a:r>
+              <a:endParaRPr lang="zh-CN" sz="980" dirty="0">
+                <a:solidFill>
+                  <a:schemeClr val="dk1"/>
+                </a:solidFill>
+                <a:latin typeface="+mn-lt"/>
+                <a:ea typeface="+mn-ea"/>
+                <a:cs typeface="+mn-cs"/>
+              </a:endParaRPr>
             </a:p>
           </p:txBody>
         </p:sp>
         <p:sp>
           <p:nvSpPr>
-            <p:cNvPr id="48" name="TextBox 48"/>
+            <p:cNvPr id="50" name="TextBox 50"/>
             <p:cNvSpPr txBox="1"/>
             <p:nvPr/>
           </p:nvSpPr>
           <p:spPr>
             <a:xfrm>
-              <a:off x="757047" y="4180999"/>
-              <a:ext cx="6876738" cy="190690"/>
+              <a:off x="690563" y="5894070"/>
+              <a:ext cx="4995748" cy="176212"/>
             </a:xfrm>
             <a:prstGeom prst="rect">
               <a:avLst/>
@@ -6236,108 +8166,6 @@
             <a:p>
               <a:pPr algn="l"/>
               <a:r>
-                <a:rPr lang="zh-CN" sz="980" b="1" dirty="0">
-                  <a:solidFill>
-                    <a:schemeClr val="accent1"/>
-                  </a:solidFill>
-                  <a:latin typeface="+mn-lt"/>
-                  <a:ea typeface="+mn-ea"/>
-                  <a:cs typeface="+mn-cs"/>
-                </a:rPr>
-                <a:t>最大一跳</a:t>
-              </a:r>
-              <a:r>
-                <a:rPr lang="zh-CN" sz="980" dirty="0">
-                  <a:solidFill>
-                    <a:schemeClr val="dk1"/>
-                  </a:solidFill>
-                  <a:latin typeface="+mn-lt"/>
-                  <a:ea typeface="+mn-ea"/>
-                  <a:cs typeface="+mn-cs"/>
-                </a:rPr>
-                <a:t>出现在第四行→第五行：监督信号从"人工合成失真"换成"大模型两两比较共识"——同一套代码收益差了近十倍</a:t>
-              </a:r>
-            </a:p>
-          </p:txBody>
-        </p:sp>
-        <p:sp>
-          <p:nvSpPr>
-            <p:cNvPr id="49" name="TextBox 49"/>
-            <p:cNvSpPr txBox="1"/>
-            <p:nvPr/>
-          </p:nvSpPr>
-          <p:spPr>
-            <a:xfrm>
-              <a:off x="757047" y="4514374"/>
-              <a:ext cx="7364745" cy="190690"/>
-            </a:xfrm>
-            <a:prstGeom prst="rect">
-              <a:avLst/>
-            </a:prstGeom>
-            <a:noFill/>
-            <a:ln>
-              <a:noFill/>
-            </a:ln>
-          </p:spPr>
-          <p:txBody>
-            <a:bodyPr wrap="none" lIns="0" tIns="0" rIns="0" bIns="0" anchor="t" anchorCtr="0">
-              <a:spAutoFit/>
-            </a:bodyPr>
-            <a:lstStyle/>
-            <a:p>
-              <a:pPr algn="l"/>
-              <a:r>
-                <a:rPr lang="zh-CN" sz="980" b="1" dirty="0">
-                  <a:solidFill>
-                    <a:schemeClr val="accent1"/>
-                  </a:solidFill>
-                  <a:latin typeface="+mn-lt"/>
-                  <a:ea typeface="+mn-ea"/>
-                  <a:cs typeface="+mn-cs"/>
-                </a:rPr>
-                <a:t>经验规则无用</a:t>
-              </a:r>
-              <a:r>
-                <a:rPr lang="zh-CN" sz="980" dirty="0">
-                  <a:solidFill>
-                    <a:schemeClr val="dk1"/>
-                  </a:solidFill>
-                  <a:latin typeface="+mn-lt"/>
-                  <a:ea typeface="+mn-ea"/>
-                  <a:cs typeface="+mn-cs"/>
-                </a:rPr>
-                <a:t>：让 AI 自己提炼"小抄"注入提示词，花 ¥69，排名几乎没动（+0.001）。这件事引出后面的锚相关性定律</a:t>
-              </a:r>
-            </a:p>
-          </p:txBody>
-        </p:sp>
-        <p:sp>
-          <p:nvSpPr>
-            <p:cNvPr id="50" name="TextBox 50"/>
-            <p:cNvSpPr txBox="1"/>
-            <p:nvPr/>
-          </p:nvSpPr>
-          <p:spPr>
-            <a:xfrm>
-              <a:off x="757238" y="4951095"/>
-              <a:ext cx="4995748" cy="176212"/>
-            </a:xfrm>
-            <a:prstGeom prst="rect">
-              <a:avLst/>
-            </a:prstGeom>
-            <a:noFill/>
-            <a:ln>
-              <a:noFill/>
-            </a:ln>
-          </p:spPr>
-          <p:txBody>
-            <a:bodyPr wrap="none" lIns="0" tIns="0" rIns="0" bIns="0" anchor="t" anchorCtr="0">
-              <a:spAutoFit/>
-            </a:bodyPr>
-            <a:lstStyle/>
-            <a:p>
-              <a:pPr algn="l"/>
-              <a:r>
                 <a:rPr lang="zh-CN" sz="900" dirty="0">
                   <a:solidFill>
                     <a:srgbClr val="757575"/>
@@ -6348,6 +8176,14 @@
                 </a:rPr>
                 <a:t>参考：同一家族 8B 模型在别人论文里的零样本得分是 0.729 — 我不用训练就到了 0.734</a:t>
               </a:r>
+              <a:endParaRPr lang="zh-CN" sz="900" dirty="0">
+                <a:solidFill>
+                  <a:srgbClr val="757575"/>
+                </a:solidFill>
+                <a:latin typeface="+mn-lt"/>
+                <a:ea typeface="+mn-ea"/>
+                <a:cs typeface="+mn-cs"/>
+              </a:endParaRPr>
             </a:p>
           </p:txBody>
         </p:sp>
@@ -6423,9 +8259,18 @@
   <p:clrMapOvr>
     <a:masterClrMapping/>
   </p:clrMapOvr>
-  <p:transition xmlns:p14="http://schemas.microsoft.com/office/powerpoint/2010/main" p14:dur="400">
-    <p:fade/>
-  </p:transition>
+  <mc:AlternateContent xmlns:mc="http://schemas.openxmlformats.org/markup-compatibility/2006">
+    <mc:Choice xmlns:p14="http://schemas.microsoft.com/office/powerpoint/2010/main" Requires="p14">
+      <p:transition p14:dur="400">
+        <p:fade/>
+      </p:transition>
+    </mc:Choice>
+    <mc:Fallback>
+      <p:transition>
+        <p:fade/>
+      </p:transition>
+    </mc:Fallback>
+  </mc:AlternateContent>
 </p:sld>
 </file>
 
@@ -6507,52 +8352,20 @@
                 <a:solidFill>
                   <a:srgbClr val="C3C2B7"/>
                 </a:solidFill>
-                <a:latin typeface="Arial"/>
-                <a:ea typeface="Arial"/>
-                <a:cs typeface="Arial"/>
+                <a:latin typeface="Arial" panose="020B0604020202020204"/>
+                <a:ea typeface="Arial" panose="020B0604020202020204"/>
+                <a:cs typeface="Arial" panose="020B0604020202020204"/>
               </a:rPr>
               <a:t>6 / 11</a:t>
             </a:r>
-          </a:p>
-        </p:txBody>
-      </p:sp>
-      <p:sp>
-        <p:nvSpPr>
-          <p:cNvPr id="4" name="TextBox 4"/>
-          <p:cNvSpPr txBox="1"/>
-          <p:nvPr/>
-        </p:nvSpPr>
-        <p:spPr>
-          <a:xfrm>
-            <a:off x="757238" y="6567488"/>
-            <a:ext cx="211455" cy="147638"/>
-          </a:xfrm>
-          <a:prstGeom prst="rect">
-            <a:avLst/>
-          </a:prstGeom>
-          <a:noFill/>
-          <a:ln>
-            <a:noFill/>
-          </a:ln>
-        </p:spPr>
-        <p:txBody>
-          <a:bodyPr wrap="none" lIns="0" tIns="0" rIns="0" bIns="0" anchor="t" anchorCtr="0">
-            <a:spAutoFit/>
-          </a:bodyPr>
-          <a:lstStyle/>
-          <a:p>
-            <a:pPr algn="l"/>
-            <a:r>
-              <a:rPr lang="zh-CN" sz="750" dirty="0">
-                <a:solidFill>
-                  <a:srgbClr val="A0A0A0"/>
-                </a:solidFill>
-                <a:latin typeface="+mn-lt"/>
-                <a:ea typeface="+mn-ea"/>
-                <a:cs typeface="+mn-cs"/>
-              </a:rPr>
-              <a:t>检验</a:t>
-            </a:r>
+            <a:endParaRPr lang="en-US" sz="750" dirty="0">
+              <a:solidFill>
+                <a:srgbClr val="C3C2B7"/>
+              </a:solidFill>
+              <a:latin typeface="Arial" panose="020B0604020202020204"/>
+              <a:ea typeface="Arial" panose="020B0604020202020204"/>
+              <a:cs typeface="Arial" panose="020B0604020202020204"/>
+            </a:endParaRPr>
           </a:p>
         </p:txBody>
       </p:sp>
@@ -6564,8 +8377,8 @@
         </p:nvSpPr>
         <p:spPr>
           <a:xfrm>
-            <a:off x="757238" y="823912"/>
-            <a:ext cx="2160080" cy="147638"/>
+            <a:off x="2271078" y="959167"/>
+            <a:ext cx="3302000" cy="215265"/>
           </a:xfrm>
           <a:prstGeom prst="rect">
             <a:avLst/>
@@ -6583,7 +8396,7 @@
           <a:p>
             <a:pPr algn="l"/>
             <a:r>
-              <a:rPr lang="zh-CN" sz="750" b="1" spc="225" dirty="0">
+              <a:rPr lang="zh-CN" sz="1400" b="1" spc="225" dirty="0">
                 <a:solidFill>
                   <a:schemeClr val="accent1"/>
                 </a:solidFill>
@@ -6593,6 +8406,14 @@
               </a:rPr>
               <a:t>分数靠谱吗？怎么证明不是碰运气？</a:t>
             </a:r>
+            <a:endParaRPr lang="zh-CN" sz="1400" b="1" spc="225" dirty="0">
+              <a:solidFill>
+                <a:schemeClr val="accent1"/>
+              </a:solidFill>
+              <a:latin typeface="+mn-lt"/>
+              <a:ea typeface="+mn-ea"/>
+              <a:cs typeface="+mn-cs"/>
+            </a:endParaRPr>
           </a:p>
         </p:txBody>
       </p:sp>
@@ -6605,7 +8426,7 @@
         <p:spPr>
           <a:xfrm>
             <a:off x="742950" y="361950"/>
-            <a:ext cx="1437475" cy="1733550"/>
+            <a:ext cx="1271270" cy="1384935"/>
           </a:xfrm>
           <a:prstGeom prst="rect">
             <a:avLst/>
@@ -6625,14 +8446,28 @@
             <a:r>
               <a:rPr lang="en-US" sz="9000" b="1" dirty="0">
                 <a:solidFill>
-                  <a:srgbClr val="F0F0ED"/>
-                </a:solidFill>
-                <a:latin typeface="Arial"/>
-                <a:ea typeface="Arial"/>
-                <a:cs typeface="Arial"/>
+                  <a:schemeClr val="accent1">
+                    <a:lumMod val="50000"/>
+                    <a:lumOff val="50000"/>
+                  </a:schemeClr>
+                </a:solidFill>
+                <a:latin typeface="Arial" panose="020B0604020202020204"/>
+                <a:ea typeface="Arial" panose="020B0604020202020204"/>
+                <a:cs typeface="Arial" panose="020B0604020202020204"/>
               </a:rPr>
               <a:t>05</a:t>
             </a:r>
+            <a:endParaRPr lang="en-US" sz="9000" b="1" dirty="0">
+              <a:solidFill>
+                <a:schemeClr val="accent1">
+                  <a:lumMod val="50000"/>
+                  <a:lumOff val="50000"/>
+                </a:schemeClr>
+              </a:solidFill>
+              <a:latin typeface="Arial" panose="020B0604020202020204"/>
+              <a:ea typeface="Arial" panose="020B0604020202020204"/>
+              <a:cs typeface="Arial" panose="020B0604020202020204"/>
+            </a:endParaRPr>
           </a:p>
         </p:txBody>
       </p:sp>
@@ -6645,7 +8480,7 @@
           <p:nvPr/>
         </p:nvPicPr>
         <p:blipFill>
-          <a:blip r:embed="rId2"/>
+          <a:blip r:embed="rId1"/>
           <a:stretch>
             <a:fillRect/>
           </a:stretch>
@@ -6669,7 +8504,7 @@
           <p:nvPr/>
         </p:nvPicPr>
         <p:blipFill>
-          <a:blip r:embed="rId3"/>
+          <a:blip r:embed="rId2"/>
           <a:stretch>
             <a:fillRect/>
           </a:stretch>
@@ -6746,6 +8581,14 @@
                 </a:rPr>
                 <a:t>最终模型打分（纵轴）vs 真人打分（横轴）。每一点是一张图。颜色越深 = 图越多。</a:t>
               </a:r>
+              <a:endParaRPr lang="zh-CN" sz="940" dirty="0">
+                <a:solidFill>
+                  <a:schemeClr val="dk1"/>
+                </a:solidFill>
+                <a:latin typeface="+mn-lt"/>
+                <a:ea typeface="+mn-ea"/>
+                <a:cs typeface="+mn-cs"/>
+              </a:endParaRPr>
             </a:p>
           </p:txBody>
         </p:sp>
@@ -6786,6 +8629,14 @@
                 </a:rPr>
                 <a:t>虚线是完全一致的位置。两张考卷的点都贴着虚线走——说明给的分数跟真人基本对应，没有系统性地"偏心"。</a:t>
               </a:r>
+              <a:endParaRPr lang="zh-CN" sz="940" dirty="0">
+                <a:solidFill>
+                  <a:schemeClr val="dk1"/>
+                </a:solidFill>
+                <a:latin typeface="+mn-lt"/>
+                <a:ea typeface="+mn-ea"/>
+                <a:cs typeface="+mn-cs"/>
+              </a:endParaRPr>
             </a:p>
           </p:txBody>
         </p:sp>
@@ -6837,6 +8688,14 @@
                 </a:rPr>
                 <a:t>最意外的发现。我用大模型（32B）训练的 21 个门控参数，原封不动放到小模型（8B）——</a:t>
               </a:r>
+              <a:endParaRPr lang="zh-CN" sz="940" dirty="0">
+                <a:solidFill>
+                  <a:schemeClr val="dk1"/>
+                </a:solidFill>
+                <a:latin typeface="+mn-lt"/>
+                <a:ea typeface="+mn-ea"/>
+                <a:cs typeface="+mn-cs"/>
+              </a:endParaRPr>
             </a:p>
           </p:txBody>
         </p:sp>
@@ -6877,6 +8736,14 @@
                 </a:rPr>
                 <a:t>零额外 API 调用，纯本地矩阵乘法。结果：小模型的排名准确率从 0.759 跳到 0.776，甚至超过了大模型自己。</a:t>
               </a:r>
+              <a:endParaRPr lang="zh-CN" sz="940" dirty="0">
+                <a:solidFill>
+                  <a:schemeClr val="dk1"/>
+                </a:solidFill>
+                <a:latin typeface="+mn-lt"/>
+                <a:ea typeface="+mn-ea"/>
+                <a:cs typeface="+mn-cs"/>
+              </a:endParaRPr>
             </a:p>
           </p:txBody>
         </p:sp>
@@ -6940,6 +8807,14 @@
               </a:rPr>
               <a:t>门控学到的不是某个特定模型的评分习惯，而是"什么样的图像特征该信哪个专家"——因此可以跨模型迁移。</a:t>
             </a:r>
+            <a:endParaRPr lang="zh-CN" sz="980" b="1" dirty="0">
+              <a:solidFill>
+                <a:schemeClr val="accent2"/>
+              </a:solidFill>
+              <a:latin typeface="+mn-lt"/>
+              <a:ea typeface="+mn-ea"/>
+              <a:cs typeface="+mn-cs"/>
+            </a:endParaRPr>
           </a:p>
         </p:txBody>
       </p:sp>
@@ -6948,9 +8823,18 @@
   <p:clrMapOvr>
     <a:masterClrMapping/>
   </p:clrMapOvr>
-  <p:transition xmlns:p14="http://schemas.microsoft.com/office/powerpoint/2010/main" p14:dur="400">
-    <p:fade/>
-  </p:transition>
+  <mc:AlternateContent xmlns:mc="http://schemas.openxmlformats.org/markup-compatibility/2006">
+    <mc:Choice xmlns:p14="http://schemas.microsoft.com/office/powerpoint/2010/main" Requires="p14">
+      <p:transition p14:dur="400">
+        <p:fade/>
+      </p:transition>
+    </mc:Choice>
+    <mc:Fallback>
+      <p:transition>
+        <p:fade/>
+      </p:transition>
+    </mc:Fallback>
+  </mc:AlternateContent>
 </p:sld>
 </file>
 
@@ -7032,12 +8916,20 @@
                 <a:solidFill>
                   <a:srgbClr val="C3C2B7"/>
                 </a:solidFill>
-                <a:latin typeface="Arial"/>
-                <a:ea typeface="Arial"/>
-                <a:cs typeface="Arial"/>
+                <a:latin typeface="Arial" panose="020B0604020202020204"/>
+                <a:ea typeface="Arial" panose="020B0604020202020204"/>
+                <a:cs typeface="Arial" panose="020B0604020202020204"/>
               </a:rPr>
               <a:t>7 / 11</a:t>
             </a:r>
+            <a:endParaRPr lang="en-US" sz="750" dirty="0">
+              <a:solidFill>
+                <a:srgbClr val="C3C2B7"/>
+              </a:solidFill>
+              <a:latin typeface="Arial" panose="020B0604020202020204"/>
+              <a:ea typeface="Arial" panose="020B0604020202020204"/>
+              <a:cs typeface="Arial" panose="020B0604020202020204"/>
+            </a:endParaRPr>
           </a:p>
         </p:txBody>
       </p:sp>
@@ -7078,6 +8970,14 @@
               </a:rPr>
               <a:t>发现</a:t>
             </a:r>
+            <a:endParaRPr lang="zh-CN" sz="750" dirty="0">
+              <a:solidFill>
+                <a:srgbClr val="A0A0A0"/>
+              </a:solidFill>
+              <a:latin typeface="+mn-lt"/>
+              <a:ea typeface="+mn-ea"/>
+              <a:cs typeface="+mn-cs"/>
+            </a:endParaRPr>
           </a:p>
         </p:txBody>
       </p:sp>
@@ -7089,8 +8989,8 @@
         </p:nvSpPr>
         <p:spPr>
           <a:xfrm>
-            <a:off x="757238" y="823912"/>
-            <a:ext cx="933355" cy="147638"/>
+            <a:off x="2204403" y="916622"/>
+            <a:ext cx="1444625" cy="215265"/>
           </a:xfrm>
           <a:prstGeom prst="rect">
             <a:avLst/>
@@ -7108,7 +9008,7 @@
           <a:p>
             <a:pPr algn="l"/>
             <a:r>
-              <a:rPr lang="zh-CN" sz="750" b="1" spc="225" dirty="0">
+              <a:rPr lang="zh-CN" sz="1400" b="1" spc="225" dirty="0">
                 <a:solidFill>
                   <a:schemeClr val="accent1"/>
                 </a:solidFill>
@@ -7118,6 +9018,14 @@
               </a:rPr>
               <a:t>最反直觉的发现</a:t>
             </a:r>
+            <a:endParaRPr lang="zh-CN" sz="1400" b="1" spc="225" dirty="0">
+              <a:solidFill>
+                <a:schemeClr val="accent1"/>
+              </a:solidFill>
+              <a:latin typeface="+mn-lt"/>
+              <a:ea typeface="+mn-ea"/>
+              <a:cs typeface="+mn-cs"/>
+            </a:endParaRPr>
           </a:p>
         </p:txBody>
       </p:sp>
@@ -7129,8 +9037,8 @@
         </p:nvSpPr>
         <p:spPr>
           <a:xfrm>
-            <a:off x="742950" y="361950"/>
-            <a:ext cx="1437475" cy="1733550"/>
+            <a:off x="679450" y="396240"/>
+            <a:ext cx="1271270" cy="1384935"/>
           </a:xfrm>
           <a:prstGeom prst="rect">
             <a:avLst/>
@@ -7150,14 +9058,28 @@
             <a:r>
               <a:rPr lang="en-US" sz="9000" b="1" dirty="0">
                 <a:solidFill>
-                  <a:srgbClr val="F0F0ED"/>
-                </a:solidFill>
-                <a:latin typeface="Arial"/>
-                <a:ea typeface="Arial"/>
-                <a:cs typeface="Arial"/>
+                  <a:schemeClr val="accent1">
+                    <a:lumMod val="50000"/>
+                    <a:lumOff val="50000"/>
+                  </a:schemeClr>
+                </a:solidFill>
+                <a:latin typeface="Arial" panose="020B0604020202020204"/>
+                <a:ea typeface="Arial" panose="020B0604020202020204"/>
+                <a:cs typeface="Arial" panose="020B0604020202020204"/>
               </a:rPr>
               <a:t>06</a:t>
             </a:r>
+            <a:endParaRPr lang="en-US" sz="9000" b="1" dirty="0">
+              <a:solidFill>
+                <a:schemeClr val="accent1">
+                  <a:lumMod val="50000"/>
+                  <a:lumOff val="50000"/>
+                </a:schemeClr>
+              </a:solidFill>
+              <a:latin typeface="Arial" panose="020B0604020202020204"/>
+              <a:ea typeface="Arial" panose="020B0604020202020204"/>
+              <a:cs typeface="Arial" panose="020B0604020202020204"/>
+            </a:endParaRPr>
           </a:p>
         </p:txBody>
       </p:sp>
@@ -7198,6 +9120,14 @@
               </a:rPr>
               <a:t>给模型的提示词写得越详细，分数偏差反而越大。</a:t>
             </a:r>
+            <a:endParaRPr lang="zh-CN" sz="1500" b="1" dirty="0">
+              <a:solidFill>
+                <a:schemeClr val="accent1"/>
+              </a:solidFill>
+              <a:latin typeface="+mn-lt"/>
+              <a:ea typeface="+mn-ea"/>
+              <a:cs typeface="+mn-cs"/>
+            </a:endParaRPr>
           </a:p>
         </p:txBody>
       </p:sp>
@@ -7260,6 +9190,14 @@
               </a:rPr>
               <a:t>这跟直觉完全相反——通常会认为"指导得越具体，模型答得越准"。</a:t>
             </a:r>
+            <a:endParaRPr lang="zh-CN" sz="980" dirty="0">
+              <a:solidFill>
+                <a:srgbClr val="757575"/>
+              </a:solidFill>
+              <a:latin typeface="+mn-lt"/>
+              <a:ea typeface="+mn-ea"/>
+              <a:cs typeface="+mn-cs"/>
+            </a:endParaRPr>
           </a:p>
         </p:txBody>
       </p:sp>
@@ -7272,9 +9210,9 @@
         <p:grpSpPr>
           <a:xfrm>
             <a:off x="757238" y="2613422"/>
-            <a:ext cx="7070613" cy="2780585"/>
+            <a:ext cx="7070613" cy="2742803"/>
             <a:chOff x="757238" y="2613422"/>
-            <a:chExt cx="7070613" cy="2780585"/>
+            <a:chExt cx="7070613" cy="2742803"/>
           </a:xfrm>
         </p:grpSpPr>
         <p:sp>
@@ -7314,6 +9252,14 @@
                 </a:rPr>
                 <a:t>一个消融实验揭示了原因：</a:t>
               </a:r>
+              <a:endParaRPr lang="zh-CN" sz="940" b="1" dirty="0">
+                <a:solidFill>
+                  <a:schemeClr val="accent1"/>
+                </a:solidFill>
+                <a:latin typeface="+mn-lt"/>
+                <a:ea typeface="+mn-ea"/>
+                <a:cs typeface="+mn-cs"/>
+              </a:endParaRPr>
             </a:p>
           </p:txBody>
         </p:sp>
@@ -7354,6 +9300,14 @@
                 </a:rPr>
                 <a:t>我把提示词一层一层加回去——先加"你是一个评估专家"的人设，再加"1=差 5=好"的锚点带，再加具体的检查清单和评估程序。</a:t>
               </a:r>
+              <a:endParaRPr lang="zh-CN" sz="940" dirty="0">
+                <a:solidFill>
+                  <a:schemeClr val="dk1"/>
+                </a:solidFill>
+                <a:latin typeface="+mn-lt"/>
+                <a:ea typeface="+mn-ea"/>
+                <a:cs typeface="+mn-cs"/>
+              </a:endParaRPr>
             </a:p>
           </p:txBody>
         </p:sp>
@@ -7416,6 +9370,14 @@
                 </a:rPr>
                 <a:t>。</a:t>
               </a:r>
+              <a:endParaRPr lang="zh-CN" sz="940" dirty="0">
+                <a:solidFill>
+                  <a:schemeClr val="dk1"/>
+                </a:solidFill>
+                <a:latin typeface="+mn-lt"/>
+                <a:ea typeface="+mn-ea"/>
+                <a:cs typeface="+mn-cs"/>
+              </a:endParaRPr>
             </a:p>
           </p:txBody>
         </p:sp>
@@ -7456,6 +9418,14 @@
                 </a:rPr>
                 <a:t>分析：</a:t>
               </a:r>
+              <a:endParaRPr lang="zh-CN" sz="940" b="1" dirty="0">
+                <a:solidFill>
+                  <a:schemeClr val="accent1"/>
+                </a:solidFill>
+                <a:latin typeface="+mn-lt"/>
+                <a:ea typeface="+mn-ea"/>
+                <a:cs typeface="+mn-cs"/>
+              </a:endParaRPr>
             </a:p>
           </p:txBody>
         </p:sp>
@@ -7496,6 +9466,14 @@
                 </a:rPr>
                 <a:t>大模型对哪张比哪张好的判断（排名）本来就挺准。加了锚点带后，排名知识被注入——保住了。</a:t>
               </a:r>
+              <a:endParaRPr lang="zh-CN" sz="940" dirty="0">
+                <a:solidFill>
+                  <a:schemeClr val="dk1"/>
+                </a:solidFill>
+                <a:latin typeface="+mn-lt"/>
+                <a:ea typeface="+mn-ea"/>
+                <a:cs typeface="+mn-cs"/>
+              </a:endParaRPr>
             </a:p>
           </p:txBody>
         </p:sp>
@@ -7536,6 +9514,14 @@
                 </a:rPr>
                 <a:t>但锚点带同时把人造的分数区间（"Excellent 就是 4.3-5.0"）塞给了模型，</a:t>
               </a:r>
+              <a:endParaRPr lang="zh-CN" sz="940" dirty="0">
+                <a:solidFill>
+                  <a:schemeClr val="dk1"/>
+                </a:solidFill>
+                <a:latin typeface="+mn-lt"/>
+                <a:ea typeface="+mn-ea"/>
+                <a:cs typeface="+mn-cs"/>
+              </a:endParaRPr>
             </a:p>
           </p:txBody>
         </p:sp>
@@ -7576,6 +9562,14 @@
                 </a:rPr>
                 <a:t>模型本来的"这张图在人群里大概值几分"的直觉被覆盖了——零点偏了。</a:t>
               </a:r>
+              <a:endParaRPr lang="zh-CN" sz="940" dirty="0">
+                <a:solidFill>
+                  <a:schemeClr val="dk1"/>
+                </a:solidFill>
+                <a:latin typeface="+mn-lt"/>
+                <a:ea typeface="+mn-ea"/>
+                <a:cs typeface="+mn-cs"/>
+              </a:endParaRPr>
             </a:p>
           </p:txBody>
         </p:sp>
@@ -7616,6 +9610,14 @@
                 </a:rPr>
                 <a:t>更重要的：这不是 bug。排序和绝对校准是两种独立的能力，需要两个独立通道来完成。</a:t>
               </a:r>
+              <a:endParaRPr lang="zh-CN" sz="940" b="1" dirty="0">
+                <a:solidFill>
+                  <a:schemeClr val="accent2"/>
+                </a:solidFill>
+                <a:latin typeface="+mn-lt"/>
+                <a:ea typeface="+mn-ea"/>
+                <a:cs typeface="+mn-cs"/>
+              </a:endParaRPr>
             </a:p>
           </p:txBody>
         </p:sp>
@@ -7628,7 +9630,7 @@
           <p:spPr>
             <a:xfrm>
               <a:off x="757238" y="5217795"/>
-              <a:ext cx="3777539" cy="176212"/>
+              <a:ext cx="3314700" cy="138430"/>
             </a:xfrm>
             <a:prstGeom prst="rect">
               <a:avLst/>
@@ -7654,8 +9656,27 @@
                   <a:ea typeface="+mn-ea"/>
                   <a:cs typeface="+mn-cs"/>
                 </a:rPr>
-                <a:t>所以我在最终方案里让锚点负责排序、裸问投票负责零点——各干各的。</a:t>
-              </a:r>
+                <a:t>所以我在最终方案里让锚点负责排序，裸问投票负责模型直觉</a:t>
+              </a:r>
+              <a:r>
+                <a:rPr lang="zh-CN" sz="900" dirty="0">
+                  <a:solidFill>
+                    <a:srgbClr val="757575"/>
+                  </a:solidFill>
+                  <a:latin typeface="+mn-lt"/>
+                  <a:ea typeface="+mn-ea"/>
+                  <a:cs typeface="+mn-cs"/>
+                </a:rPr>
+                <a:t>校准</a:t>
+              </a:r>
+              <a:endParaRPr lang="zh-CN" sz="900" dirty="0">
+                <a:solidFill>
+                  <a:srgbClr val="757575"/>
+                </a:solidFill>
+                <a:latin typeface="+mn-lt"/>
+                <a:ea typeface="+mn-ea"/>
+                <a:cs typeface="+mn-cs"/>
+              </a:endParaRPr>
             </a:p>
           </p:txBody>
         </p:sp>
@@ -7669,7 +9690,7 @@
           <p:nvPr/>
         </p:nvPicPr>
         <p:blipFill>
-          <a:blip r:embed="rId2"/>
+          <a:blip r:embed="rId1"/>
           <a:stretch>
             <a:fillRect/>
           </a:stretch>
@@ -7693,7 +9714,7 @@
           <p:nvPr/>
         </p:nvPicPr>
         <p:blipFill>
-          <a:blip r:embed="rId3"/>
+          <a:blip r:embed="rId2"/>
           <a:stretch>
             <a:fillRect/>
           </a:stretch>
@@ -7745,6 +9766,14 @@
               </a:rPr>
               <a:t>左：SRCC 持平、MAE 恶化　右：锚点把输出分布重塑成尖峰</a:t>
             </a:r>
+            <a:endParaRPr lang="zh-CN" sz="680" dirty="0">
+              <a:solidFill>
+                <a:srgbClr val="A0A0A0"/>
+              </a:solidFill>
+              <a:latin typeface="+mn-lt"/>
+              <a:ea typeface="+mn-ea"/>
+              <a:cs typeface="+mn-cs"/>
+            </a:endParaRPr>
           </a:p>
         </p:txBody>
       </p:sp>
@@ -7753,9 +9782,18 @@
   <p:clrMapOvr>
     <a:masterClrMapping/>
   </p:clrMapOvr>
-  <p:transition xmlns:p14="http://schemas.microsoft.com/office/powerpoint/2010/main" p14:dur="400">
-    <p:fade/>
-  </p:transition>
+  <mc:AlternateContent xmlns:mc="http://schemas.openxmlformats.org/markup-compatibility/2006">
+    <mc:Choice xmlns:p14="http://schemas.microsoft.com/office/powerpoint/2010/main" Requires="p14">
+      <p:transition p14:dur="400">
+        <p:fade/>
+      </p:transition>
+    </mc:Choice>
+    <mc:Fallback>
+      <p:transition>
+        <p:fade/>
+      </p:transition>
+    </mc:Fallback>
+  </mc:AlternateContent>
 </p:sld>
 </file>
 
@@ -7837,12 +9875,20 @@
                 <a:solidFill>
                   <a:srgbClr val="C3C2B7"/>
                 </a:solidFill>
-                <a:latin typeface="Arial"/>
-                <a:ea typeface="Arial"/>
-                <a:cs typeface="Arial"/>
+                <a:latin typeface="Arial" panose="020B0604020202020204"/>
+                <a:ea typeface="Arial" panose="020B0604020202020204"/>
+                <a:cs typeface="Arial" panose="020B0604020202020204"/>
               </a:rPr>
               <a:t>8 / 11</a:t>
             </a:r>
+            <a:endParaRPr lang="en-US" sz="750" dirty="0">
+              <a:solidFill>
+                <a:srgbClr val="C3C2B7"/>
+              </a:solidFill>
+              <a:latin typeface="Arial" panose="020B0604020202020204"/>
+              <a:ea typeface="Arial" panose="020B0604020202020204"/>
+              <a:cs typeface="Arial" panose="020B0604020202020204"/>
+            </a:endParaRPr>
           </a:p>
         </p:txBody>
       </p:sp>
@@ -7883,6 +9929,14 @@
               </a:rPr>
               <a:t>发现</a:t>
             </a:r>
+            <a:endParaRPr lang="zh-CN" sz="750" dirty="0">
+              <a:solidFill>
+                <a:srgbClr val="A0A0A0"/>
+              </a:solidFill>
+              <a:latin typeface="+mn-lt"/>
+              <a:ea typeface="+mn-ea"/>
+              <a:cs typeface="+mn-cs"/>
+            </a:endParaRPr>
           </a:p>
         </p:txBody>
       </p:sp>
@@ -7895,7 +9949,7 @@
         <p:spPr>
           <a:xfrm>
             <a:off x="757238" y="823912"/>
-            <a:ext cx="1069658" cy="147638"/>
+            <a:ext cx="1651000" cy="215265"/>
           </a:xfrm>
           <a:prstGeom prst="rect">
             <a:avLst/>
@@ -7913,7 +9967,7 @@
           <a:p>
             <a:pPr algn="l"/>
             <a:r>
-              <a:rPr lang="zh-CN" sz="750" b="1" spc="225" dirty="0">
+              <a:rPr lang="zh-CN" sz="1400" b="1" spc="225" dirty="0">
                 <a:solidFill>
                   <a:schemeClr val="accent1"/>
                 </a:solidFill>
@@ -7923,6 +9977,14 @@
               </a:rPr>
               <a:t>另外三个关键发现</a:t>
             </a:r>
+            <a:endParaRPr lang="zh-CN" sz="1400" b="1" spc="225" dirty="0">
+              <a:solidFill>
+                <a:schemeClr val="accent1"/>
+              </a:solidFill>
+              <a:latin typeface="+mn-lt"/>
+              <a:ea typeface="+mn-ea"/>
+              <a:cs typeface="+mn-cs"/>
+            </a:endParaRPr>
           </a:p>
         </p:txBody>
       </p:sp>
@@ -7985,6 +10047,14 @@
               </a:rPr>
               <a:t>锚点扮演双重角色</a:t>
             </a:r>
+            <a:endParaRPr lang="zh-CN" sz="1200" b="1" dirty="0">
+              <a:solidFill>
+                <a:srgbClr val="FFFFFF"/>
+              </a:solidFill>
+              <a:latin typeface="+mn-lt"/>
+              <a:ea typeface="+mn-ea"/>
+              <a:cs typeface="+mn-cs"/>
+            </a:endParaRPr>
           </a:p>
         </p:txBody>
       </p:sp>
@@ -7997,9 +10067,9 @@
         <p:grpSpPr>
           <a:xfrm>
             <a:off x="947738" y="1998345"/>
-            <a:ext cx="7588072" cy="1938337"/>
+            <a:ext cx="3433445" cy="1938337"/>
             <a:chOff x="947738" y="1998345"/>
-            <a:chExt cx="7588072" cy="1938337"/>
+            <a:chExt cx="3433445" cy="1938337"/>
           </a:xfrm>
         </p:grpSpPr>
         <p:sp>
@@ -8039,6 +10109,14 @@
                 </a:rPr>
                 <a:t>同一组件，在不同地方作用完全相反。</a:t>
               </a:r>
+              <a:endParaRPr lang="zh-CN" sz="900" dirty="0">
+                <a:solidFill>
+                  <a:schemeClr val="dk1"/>
+                </a:solidFill>
+                <a:latin typeface="+mn-lt"/>
+                <a:ea typeface="+mn-ea"/>
+                <a:cs typeface="+mn-cs"/>
+              </a:endParaRPr>
             </a:p>
           </p:txBody>
         </p:sp>
@@ -8079,6 +10157,14 @@
                 </a:rPr>
                 <a:t>单独使用时：有害</a:t>
               </a:r>
+              <a:endParaRPr lang="zh-CN" sz="900" b="1" dirty="0">
+                <a:solidFill>
+                  <a:schemeClr val="accent1"/>
+                </a:solidFill>
+                <a:latin typeface="+mn-lt"/>
+                <a:ea typeface="+mn-ea"/>
+                <a:cs typeface="+mn-cs"/>
+              </a:endParaRPr>
             </a:p>
           </p:txBody>
         </p:sp>
@@ -8119,6 +10205,14 @@
                 </a:rPr>
                 <a:t>一支笔打分，带上锚点后偏差反而从 0.463 升到 0.544。</a:t>
               </a:r>
+              <a:endParaRPr lang="zh-CN" sz="900" dirty="0">
+                <a:solidFill>
+                  <a:schemeClr val="dk1"/>
+                </a:solidFill>
+                <a:latin typeface="+mn-lt"/>
+                <a:ea typeface="+mn-ea"/>
+                <a:cs typeface="+mn-cs"/>
+              </a:endParaRPr>
             </a:p>
           </p:txBody>
         </p:sp>
@@ -8159,6 +10253,14 @@
                 </a:rPr>
                 <a:t>多专家协作时：必需品</a:t>
               </a:r>
+              <a:endParaRPr lang="zh-CN" sz="900" b="1" dirty="0">
+                <a:solidFill>
+                  <a:schemeClr val="accent1"/>
+                </a:solidFill>
+                <a:latin typeface="+mn-lt"/>
+                <a:ea typeface="+mn-ea"/>
+                <a:cs typeface="+mn-cs"/>
+              </a:endParaRPr>
             </a:p>
           </p:txBody>
         </p:sp>
@@ -8171,7 +10273,7 @@
           <p:spPr>
             <a:xfrm>
               <a:off x="947738" y="3293745"/>
-              <a:ext cx="7588072" cy="176212"/>
+              <a:ext cx="3433445" cy="415290"/>
             </a:xfrm>
             <a:prstGeom prst="rect">
               <a:avLst/>
@@ -8182,7 +10284,7 @@
             </a:ln>
           </p:spPr>
           <p:txBody>
-            <a:bodyPr wrap="none" lIns="0" tIns="0" rIns="0" bIns="0" anchor="t" anchorCtr="0">
+            <a:bodyPr wrap="square" lIns="0" tIns="0" rIns="0" bIns="0" anchor="t" anchorCtr="0">
               <a:spAutoFit/>
             </a:bodyPr>
             <a:lstStyle/>
@@ -8199,6 +10301,14 @@
                 </a:rPr>
                 <a:t>去掉锚点后，三支笔的刻度不统一——技术专家天然比整体专家严两个等级。融合器分不清图间差异，SPAQ 偏差从 0.945 崩到 1.208。</a:t>
               </a:r>
+              <a:endParaRPr lang="zh-CN" sz="900" dirty="0">
+                <a:solidFill>
+                  <a:schemeClr val="dk1"/>
+                </a:solidFill>
+                <a:latin typeface="+mn-lt"/>
+                <a:ea typeface="+mn-ea"/>
+                <a:cs typeface="+mn-cs"/>
+              </a:endParaRPr>
             </a:p>
           </p:txBody>
         </p:sp>
@@ -8239,6 +10349,14 @@
                 </a:rPr>
                 <a:t>锚点是专家间的"公共度量衡"，没有它各说各话。</a:t>
               </a:r>
+              <a:endParaRPr lang="zh-CN" sz="900" dirty="0">
+                <a:solidFill>
+                  <a:srgbClr val="757575"/>
+                </a:solidFill>
+                <a:latin typeface="+mn-lt"/>
+                <a:ea typeface="+mn-ea"/>
+                <a:cs typeface="+mn-cs"/>
+              </a:endParaRPr>
             </a:p>
           </p:txBody>
         </p:sp>
@@ -8302,6 +10420,14 @@
               </a:rPr>
               <a:t>自进化规则库完全没用</a:t>
             </a:r>
+            <a:endParaRPr lang="zh-CN" sz="1200" b="1" dirty="0">
+              <a:solidFill>
+                <a:srgbClr val="FFFFFF"/>
+              </a:solidFill>
+              <a:latin typeface="+mn-lt"/>
+              <a:ea typeface="+mn-ea"/>
+              <a:cs typeface="+mn-cs"/>
+            </a:endParaRPr>
           </a:p>
         </p:txBody>
       </p:sp>
@@ -8313,10 +10439,10 @@
         </p:nvGrpSpPr>
         <p:grpSpPr>
           <a:xfrm>
-            <a:off x="4567238" y="1998345"/>
-            <a:ext cx="5582793" cy="1700212"/>
+            <a:off x="4567555" y="1998345"/>
+            <a:ext cx="3438525" cy="1800860"/>
             <a:chOff x="4567238" y="1998345"/>
-            <a:chExt cx="5582793" cy="1700212"/>
+            <a:chExt cx="4785630" cy="1800861"/>
           </a:xfrm>
         </p:grpSpPr>
         <p:sp>
@@ -8328,7 +10454,7 @@
           <p:spPr>
             <a:xfrm>
               <a:off x="4567238" y="1998345"/>
-              <a:ext cx="3946017" cy="176212"/>
+              <a:ext cx="3946017" cy="276860"/>
             </a:xfrm>
             <a:prstGeom prst="rect">
               <a:avLst/>
@@ -8339,7 +10465,7 @@
             </a:ln>
           </p:spPr>
           <p:txBody>
-            <a:bodyPr wrap="none" lIns="0" tIns="0" rIns="0" bIns="0" anchor="t" anchorCtr="0">
+            <a:bodyPr wrap="square" lIns="0" tIns="0" rIns="0" bIns="0" anchor="t" anchorCtr="0">
               <a:spAutoFit/>
             </a:bodyPr>
             <a:lstStyle/>
@@ -8356,6 +10482,14 @@
                 </a:rPr>
                 <a:t>设计思路：让 AI 发现自己的打分矛盾 → 提炼成规则 → 带着规则再打。</a:t>
               </a:r>
+              <a:endParaRPr lang="zh-CN" sz="900" dirty="0">
+                <a:solidFill>
+                  <a:schemeClr val="dk1"/>
+                </a:solidFill>
+                <a:latin typeface="+mn-lt"/>
+                <a:ea typeface="+mn-ea"/>
+                <a:cs typeface="+mn-cs"/>
+              </a:endParaRPr>
             </a:p>
           </p:txBody>
         </p:sp>
@@ -8368,7 +10502,7 @@
           <p:spPr>
             <a:xfrm>
               <a:off x="4567238" y="2379345"/>
-              <a:ext cx="4504487" cy="176212"/>
+              <a:ext cx="4504487" cy="276860"/>
             </a:xfrm>
             <a:prstGeom prst="rect">
               <a:avLst/>
@@ -8379,7 +10513,7 @@
             </a:ln>
           </p:spPr>
           <p:txBody>
-            <a:bodyPr wrap="none" lIns="0" tIns="0" rIns="0" bIns="0" anchor="t" anchorCtr="0">
+            <a:bodyPr wrap="square" lIns="0" tIns="0" rIns="0" bIns="0" anchor="t" anchorCtr="0">
               <a:spAutoFit/>
             </a:bodyPr>
             <a:lstStyle/>
@@ -8396,6 +10530,14 @@
                 </a:rPr>
                 <a:t>实际情况：内部指标全面改善——两种评分路线更一致了、对合成失真的排序更准了。</a:t>
               </a:r>
+              <a:endParaRPr lang="zh-CN" sz="900" dirty="0">
+                <a:solidFill>
+                  <a:schemeClr val="dk1"/>
+                </a:solidFill>
+                <a:latin typeface="+mn-lt"/>
+                <a:ea typeface="+mn-ea"/>
+                <a:cs typeface="+mn-cs"/>
+              </a:endParaRPr>
             </a:p>
           </p:txBody>
         </p:sp>
@@ -8408,7 +10550,7 @@
           <p:spPr>
             <a:xfrm>
               <a:off x="4567238" y="2760345"/>
-              <a:ext cx="2691460" cy="176212"/>
+              <a:ext cx="2691088" cy="138430"/>
             </a:xfrm>
             <a:prstGeom prst="rect">
               <a:avLst/>
@@ -8419,7 +10561,7 @@
             </a:ln>
           </p:spPr>
           <p:txBody>
-            <a:bodyPr wrap="none" lIns="0" tIns="0" rIns="0" bIns="0" anchor="t" anchorCtr="0">
+            <a:bodyPr wrap="square" lIns="0" tIns="0" rIns="0" bIns="0" anchor="t" anchorCtr="0">
               <a:spAutoFit/>
             </a:bodyPr>
             <a:lstStyle/>
@@ -8434,8 +10576,16 @@
                   <a:ea typeface="+mn-ea"/>
                   <a:cs typeface="+mn-cs"/>
                 </a:rPr>
-                <a:t>外部评分：SRCC 只多 0.001 — 花 ¥69 换来的。</a:t>
-              </a:r>
+                <a:t>外部评分：SRCC 只多 0.001。</a:t>
+              </a:r>
+              <a:endParaRPr lang="zh-CN" sz="900" dirty="0">
+                <a:solidFill>
+                  <a:schemeClr val="dk1"/>
+                </a:solidFill>
+                <a:latin typeface="+mn-lt"/>
+                <a:ea typeface="+mn-ea"/>
+                <a:cs typeface="+mn-cs"/>
+              </a:endParaRPr>
             </a:p>
           </p:txBody>
         </p:sp>
@@ -8448,7 +10598,7 @@
           <p:spPr>
             <a:xfrm>
               <a:off x="4567238" y="3188970"/>
-              <a:ext cx="1173550" cy="176212"/>
+              <a:ext cx="1173550" cy="276860"/>
             </a:xfrm>
             <a:prstGeom prst="rect">
               <a:avLst/>
@@ -8459,7 +10609,7 @@
             </a:ln>
           </p:spPr>
           <p:txBody>
-            <a:bodyPr wrap="none" lIns="0" tIns="0" rIns="0" bIns="0" anchor="t" anchorCtr="0">
+            <a:bodyPr wrap="square" lIns="0" tIns="0" rIns="0" bIns="0" anchor="t" anchorCtr="0">
               <a:spAutoFit/>
             </a:bodyPr>
             <a:lstStyle/>
@@ -8476,6 +10626,14 @@
                 </a:rPr>
                 <a:t>教训：自洽 ≠ 对齐。</a:t>
               </a:r>
+              <a:endParaRPr lang="zh-CN" sz="900" b="1" dirty="0">
+                <a:solidFill>
+                  <a:schemeClr val="accent2"/>
+                </a:solidFill>
+                <a:latin typeface="+mn-lt"/>
+                <a:ea typeface="+mn-ea"/>
+                <a:cs typeface="+mn-cs"/>
+              </a:endParaRPr>
             </a:p>
           </p:txBody>
         </p:sp>
@@ -8487,8 +10645,8 @@
           </p:nvSpPr>
           <p:spPr>
             <a:xfrm>
-              <a:off x="4567238" y="3522345"/>
-              <a:ext cx="5582793" cy="176212"/>
+              <a:off x="4567238" y="3522346"/>
+              <a:ext cx="4785630" cy="276860"/>
             </a:xfrm>
             <a:prstGeom prst="rect">
               <a:avLst/>
@@ -8499,7 +10657,7 @@
             </a:ln>
           </p:spPr>
           <p:txBody>
-            <a:bodyPr wrap="none" lIns="0" tIns="0" rIns="0" bIns="0" anchor="t" anchorCtr="0">
+            <a:bodyPr wrap="square" lIns="0" tIns="0" rIns="0" bIns="0" anchor="t" anchorCtr="0">
               <a:spAutoFit/>
             </a:bodyPr>
             <a:lstStyle/>
@@ -8514,8 +10672,27 @@
                   <a:ea typeface="+mn-ea"/>
                   <a:cs typeface="+mn-cs"/>
                 </a:rPr>
-                <a:t>训练的优化方向（让模型自洽）跟最终目标（跟人类对齐）不是一回事。这个失败催生了锚相关性定律。</a:t>
-              </a:r>
+                <a:t>训练的优化方向（让模型自洽）跟最终目标（跟人类对齐）不是一回事。这个失败催生了锚定相关</a:t>
+              </a:r>
+              <a:r>
+                <a:rPr lang="zh-CN" sz="900" dirty="0">
+                  <a:solidFill>
+                    <a:srgbClr val="757575"/>
+                  </a:solidFill>
+                  <a:latin typeface="+mn-lt"/>
+                  <a:ea typeface="+mn-ea"/>
+                  <a:cs typeface="+mn-cs"/>
+                </a:rPr>
+                <a:t>想法。</a:t>
+              </a:r>
+              <a:endParaRPr lang="zh-CN" sz="900" dirty="0">
+                <a:solidFill>
+                  <a:srgbClr val="757575"/>
+                </a:solidFill>
+                <a:latin typeface="+mn-lt"/>
+                <a:ea typeface="+mn-ea"/>
+                <a:cs typeface="+mn-cs"/>
+              </a:endParaRPr>
             </a:p>
           </p:txBody>
         </p:sp>
@@ -8579,6 +10756,14 @@
               </a:rPr>
               <a:t>分数偏差无法根本消除</a:t>
             </a:r>
+            <a:endParaRPr lang="zh-CN" sz="1200" b="1" dirty="0">
+              <a:solidFill>
+                <a:srgbClr val="FFFFFF"/>
+              </a:solidFill>
+              <a:latin typeface="+mn-lt"/>
+              <a:ea typeface="+mn-ea"/>
+              <a:cs typeface="+mn-cs"/>
+            </a:endParaRPr>
           </a:p>
         </p:txBody>
       </p:sp>
@@ -8590,10 +10775,10 @@
         </p:nvGrpSpPr>
         <p:grpSpPr>
           <a:xfrm>
-            <a:off x="8186738" y="1998345"/>
-            <a:ext cx="5220873" cy="2033587"/>
+            <a:off x="8187055" y="1998345"/>
+            <a:ext cx="3693160" cy="2134232"/>
             <a:chOff x="8186738" y="1998345"/>
-            <a:chExt cx="5220873" cy="2033587"/>
+            <a:chExt cx="5220873" cy="2134235"/>
           </a:xfrm>
         </p:grpSpPr>
         <p:sp>
@@ -8605,7 +10790,7 @@
           <p:spPr>
             <a:xfrm>
               <a:off x="8186738" y="1998345"/>
-              <a:ext cx="4247007" cy="176212"/>
+              <a:ext cx="4247007" cy="276860"/>
             </a:xfrm>
             <a:prstGeom prst="rect">
               <a:avLst/>
@@ -8616,7 +10801,7 @@
             </a:ln>
           </p:spPr>
           <p:txBody>
-            <a:bodyPr wrap="none" lIns="0" tIns="0" rIns="0" bIns="0" anchor="t" anchorCtr="0">
+            <a:bodyPr wrap="square" lIns="0" tIns="0" rIns="0" bIns="0" anchor="t" anchorCtr="0">
               <a:spAutoFit/>
             </a:bodyPr>
             <a:lstStyle/>
@@ -8633,6 +10818,14 @@
                 </a:rPr>
                 <a:t>三轮实验下来，所有方法对 KonIQ 都"给分偏高"、对 SPAQ 都"给分偏低"。</a:t>
               </a:r>
+              <a:endParaRPr lang="zh-CN" sz="900" dirty="0">
+                <a:solidFill>
+                  <a:schemeClr val="dk1"/>
+                </a:solidFill>
+                <a:latin typeface="+mn-lt"/>
+                <a:ea typeface="+mn-ea"/>
+                <a:cs typeface="+mn-cs"/>
+              </a:endParaRPr>
             </a:p>
           </p:txBody>
         </p:sp>
@@ -8645,7 +10838,7 @@
           <p:spPr>
             <a:xfrm>
               <a:off x="8186738" y="2379345"/>
-              <a:ext cx="391173" cy="176212"/>
+              <a:ext cx="391173" cy="138430"/>
             </a:xfrm>
             <a:prstGeom prst="rect">
               <a:avLst/>
@@ -8656,7 +10849,7 @@
             </a:ln>
           </p:spPr>
           <p:txBody>
-            <a:bodyPr wrap="none" lIns="0" tIns="0" rIns="0" bIns="0" anchor="t" anchorCtr="0">
+            <a:bodyPr wrap="square" lIns="0" tIns="0" rIns="0" bIns="0" anchor="t" anchorCtr="0">
               <a:spAutoFit/>
             </a:bodyPr>
             <a:lstStyle/>
@@ -8673,6 +10866,14 @@
                 </a:rPr>
                 <a:t>原因：</a:t>
               </a:r>
+              <a:endParaRPr lang="zh-CN" sz="900" b="1" dirty="0">
+                <a:solidFill>
+                  <a:schemeClr val="accent1"/>
+                </a:solidFill>
+                <a:latin typeface="+mn-lt"/>
+                <a:ea typeface="+mn-ea"/>
+                <a:cs typeface="+mn-cs"/>
+              </a:endParaRPr>
             </a:p>
           </p:txBody>
         </p:sp>
@@ -8685,7 +10886,7 @@
           <p:spPr>
             <a:xfrm>
               <a:off x="8186738" y="2646045"/>
-              <a:ext cx="4540834" cy="176212"/>
+              <a:ext cx="4540834" cy="276860"/>
             </a:xfrm>
             <a:prstGeom prst="rect">
               <a:avLst/>
@@ -8696,7 +10897,7 @@
             </a:ln>
           </p:spPr>
           <p:txBody>
-            <a:bodyPr wrap="none" lIns="0" tIns="0" rIns="0" bIns="0" anchor="t" anchorCtr="0">
+            <a:bodyPr wrap="square" lIns="0" tIns="0" rIns="0" bIns="0" anchor="t" anchorCtr="0">
               <a:spAutoFit/>
             </a:bodyPr>
             <a:lstStyle/>
@@ -8713,6 +10914,14 @@
                 </a:rPr>
                 <a:t>模型看野生网图天然宽容（+0.2~0.6 分），看手机照片天然挑剔（−0.4~0.6 分）。</a:t>
               </a:r>
+              <a:endParaRPr lang="zh-CN" sz="900" dirty="0">
+                <a:solidFill>
+                  <a:schemeClr val="dk1"/>
+                </a:solidFill>
+                <a:latin typeface="+mn-lt"/>
+                <a:ea typeface="+mn-ea"/>
+                <a:cs typeface="+mn-cs"/>
+              </a:endParaRPr>
             </a:p>
           </p:txBody>
         </p:sp>
@@ -8725,7 +10934,7 @@
           <p:spPr>
             <a:xfrm>
               <a:off x="8186738" y="3027045"/>
-              <a:ext cx="4256113" cy="176212"/>
+              <a:ext cx="4256113" cy="276860"/>
             </a:xfrm>
             <a:prstGeom prst="rect">
               <a:avLst/>
@@ -8736,7 +10945,7 @@
             </a:ln>
           </p:spPr>
           <p:txBody>
-            <a:bodyPr wrap="none" lIns="0" tIns="0" rIns="0" bIns="0" anchor="t" anchorCtr="0">
+            <a:bodyPr wrap="square" lIns="0" tIns="0" rIns="0" bIns="0" anchor="t" anchorCtr="0">
               <a:spAutoFit/>
             </a:bodyPr>
             <a:lstStyle/>
@@ -8753,6 +10962,14 @@
                 </a:rPr>
                 <a:t>这种"内容依赖的偏见"幅度约 19 个百分点——真人只有 6 个百分点，差了三倍。</a:t>
               </a:r>
+              <a:endParaRPr lang="zh-CN" sz="900" dirty="0">
+                <a:solidFill>
+                  <a:schemeClr val="dk1"/>
+                </a:solidFill>
+                <a:latin typeface="+mn-lt"/>
+                <a:ea typeface="+mn-ea"/>
+                <a:cs typeface="+mn-cs"/>
+              </a:endParaRPr>
             </a:p>
           </p:txBody>
         </p:sp>
@@ -8765,7 +10982,7 @@
           <p:spPr>
             <a:xfrm>
               <a:off x="8186738" y="3427095"/>
-              <a:ext cx="4746803" cy="176212"/>
+              <a:ext cx="4746803" cy="276860"/>
             </a:xfrm>
             <a:prstGeom prst="rect">
               <a:avLst/>
@@ -8776,7 +10993,7 @@
             </a:ln>
           </p:spPr>
           <p:txBody>
-            <a:bodyPr wrap="none" lIns="0" tIns="0" rIns="0" bIns="0" anchor="t" anchorCtr="0">
+            <a:bodyPr wrap="square" lIns="0" tIns="0" rIns="0" bIns="0" anchor="t" anchorCtr="0">
               <a:spAutoFit/>
             </a:bodyPr>
             <a:lstStyle/>
@@ -8793,6 +11010,14 @@
                 </a:rPr>
                 <a:t>纠正它需要知道真人的平均分——但真人分被规则禁止用于调参。这是个原则性的天花板。</a:t>
               </a:r>
+              <a:endParaRPr lang="zh-CN" sz="900" dirty="0">
+                <a:solidFill>
+                  <a:schemeClr val="dk1"/>
+                </a:solidFill>
+                <a:latin typeface="+mn-lt"/>
+                <a:ea typeface="+mn-ea"/>
+                <a:cs typeface="+mn-cs"/>
+              </a:endParaRPr>
             </a:p>
           </p:txBody>
         </p:sp>
@@ -8805,7 +11030,7 @@
           <p:spPr>
             <a:xfrm>
               <a:off x="8186738" y="3855720"/>
-              <a:ext cx="5220873" cy="176212"/>
+              <a:ext cx="5220873" cy="276860"/>
             </a:xfrm>
             <a:prstGeom prst="rect">
               <a:avLst/>
@@ -8816,7 +11041,7 @@
             </a:ln>
           </p:spPr>
           <p:txBody>
-            <a:bodyPr wrap="none" lIns="0" tIns="0" rIns="0" bIns="0" anchor="t" anchorCtr="0">
+            <a:bodyPr wrap="square" lIns="0" tIns="0" rIns="0" bIns="0" anchor="t" anchorCtr="0">
               <a:spAutoFit/>
             </a:bodyPr>
             <a:lstStyle/>
@@ -8833,6 +11058,14 @@
                 </a:rPr>
                 <a:t>好消息是排名不受影响——KonIQ 排名准确率从 0.577 涨到 0.734，说明"谁比谁好"判断对了。</a:t>
               </a:r>
+              <a:endParaRPr lang="zh-CN" sz="900" dirty="0">
+                <a:solidFill>
+                  <a:srgbClr val="757575"/>
+                </a:solidFill>
+                <a:latin typeface="+mn-lt"/>
+                <a:ea typeface="+mn-ea"/>
+                <a:cs typeface="+mn-cs"/>
+              </a:endParaRPr>
             </a:p>
           </p:txBody>
         </p:sp>
@@ -8896,6 +11129,14 @@
               </a:rPr>
               <a:t>三条线索指向同一个结论：</a:t>
             </a:r>
+            <a:endParaRPr lang="zh-CN" sz="1120" b="1" dirty="0">
+              <a:solidFill>
+                <a:schemeClr val="accent1"/>
+              </a:solidFill>
+              <a:latin typeface="+mn-lt"/>
+              <a:ea typeface="+mn-ea"/>
+              <a:cs typeface="+mn-cs"/>
+            </a:endParaRPr>
           </a:p>
         </p:txBody>
       </p:sp>
@@ -8936,6 +11177,14 @@
               </a:rPr>
               <a:t>零训练自监督 IQA 的上限，由你用来监督模型的信号跟真实目标的相关性决定——而不是模型本身的能力。</a:t>
             </a:r>
+            <a:endParaRPr lang="zh-CN" sz="1050" b="1" dirty="0">
+              <a:solidFill>
+                <a:schemeClr val="accent2"/>
+              </a:solidFill>
+              <a:latin typeface="+mn-lt"/>
+              <a:ea typeface="+mn-ea"/>
+              <a:cs typeface="+mn-cs"/>
+            </a:endParaRPr>
           </a:p>
         </p:txBody>
       </p:sp>
@@ -8976,6 +11225,14 @@
               </a:rPr>
               <a:t>下一轮我们用预注册实验定量验证了这个命题，再下一轮用它做最大化放大。</a:t>
             </a:r>
+            <a:endParaRPr lang="zh-CN" sz="900" dirty="0">
+              <a:solidFill>
+                <a:srgbClr val="757575"/>
+              </a:solidFill>
+              <a:latin typeface="+mn-lt"/>
+              <a:ea typeface="+mn-ea"/>
+              <a:cs typeface="+mn-cs"/>
+            </a:endParaRPr>
           </a:p>
         </p:txBody>
       </p:sp>
@@ -8984,9 +11241,18 @@
   <p:clrMapOvr>
     <a:masterClrMapping/>
   </p:clrMapOvr>
-  <p:transition xmlns:p14="http://schemas.microsoft.com/office/powerpoint/2010/main" p14:dur="400">
-    <p:fade/>
-  </p:transition>
+  <mc:AlternateContent xmlns:mc="http://schemas.openxmlformats.org/markup-compatibility/2006">
+    <mc:Choice xmlns:p14="http://schemas.microsoft.com/office/powerpoint/2010/main" Requires="p14">
+      <p:transition p14:dur="400">
+        <p:fade/>
+      </p:transition>
+    </mc:Choice>
+    <mc:Fallback>
+      <p:transition>
+        <p:fade/>
+      </p:transition>
+    </mc:Fallback>
+  </mc:AlternateContent>
 </p:sld>
 </file>
 
@@ -9068,12 +11334,20 @@
                 <a:solidFill>
                   <a:srgbClr val="5A6A85"/>
                 </a:solidFill>
-                <a:latin typeface="Arial"/>
-                <a:ea typeface="Arial"/>
-                <a:cs typeface="Arial"/>
+                <a:latin typeface="Arial" panose="020B0604020202020204"/>
+                <a:ea typeface="Arial" panose="020B0604020202020204"/>
+                <a:cs typeface="Arial" panose="020B0604020202020204"/>
               </a:rPr>
               <a:t>9 / 11</a:t>
             </a:r>
+            <a:endParaRPr lang="en-US" sz="750" dirty="0">
+              <a:solidFill>
+                <a:srgbClr val="5A6A85"/>
+              </a:solidFill>
+              <a:latin typeface="Arial" panose="020B0604020202020204"/>
+              <a:ea typeface="Arial" panose="020B0604020202020204"/>
+              <a:cs typeface="Arial" panose="020B0604020202020204"/>
+            </a:endParaRPr>
           </a:p>
         </p:txBody>
       </p:sp>
@@ -9114,6 +11388,14 @@
               </a:rPr>
               <a:t>锚相关性定律：三轮完整闭合</a:t>
             </a:r>
+            <a:endParaRPr lang="zh-CN" sz="1950" b="1" dirty="0">
+              <a:solidFill>
+                <a:srgbClr val="FFFFFF"/>
+              </a:solidFill>
+              <a:latin typeface="+mn-lt"/>
+              <a:ea typeface="+mn-ea"/>
+              <a:cs typeface="+mn-cs"/>
+            </a:endParaRPr>
           </a:p>
         </p:txBody>
       </p:sp>
@@ -9154,6 +11436,14 @@
               </a:rPr>
               <a:t>从一个失败实验到一条可验证的定律，再到跨模型泛化 — 贯穿全项目的核心线索</a:t>
             </a:r>
+            <a:endParaRPr lang="zh-CN" sz="1050" dirty="0">
+              <a:solidFill>
+                <a:srgbClr val="7B8BA8"/>
+              </a:solidFill>
+              <a:latin typeface="+mn-lt"/>
+              <a:ea typeface="+mn-ea"/>
+              <a:cs typeface="+mn-cs"/>
+            </a:endParaRPr>
           </a:p>
         </p:txBody>
       </p:sp>
@@ -9238,6 +11528,14 @@
               </a:rPr>
               <a:t>第一轮 · 发现</a:t>
             </a:r>
+            <a:endParaRPr lang="zh-CN" sz="1500" b="1" dirty="0">
+              <a:solidFill>
+                <a:schemeClr val="accent2"/>
+              </a:solidFill>
+              <a:latin typeface="+mn-lt"/>
+              <a:ea typeface="+mn-ea"/>
+              <a:cs typeface="+mn-cs"/>
+            </a:endParaRPr>
           </a:p>
         </p:txBody>
       </p:sp>
@@ -9278,6 +11576,14 @@
               </a:rPr>
               <a:t>我们花 ¥69 训练了一个自进化规则库，内部指标全在改善，但最终评分几乎没变。</a:t>
             </a:r>
+            <a:endParaRPr lang="zh-CN" sz="1050" dirty="0">
+              <a:solidFill>
+                <a:srgbClr val="FFFFFF"/>
+              </a:solidFill>
+              <a:latin typeface="+mn-lt"/>
+              <a:ea typeface="+mn-ea"/>
+              <a:cs typeface="+mn-cs"/>
+            </a:endParaRPr>
           </a:p>
         </p:txBody>
       </p:sp>
@@ -9318,6 +11624,14 @@
               </a:rPr>
               <a:t>原因：规则库的优化目标（让模型自洽）跟最终目标（跟人类评分对齐）不是一回事。同时发现让五个同源专家互相加权也几乎没用。</a:t>
             </a:r>
+            <a:endParaRPr lang="zh-CN" sz="980" dirty="0">
+              <a:solidFill>
+                <a:srgbClr val="C3C2B7"/>
+              </a:solidFill>
+              <a:latin typeface="+mn-lt"/>
+              <a:ea typeface="+mn-ea"/>
+              <a:cs typeface="+mn-cs"/>
+            </a:endParaRPr>
           </a:p>
         </p:txBody>
       </p:sp>
@@ -9358,6 +11672,14 @@
               </a:rPr>
               <a:t>→ 提出假设：自监督的上限不由模型能力决定，而由你用来监督它的信号跟真实目标的相关性决定。</a:t>
             </a:r>
+            <a:endParaRPr lang="zh-CN" sz="980" dirty="0">
+              <a:solidFill>
+                <a:srgbClr val="C3C2B7"/>
+              </a:solidFill>
+              <a:latin typeface="+mn-lt"/>
+              <a:ea typeface="+mn-ea"/>
+              <a:cs typeface="+mn-cs"/>
+            </a:endParaRPr>
           </a:p>
         </p:txBody>
       </p:sp>
@@ -9442,6 +11764,14 @@
               </a:rPr>
               <a:t>第二轮 · 验证</a:t>
             </a:r>
+            <a:endParaRPr lang="zh-CN" sz="1500" b="1" dirty="0">
+              <a:solidFill>
+                <a:schemeClr val="accent2"/>
+              </a:solidFill>
+              <a:latin typeface="+mn-lt"/>
+              <a:ea typeface="+mn-ea"/>
+              <a:cs typeface="+mn-cs"/>
+            </a:endParaRPr>
           </a:p>
         </p:txBody>
       </p:sp>
@@ -9482,6 +11812,14 @@
               </a:rPr>
               <a:t>关键实验：同一套融合代码，只把监督信号从"合成失真排序"换成"大模型两两比较的排序"，</a:t>
             </a:r>
+            <a:endParaRPr lang="zh-CN" sz="1050" dirty="0">
+              <a:solidFill>
+                <a:srgbClr val="FFFFFF"/>
+              </a:solidFill>
+              <a:latin typeface="+mn-lt"/>
+              <a:ea typeface="+mn-ea"/>
+              <a:cs typeface="+mn-cs"/>
+            </a:endParaRPr>
           </a:p>
         </p:txBody>
       </p:sp>
@@ -9522,6 +11860,14 @@
               </a:rPr>
               <a:t>收益从 +0.007 跳到 +0.062 — 近十倍。同一机制、同一代码、仅信号不同。</a:t>
             </a:r>
+            <a:endParaRPr lang="zh-CN" sz="1050" dirty="0">
+              <a:solidFill>
+                <a:srgbClr val="FFFFFF"/>
+              </a:solidFill>
+              <a:latin typeface="+mn-lt"/>
+              <a:ea typeface="+mn-ea"/>
+              <a:cs typeface="+mn-cs"/>
+            </a:endParaRPr>
           </a:p>
         </p:txBody>
       </p:sp>
@@ -9562,6 +11908,14 @@
               </a:rPr>
               <a:t>→ 假设升级为可定量验证的定律。写进预注册文档，冻结后再读 MOS 检验。</a:t>
             </a:r>
+            <a:endParaRPr lang="zh-CN" sz="980" dirty="0">
+              <a:solidFill>
+                <a:srgbClr val="C3C2B7"/>
+              </a:solidFill>
+              <a:latin typeface="+mn-lt"/>
+              <a:ea typeface="+mn-ea"/>
+              <a:cs typeface="+mn-cs"/>
+            </a:endParaRPr>
           </a:p>
         </p:txBody>
       </p:sp>
@@ -9646,6 +12000,14 @@
               </a:rPr>
               <a:t>第三轮 · 放大 + 跨模型迁移</a:t>
             </a:r>
+            <a:endParaRPr lang="zh-CN" sz="1500" b="1" dirty="0">
+              <a:solidFill>
+                <a:schemeClr val="accent2"/>
+              </a:solidFill>
+              <a:latin typeface="+mn-lt"/>
+              <a:ea typeface="+mn-ea"/>
+              <a:cs typeface="+mn-cs"/>
+            </a:endParaRPr>
           </a:p>
         </p:txBody>
       </p:sp>
@@ -9686,6 +12048,14 @@
               </a:rPr>
               <a:t>锦标赛从几千场扩到三万二千场；用 21 个参数的门控矩阵逐图为三个专家分配话语权；</a:t>
             </a:r>
+            <a:endParaRPr lang="zh-CN" sz="1050" dirty="0">
+              <a:solidFill>
+                <a:srgbClr val="FFFFFF"/>
+              </a:solidFill>
+              <a:latin typeface="+mn-lt"/>
+              <a:ea typeface="+mn-ea"/>
+              <a:cs typeface="+mn-cs"/>
+            </a:endParaRPr>
           </a:p>
         </p:txBody>
       </p:sp>
@@ -9726,6 +12096,14 @@
               </a:rPr>
               <a:t>训练出的矩阵套到另一个模型上 — 零额外调用 — 排序能力反超原主。</a:t>
             </a:r>
+            <a:endParaRPr lang="zh-CN" sz="1050" dirty="0">
+              <a:solidFill>
+                <a:srgbClr val="FFFFFF"/>
+              </a:solidFill>
+              <a:latin typeface="+mn-lt"/>
+              <a:ea typeface="+mn-ea"/>
+              <a:cs typeface="+mn-cs"/>
+            </a:endParaRPr>
           </a:p>
         </p:txBody>
       </p:sp>
@@ -9766,6 +12144,14 @@
               </a:rPr>
               <a:t>→ 定律的去模型依赖性被实证：信号质量高于模型规模。</a:t>
             </a:r>
+            <a:endParaRPr lang="zh-CN" sz="980" dirty="0">
+              <a:solidFill>
+                <a:srgbClr val="C3C2B7"/>
+              </a:solidFill>
+              <a:latin typeface="+mn-lt"/>
+              <a:ea typeface="+mn-ea"/>
+              <a:cs typeface="+mn-cs"/>
+            </a:endParaRPr>
           </a:p>
         </p:txBody>
       </p:sp>
@@ -9774,9 +12160,18 @@
   <p:clrMapOvr>
     <a:masterClrMapping/>
   </p:clrMapOvr>
-  <p:transition xmlns:p14="http://schemas.microsoft.com/office/powerpoint/2010/main" p14:dur="400">
-    <p:fade/>
-  </p:transition>
+  <mc:AlternateContent xmlns:mc="http://schemas.openxmlformats.org/markup-compatibility/2006">
+    <mc:Choice xmlns:p14="http://schemas.microsoft.com/office/powerpoint/2010/main" Requires="p14">
+      <p:transition p14:dur="400">
+        <p:fade/>
+      </p:transition>
+    </mc:Choice>
+    <mc:Fallback>
+      <p:transition>
+        <p:fade/>
+      </p:transition>
+    </mc:Fallback>
+  </mc:AlternateContent>
 </p:sld>
 </file>
 
@@ -10096,6 +12491,269 @@
       </a:style>
     </a:lnDef>
   </a:objectDefaults>
-  <a:extraClrSchemeLst/>
+  <a:extLst>
+    <a:ext uri="{05A4C25C-085E-4340-85A3-A5531E510DB2}">
+      <thm15:themeFamily xmlns:thm15="http://schemas.microsoft.com/office/thememl/2012/main" name="Office Theme" id="{62F939B6-93AF-4DB8-9C6B-D6C7DFDC589F}" vid="{4A3C46E8-61CC-4603-A589-7422A47A8E4A}"/>
+    </a:ext>
+  </a:extLst>
+</a:theme>
+</file>
+
+<file path=ppt/theme/theme2.xml><?xml version="1.0" encoding="utf-8"?>
+<a:theme xmlns:a="http://schemas.openxmlformats.org/drawingml/2006/main" name="Office 主题">
+  <a:themeElements>
+    <a:clrScheme name="Office">
+      <a:dk1>
+        <a:sysClr val="windowText" lastClr="000000"/>
+      </a:dk1>
+      <a:lt1>
+        <a:sysClr val="window" lastClr="FFFFFF"/>
+      </a:lt1>
+      <a:dk2>
+        <a:srgbClr val="44546A"/>
+      </a:dk2>
+      <a:lt2>
+        <a:srgbClr val="E7E6E6"/>
+      </a:lt2>
+      <a:accent1>
+        <a:srgbClr val="5B9BD5"/>
+      </a:accent1>
+      <a:accent2>
+        <a:srgbClr val="ED7D31"/>
+      </a:accent2>
+      <a:accent3>
+        <a:srgbClr val="A5A5A5"/>
+      </a:accent3>
+      <a:accent4>
+        <a:srgbClr val="FFC000"/>
+      </a:accent4>
+      <a:accent5>
+        <a:srgbClr val="4472C4"/>
+      </a:accent5>
+      <a:accent6>
+        <a:srgbClr val="70AD47"/>
+      </a:accent6>
+      <a:hlink>
+        <a:srgbClr val="0563C1"/>
+      </a:hlink>
+      <a:folHlink>
+        <a:srgbClr val="954F72"/>
+      </a:folHlink>
+    </a:clrScheme>
+    <a:fontScheme name="Office">
+      <a:majorFont>
+        <a:latin typeface="Calibri Light"/>
+        <a:ea typeface=""/>
+        <a:cs typeface=""/>
+        <a:font script="Jpan" typeface="ＭＳ Ｐゴシック"/>
+        <a:font script="Hang" typeface="맑은 고딕"/>
+        <a:font script="Hans" typeface="宋体"/>
+        <a:font script="Hant" typeface="新細明體"/>
+        <a:font script="Arab" typeface="Times New Roman"/>
+        <a:font script="Hebr" typeface="Times New Roman"/>
+        <a:font script="Thai" typeface="Angsana New"/>
+        <a:font script="Ethi" typeface="Nyala"/>
+        <a:font script="Beng" typeface="Vrinda"/>
+        <a:font script="Gujr" typeface="Shruti"/>
+        <a:font script="Khmr" typeface="MoolBoran"/>
+        <a:font script="Knda" typeface="Tunga"/>
+        <a:font script="Guru" typeface="Raavi"/>
+        <a:font script="Cans" typeface="Euphemia"/>
+        <a:font script="Cher" typeface="Plantagenet Cherokee"/>
+        <a:font script="Yiii" typeface="Microsoft Yi Baiti"/>
+        <a:font script="Tibt" typeface="Microsoft Himalaya"/>
+        <a:font script="Thaa" typeface="MV Boli"/>
+        <a:font script="Deva" typeface="Mangal"/>
+        <a:font script="Telu" typeface="Gautami"/>
+        <a:font script="Taml" typeface="Latha"/>
+        <a:font script="Syrc" typeface="Estrangelo Edessa"/>
+        <a:font script="Orya" typeface="Kalinga"/>
+        <a:font script="Mlym" typeface="Kartika"/>
+        <a:font script="Laoo" typeface="DokChampa"/>
+        <a:font script="Sinh" typeface="Iskoola Pota"/>
+        <a:font script="Mong" typeface="Mongolian Baiti"/>
+        <a:font script="Viet" typeface="Times New Roman"/>
+        <a:font script="Uigh" typeface="Microsoft Uighur"/>
+        <a:font script="Geor" typeface="Sylfaen"/>
+      </a:majorFont>
+      <a:minorFont>
+        <a:latin typeface="Calibri"/>
+        <a:ea typeface=""/>
+        <a:cs typeface=""/>
+        <a:font script="Jpan" typeface="ＭＳ Ｐゴシック"/>
+        <a:font script="Hang" typeface="맑은 고딕"/>
+        <a:font script="Hans" typeface="宋体"/>
+        <a:font script="Hant" typeface="新細明體"/>
+        <a:font script="Arab" typeface="Arial"/>
+        <a:font script="Hebr" typeface="Arial"/>
+        <a:font script="Thai" typeface="Cordia New"/>
+        <a:font script="Ethi" typeface="Nyala"/>
+        <a:font script="Beng" typeface="Vrinda"/>
+        <a:font script="Gujr" typeface="Shruti"/>
+        <a:font script="Khmr" typeface="DaunPenh"/>
+        <a:font script="Knda" typeface="Tunga"/>
+        <a:font script="Guru" typeface="Raavi"/>
+        <a:font script="Cans" typeface="Euphemia"/>
+        <a:font script="Cher" typeface="Plantagenet Cherokee"/>
+        <a:font script="Yiii" typeface="Microsoft Yi Baiti"/>
+        <a:font script="Tibt" typeface="Microsoft Himalaya"/>
+        <a:font script="Thaa" typeface="MV Boli"/>
+        <a:font script="Deva" typeface="Mangal"/>
+        <a:font script="Telu" typeface="Gautami"/>
+        <a:font script="Taml" typeface="Latha"/>
+        <a:font script="Syrc" typeface="Estrangelo Edessa"/>
+        <a:font script="Orya" typeface="Kalinga"/>
+        <a:font script="Mlym" typeface="Kartika"/>
+        <a:font script="Laoo" typeface="DokChampa"/>
+        <a:font script="Sinh" typeface="Iskoola Pota"/>
+        <a:font script="Mong" typeface="Mongolian Baiti"/>
+        <a:font script="Viet" typeface="Arial"/>
+        <a:font script="Uigh" typeface="Microsoft Uighur"/>
+        <a:font script="Geor" typeface="Sylfaen"/>
+      </a:minorFont>
+    </a:fontScheme>
+    <a:fmtScheme name="Office">
+      <a:fillStyleLst>
+        <a:solidFill>
+          <a:schemeClr val="phClr"/>
+        </a:solidFill>
+        <a:gradFill rotWithShape="1">
+          <a:gsLst>
+            <a:gs pos="0">
+              <a:schemeClr val="phClr">
+                <a:lumMod val="110000"/>
+                <a:satMod val="105000"/>
+                <a:tint val="67000"/>
+              </a:schemeClr>
+            </a:gs>
+            <a:gs pos="50000">
+              <a:schemeClr val="phClr">
+                <a:lumMod val="105000"/>
+                <a:satMod val="103000"/>
+                <a:tint val="73000"/>
+              </a:schemeClr>
+            </a:gs>
+            <a:gs pos="100000">
+              <a:schemeClr val="phClr">
+                <a:lumMod val="105000"/>
+                <a:satMod val="109000"/>
+                <a:tint val="81000"/>
+              </a:schemeClr>
+            </a:gs>
+          </a:gsLst>
+          <a:lin ang="5400000" scaled="0"/>
+        </a:gradFill>
+        <a:gradFill rotWithShape="1">
+          <a:gsLst>
+            <a:gs pos="0">
+              <a:schemeClr val="phClr">
+                <a:satMod val="103000"/>
+                <a:lumMod val="102000"/>
+                <a:tint val="94000"/>
+              </a:schemeClr>
+            </a:gs>
+            <a:gs pos="50000">
+              <a:schemeClr val="phClr">
+                <a:satMod val="110000"/>
+                <a:lumMod val="100000"/>
+                <a:shade val="100000"/>
+              </a:schemeClr>
+            </a:gs>
+            <a:gs pos="100000">
+              <a:schemeClr val="phClr">
+                <a:lumMod val="99000"/>
+                <a:satMod val="120000"/>
+                <a:shade val="78000"/>
+              </a:schemeClr>
+            </a:gs>
+          </a:gsLst>
+          <a:lin ang="5400000" scaled="0"/>
+        </a:gradFill>
+      </a:fillStyleLst>
+      <a:lnStyleLst>
+        <a:ln w="6350" cap="flat" cmpd="sng" algn="ctr">
+          <a:solidFill>
+            <a:schemeClr val="phClr"/>
+          </a:solidFill>
+          <a:prstDash val="solid"/>
+          <a:miter lim="800000"/>
+        </a:ln>
+        <a:ln w="12700" cap="flat" cmpd="sng" algn="ctr">
+          <a:solidFill>
+            <a:schemeClr val="phClr"/>
+          </a:solidFill>
+          <a:prstDash val="solid"/>
+          <a:miter lim="800000"/>
+        </a:ln>
+        <a:ln w="19050" cap="flat" cmpd="sng" algn="ctr">
+          <a:solidFill>
+            <a:schemeClr val="phClr"/>
+          </a:solidFill>
+          <a:prstDash val="solid"/>
+          <a:miter lim="800000"/>
+        </a:ln>
+      </a:lnStyleLst>
+      <a:effectStyleLst>
+        <a:effectStyle>
+          <a:effectLst/>
+        </a:effectStyle>
+        <a:effectStyle>
+          <a:effectLst/>
+        </a:effectStyle>
+        <a:effectStyle>
+          <a:effectLst>
+            <a:outerShdw blurRad="57150" dist="19050" dir="5400000" algn="ctr" rotWithShape="0">
+              <a:srgbClr val="000000">
+                <a:alpha val="63000"/>
+              </a:srgbClr>
+            </a:outerShdw>
+          </a:effectLst>
+        </a:effectStyle>
+      </a:effectStyleLst>
+      <a:bgFillStyleLst>
+        <a:solidFill>
+          <a:schemeClr val="phClr"/>
+        </a:solidFill>
+        <a:solidFill>
+          <a:schemeClr val="phClr">
+            <a:tint val="95000"/>
+            <a:satMod val="170000"/>
+          </a:schemeClr>
+        </a:solidFill>
+        <a:gradFill rotWithShape="1">
+          <a:gsLst>
+            <a:gs pos="0">
+              <a:schemeClr val="phClr">
+                <a:tint val="93000"/>
+                <a:satMod val="150000"/>
+                <a:shade val="98000"/>
+                <a:lumMod val="102000"/>
+              </a:schemeClr>
+            </a:gs>
+            <a:gs pos="50000">
+              <a:schemeClr val="phClr">
+                <a:tint val="98000"/>
+                <a:satMod val="130000"/>
+                <a:shade val="90000"/>
+                <a:lumMod val="103000"/>
+              </a:schemeClr>
+            </a:gs>
+            <a:gs pos="100000">
+              <a:schemeClr val="phClr">
+                <a:shade val="63000"/>
+                <a:satMod val="120000"/>
+              </a:schemeClr>
+            </a:gs>
+          </a:gsLst>
+          <a:lin ang="5400000" scaled="0"/>
+        </a:gradFill>
+      </a:bgFillStyleLst>
+    </a:fmtScheme>
+  </a:themeElements>
+  <a:extLst>
+    <a:ext uri="{05A4C25C-085E-4340-85A3-A5531E510DB2}">
+      <thm15:themeFamily xmlns:thm15="http://schemas.microsoft.com/office/thememl/2012/main" name="Office Theme" id="{62F939B6-93AF-4DB8-9C6B-D6C7DFDC589F}" vid="{4A3C46E8-61CC-4603-A589-7422A47A8E4A}"/>
+    </a:ext>
+  </a:extLst>
 </a:theme>
 </file>